--- a/ShraddhaTiwari - Final Presentation.pptx
+++ b/ShraddhaTiwari - Final Presentation.pptx
@@ -25,39 +25,32 @@
     <p:sldId id="276" r:id="rId18"/>
     <p:sldId id="269" r:id="rId19"/>
     <p:sldId id="270" r:id="rId20"/>
-    <p:sldId id="271" r:id="rId21"/>
-    <p:sldId id="275" r:id="rId22"/>
-    <p:sldId id="272" r:id="rId23"/>
+    <p:sldId id="277" r:id="rId21"/>
+    <p:sldId id="278" r:id="rId22"/>
+    <p:sldId id="279" r:id="rId23"/>
+    <p:sldId id="280" r:id="rId24"/>
+    <p:sldId id="271" r:id="rId25"/>
+    <p:sldId id="275" r:id="rId26"/>
+    <p:sldId id="272" r:id="rId27"/>
   </p:sldIdLst>
   <p:sldSz cx="12192000" cy="6858000"/>
   <p:notesSz cx="6858000" cy="9144000"/>
   <p:embeddedFontLst>
     <p:embeddedFont>
       <p:font typeface="Calibri" panose="020F0502020204030204"/>
-      <p:regular r:id="rId27"/>
+      <p:regular r:id="rId31"/>
+    </p:embeddedFont>
+    <p:embeddedFont>
+      <p:font typeface="Montserrat" panose="00000500000000000000" charset="0"/>
+      <p:regular r:id="rId32"/>
     </p:embeddedFont>
     <p:embeddedFont>
       <p:font typeface="Montserrat" panose="00000500000000000000"/>
-      <p:regular r:id="rId28"/>
-    </p:embeddedFont>
-    <p:embeddedFont>
-      <p:font typeface="Calibri" panose="020F0502020204030204" pitchFamily="34" charset="0"/>
-      <p:regular r:id="rId29"/>
-      <p:bold r:id="rId30"/>
-      <p:italic r:id="rId31"/>
-      <p:boldItalic r:id="rId32"/>
+      <p:regular r:id="rId33"/>
     </p:embeddedFont>
     <p:embeddedFont>
       <p:font typeface="Calibri" panose="020F0502020204030204" pitchFamily="34" charset="-122"/>
-      <p:regular r:id="rId33"/>
-    </p:embeddedFont>
-    <p:embeddedFont>
-      <p:font typeface="Calibri" panose="020F0502020204030204" pitchFamily="34" charset="-120"/>
       <p:regular r:id="rId34"/>
-    </p:embeddedFont>
-    <p:embeddedFont>
-      <p:font typeface="Montserrat" panose="00000500000000000000" charset="0"/>
-      <p:regular r:id="rId35"/>
     </p:embeddedFont>
   </p:embeddedFontLst>
   <p:defaultTextStyle>
@@ -3343,6 +3336,474 @@
 </file>
 
 <file path=ppt/notesSlides/notesSlide20.xml><?xml version="1.0" encoding="utf-8"?>
+<p:notes xmlns:a="http://schemas.openxmlformats.org/drawingml/2006/main" xmlns:r="http://schemas.openxmlformats.org/officeDocument/2006/relationships" xmlns:p="http://schemas.openxmlformats.org/presentationml/2006/main" showMasterPhAnim="0" showMasterSp="0">
+  <p:cSld>
+    <p:spTree>
+      <p:nvGrpSpPr>
+        <p:cNvPr id="219" name="Shape 219"/>
+        <p:cNvGrpSpPr/>
+        <p:nvPr/>
+      </p:nvGrpSpPr>
+      <p:grpSpPr>
+        <a:xfrm>
+          <a:off x="0" y="0"/>
+          <a:ext cx="0" cy="0"/>
+          <a:chOff x="0" y="0"/>
+          <a:chExt cx="0" cy="0"/>
+        </a:xfrm>
+      </p:grpSpPr>
+      <p:sp>
+        <p:nvSpPr>
+          <p:cNvPr id="220" name="Google Shape;220;p16:notes"/>
+          <p:cNvSpPr txBox="1"/>
+          <p:nvPr>
+            <p:ph type="body" idx="1"/>
+          </p:nvPr>
+        </p:nvSpPr>
+        <p:spPr>
+          <a:xfrm>
+            <a:off x="685800" y="4400550"/>
+            <a:ext cx="5486400" cy="3600450"/>
+          </a:xfrm>
+          <a:prstGeom prst="rect">
+            <a:avLst/>
+          </a:prstGeom>
+          <a:noFill/>
+          <a:ln>
+            <a:noFill/>
+          </a:ln>
+        </p:spPr>
+        <p:txBody>
+          <a:bodyPr spcFirstLastPara="1" wrap="square" lIns="91425" tIns="45700" rIns="91425" bIns="45700" anchor="t" anchorCtr="0">
+            <a:noAutofit/>
+          </a:bodyPr>
+          <a:lstStyle/>
+          <a:p>
+            <a:pPr marL="0" lvl="0" indent="0" algn="l" rtl="0">
+              <a:lnSpc>
+                <a:spcPct val="100000"/>
+              </a:lnSpc>
+              <a:spcBef>
+                <a:spcPts val="0"/>
+              </a:spcBef>
+              <a:spcAft>
+                <a:spcPts val="0"/>
+              </a:spcAft>
+              <a:buSzPts val="1400"/>
+              <a:buNone/>
+            </a:pPr>
+          </a:p>
+        </p:txBody>
+      </p:sp>
+      <p:sp>
+        <p:nvSpPr>
+          <p:cNvPr id="221" name="Google Shape;221;p16:notes"/>
+          <p:cNvSpPr/>
+          <p:nvPr>
+            <p:ph type="sldImg" idx="2"/>
+          </p:nvPr>
+        </p:nvSpPr>
+        <p:spPr>
+          <a:xfrm>
+            <a:off x="685800" y="1143000"/>
+            <a:ext cx="5486400" cy="3086100"/>
+          </a:xfrm>
+          <a:custGeom>
+            <a:avLst/>
+            <a:gdLst/>
+            <a:ahLst/>
+            <a:cxnLst/>
+            <a:rect l="l" t="t" r="r" b="b"/>
+            <a:pathLst>
+              <a:path w="120000" h="120000" extrusionOk="0">
+                <a:moveTo>
+                  <a:pt x="0" y="0"/>
+                </a:moveTo>
+                <a:lnTo>
+                  <a:pt x="120000" y="0"/>
+                </a:lnTo>
+                <a:lnTo>
+                  <a:pt x="120000" y="120000"/>
+                </a:lnTo>
+                <a:lnTo>
+                  <a:pt x="0" y="120000"/>
+                </a:lnTo>
+                <a:close/>
+              </a:path>
+            </a:pathLst>
+          </a:custGeom>
+          <a:noFill/>
+          <a:ln w="12700" cap="flat" cmpd="sng">
+            <a:solidFill>
+              <a:srgbClr val="000000"/>
+            </a:solidFill>
+            <a:prstDash val="solid"/>
+            <a:round/>
+            <a:headEnd type="none" w="sm" len="sm"/>
+            <a:tailEnd type="none" w="sm" len="sm"/>
+          </a:ln>
+        </p:spPr>
+      </p:sp>
+    </p:spTree>
+  </p:cSld>
+  <p:clrMapOvr>
+    <a:masterClrMapping/>
+  </p:clrMapOvr>
+</p:notes>
+</file>
+
+<file path=ppt/notesSlides/notesSlide21.xml><?xml version="1.0" encoding="utf-8"?>
+<p:notes xmlns:a="http://schemas.openxmlformats.org/drawingml/2006/main" xmlns:r="http://schemas.openxmlformats.org/officeDocument/2006/relationships" xmlns:p="http://schemas.openxmlformats.org/presentationml/2006/main" showMasterPhAnim="0" showMasterSp="0">
+  <p:cSld>
+    <p:spTree>
+      <p:nvGrpSpPr>
+        <p:cNvPr id="219" name="Shape 219"/>
+        <p:cNvGrpSpPr/>
+        <p:nvPr/>
+      </p:nvGrpSpPr>
+      <p:grpSpPr>
+        <a:xfrm>
+          <a:off x="0" y="0"/>
+          <a:ext cx="0" cy="0"/>
+          <a:chOff x="0" y="0"/>
+          <a:chExt cx="0" cy="0"/>
+        </a:xfrm>
+      </p:grpSpPr>
+      <p:sp>
+        <p:nvSpPr>
+          <p:cNvPr id="220" name="Google Shape;220;p16:notes"/>
+          <p:cNvSpPr txBox="1"/>
+          <p:nvPr>
+            <p:ph type="body" idx="1"/>
+          </p:nvPr>
+        </p:nvSpPr>
+        <p:spPr>
+          <a:xfrm>
+            <a:off x="685800" y="4400550"/>
+            <a:ext cx="5486400" cy="3600450"/>
+          </a:xfrm>
+          <a:prstGeom prst="rect">
+            <a:avLst/>
+          </a:prstGeom>
+          <a:noFill/>
+          <a:ln>
+            <a:noFill/>
+          </a:ln>
+        </p:spPr>
+        <p:txBody>
+          <a:bodyPr spcFirstLastPara="1" wrap="square" lIns="91425" tIns="45700" rIns="91425" bIns="45700" anchor="t" anchorCtr="0">
+            <a:noAutofit/>
+          </a:bodyPr>
+          <a:lstStyle/>
+          <a:p>
+            <a:pPr marL="0" lvl="0" indent="0" algn="l" rtl="0">
+              <a:lnSpc>
+                <a:spcPct val="100000"/>
+              </a:lnSpc>
+              <a:spcBef>
+                <a:spcPts val="0"/>
+              </a:spcBef>
+              <a:spcAft>
+                <a:spcPts val="0"/>
+              </a:spcAft>
+              <a:buSzPts val="1400"/>
+              <a:buNone/>
+            </a:pPr>
+          </a:p>
+        </p:txBody>
+      </p:sp>
+      <p:sp>
+        <p:nvSpPr>
+          <p:cNvPr id="221" name="Google Shape;221;p16:notes"/>
+          <p:cNvSpPr/>
+          <p:nvPr>
+            <p:ph type="sldImg" idx="2"/>
+          </p:nvPr>
+        </p:nvSpPr>
+        <p:spPr>
+          <a:xfrm>
+            <a:off x="685800" y="1143000"/>
+            <a:ext cx="5486400" cy="3086100"/>
+          </a:xfrm>
+          <a:custGeom>
+            <a:avLst/>
+            <a:gdLst/>
+            <a:ahLst/>
+            <a:cxnLst/>
+            <a:rect l="l" t="t" r="r" b="b"/>
+            <a:pathLst>
+              <a:path w="120000" h="120000" extrusionOk="0">
+                <a:moveTo>
+                  <a:pt x="0" y="0"/>
+                </a:moveTo>
+                <a:lnTo>
+                  <a:pt x="120000" y="0"/>
+                </a:lnTo>
+                <a:lnTo>
+                  <a:pt x="120000" y="120000"/>
+                </a:lnTo>
+                <a:lnTo>
+                  <a:pt x="0" y="120000"/>
+                </a:lnTo>
+                <a:close/>
+              </a:path>
+            </a:pathLst>
+          </a:custGeom>
+          <a:noFill/>
+          <a:ln w="12700" cap="flat" cmpd="sng">
+            <a:solidFill>
+              <a:srgbClr val="000000"/>
+            </a:solidFill>
+            <a:prstDash val="solid"/>
+            <a:round/>
+            <a:headEnd type="none" w="sm" len="sm"/>
+            <a:tailEnd type="none" w="sm" len="sm"/>
+          </a:ln>
+        </p:spPr>
+      </p:sp>
+    </p:spTree>
+  </p:cSld>
+  <p:clrMapOvr>
+    <a:masterClrMapping/>
+  </p:clrMapOvr>
+</p:notes>
+</file>
+
+<file path=ppt/notesSlides/notesSlide22.xml><?xml version="1.0" encoding="utf-8"?>
+<p:notes xmlns:a="http://schemas.openxmlformats.org/drawingml/2006/main" xmlns:r="http://schemas.openxmlformats.org/officeDocument/2006/relationships" xmlns:p="http://schemas.openxmlformats.org/presentationml/2006/main" showMasterPhAnim="0" showMasterSp="0">
+  <p:cSld>
+    <p:spTree>
+      <p:nvGrpSpPr>
+        <p:cNvPr id="219" name="Shape 219"/>
+        <p:cNvGrpSpPr/>
+        <p:nvPr/>
+      </p:nvGrpSpPr>
+      <p:grpSpPr>
+        <a:xfrm>
+          <a:off x="0" y="0"/>
+          <a:ext cx="0" cy="0"/>
+          <a:chOff x="0" y="0"/>
+          <a:chExt cx="0" cy="0"/>
+        </a:xfrm>
+      </p:grpSpPr>
+      <p:sp>
+        <p:nvSpPr>
+          <p:cNvPr id="220" name="Google Shape;220;p16:notes"/>
+          <p:cNvSpPr txBox="1"/>
+          <p:nvPr>
+            <p:ph type="body" idx="1"/>
+          </p:nvPr>
+        </p:nvSpPr>
+        <p:spPr>
+          <a:xfrm>
+            <a:off x="685800" y="4400550"/>
+            <a:ext cx="5486400" cy="3600450"/>
+          </a:xfrm>
+          <a:prstGeom prst="rect">
+            <a:avLst/>
+          </a:prstGeom>
+          <a:noFill/>
+          <a:ln>
+            <a:noFill/>
+          </a:ln>
+        </p:spPr>
+        <p:txBody>
+          <a:bodyPr spcFirstLastPara="1" wrap="square" lIns="91425" tIns="45700" rIns="91425" bIns="45700" anchor="t" anchorCtr="0">
+            <a:noAutofit/>
+          </a:bodyPr>
+          <a:lstStyle/>
+          <a:p>
+            <a:pPr marL="0" lvl="0" indent="0" algn="l" rtl="0">
+              <a:lnSpc>
+                <a:spcPct val="100000"/>
+              </a:lnSpc>
+              <a:spcBef>
+                <a:spcPts val="0"/>
+              </a:spcBef>
+              <a:spcAft>
+                <a:spcPts val="0"/>
+              </a:spcAft>
+              <a:buSzPts val="1400"/>
+              <a:buNone/>
+            </a:pPr>
+          </a:p>
+        </p:txBody>
+      </p:sp>
+      <p:sp>
+        <p:nvSpPr>
+          <p:cNvPr id="221" name="Google Shape;221;p16:notes"/>
+          <p:cNvSpPr/>
+          <p:nvPr>
+            <p:ph type="sldImg" idx="2"/>
+          </p:nvPr>
+        </p:nvSpPr>
+        <p:spPr>
+          <a:xfrm>
+            <a:off x="685800" y="1143000"/>
+            <a:ext cx="5486400" cy="3086100"/>
+          </a:xfrm>
+          <a:custGeom>
+            <a:avLst/>
+            <a:gdLst/>
+            <a:ahLst/>
+            <a:cxnLst/>
+            <a:rect l="l" t="t" r="r" b="b"/>
+            <a:pathLst>
+              <a:path w="120000" h="120000" extrusionOk="0">
+                <a:moveTo>
+                  <a:pt x="0" y="0"/>
+                </a:moveTo>
+                <a:lnTo>
+                  <a:pt x="120000" y="0"/>
+                </a:lnTo>
+                <a:lnTo>
+                  <a:pt x="120000" y="120000"/>
+                </a:lnTo>
+                <a:lnTo>
+                  <a:pt x="0" y="120000"/>
+                </a:lnTo>
+                <a:close/>
+              </a:path>
+            </a:pathLst>
+          </a:custGeom>
+          <a:noFill/>
+          <a:ln w="12700" cap="flat" cmpd="sng">
+            <a:solidFill>
+              <a:srgbClr val="000000"/>
+            </a:solidFill>
+            <a:prstDash val="solid"/>
+            <a:round/>
+            <a:headEnd type="none" w="sm" len="sm"/>
+            <a:tailEnd type="none" w="sm" len="sm"/>
+          </a:ln>
+        </p:spPr>
+      </p:sp>
+    </p:spTree>
+  </p:cSld>
+  <p:clrMapOvr>
+    <a:masterClrMapping/>
+  </p:clrMapOvr>
+</p:notes>
+</file>
+
+<file path=ppt/notesSlides/notesSlide23.xml><?xml version="1.0" encoding="utf-8"?>
+<p:notes xmlns:a="http://schemas.openxmlformats.org/drawingml/2006/main" xmlns:r="http://schemas.openxmlformats.org/officeDocument/2006/relationships" xmlns:p="http://schemas.openxmlformats.org/presentationml/2006/main" showMasterPhAnim="0" showMasterSp="0">
+  <p:cSld>
+    <p:spTree>
+      <p:nvGrpSpPr>
+        <p:cNvPr id="219" name="Shape 219"/>
+        <p:cNvGrpSpPr/>
+        <p:nvPr/>
+      </p:nvGrpSpPr>
+      <p:grpSpPr>
+        <a:xfrm>
+          <a:off x="0" y="0"/>
+          <a:ext cx="0" cy="0"/>
+          <a:chOff x="0" y="0"/>
+          <a:chExt cx="0" cy="0"/>
+        </a:xfrm>
+      </p:grpSpPr>
+      <p:sp>
+        <p:nvSpPr>
+          <p:cNvPr id="220" name="Google Shape;220;p16:notes"/>
+          <p:cNvSpPr txBox="1"/>
+          <p:nvPr>
+            <p:ph type="body" idx="1"/>
+          </p:nvPr>
+        </p:nvSpPr>
+        <p:spPr>
+          <a:xfrm>
+            <a:off x="685800" y="4400550"/>
+            <a:ext cx="5486400" cy="3600450"/>
+          </a:xfrm>
+          <a:prstGeom prst="rect">
+            <a:avLst/>
+          </a:prstGeom>
+          <a:noFill/>
+          <a:ln>
+            <a:noFill/>
+          </a:ln>
+        </p:spPr>
+        <p:txBody>
+          <a:bodyPr spcFirstLastPara="1" wrap="square" lIns="91425" tIns="45700" rIns="91425" bIns="45700" anchor="t" anchorCtr="0">
+            <a:noAutofit/>
+          </a:bodyPr>
+          <a:lstStyle/>
+          <a:p>
+            <a:pPr marL="0" lvl="0" indent="0" algn="l" rtl="0">
+              <a:lnSpc>
+                <a:spcPct val="100000"/>
+              </a:lnSpc>
+              <a:spcBef>
+                <a:spcPts val="0"/>
+              </a:spcBef>
+              <a:spcAft>
+                <a:spcPts val="0"/>
+              </a:spcAft>
+              <a:buSzPts val="1400"/>
+              <a:buNone/>
+            </a:pPr>
+          </a:p>
+        </p:txBody>
+      </p:sp>
+      <p:sp>
+        <p:nvSpPr>
+          <p:cNvPr id="221" name="Google Shape;221;p16:notes"/>
+          <p:cNvSpPr/>
+          <p:nvPr>
+            <p:ph type="sldImg" idx="2"/>
+          </p:nvPr>
+        </p:nvSpPr>
+        <p:spPr>
+          <a:xfrm>
+            <a:off x="685800" y="1143000"/>
+            <a:ext cx="5486400" cy="3086100"/>
+          </a:xfrm>
+          <a:custGeom>
+            <a:avLst/>
+            <a:gdLst/>
+            <a:ahLst/>
+            <a:cxnLst/>
+            <a:rect l="l" t="t" r="r" b="b"/>
+            <a:pathLst>
+              <a:path w="120000" h="120000" extrusionOk="0">
+                <a:moveTo>
+                  <a:pt x="0" y="0"/>
+                </a:moveTo>
+                <a:lnTo>
+                  <a:pt x="120000" y="0"/>
+                </a:lnTo>
+                <a:lnTo>
+                  <a:pt x="120000" y="120000"/>
+                </a:lnTo>
+                <a:lnTo>
+                  <a:pt x="0" y="120000"/>
+                </a:lnTo>
+                <a:close/>
+              </a:path>
+            </a:pathLst>
+          </a:custGeom>
+          <a:noFill/>
+          <a:ln w="12700" cap="flat" cmpd="sng">
+            <a:solidFill>
+              <a:srgbClr val="000000"/>
+            </a:solidFill>
+            <a:prstDash val="solid"/>
+            <a:round/>
+            <a:headEnd type="none" w="sm" len="sm"/>
+            <a:tailEnd type="none" w="sm" len="sm"/>
+          </a:ln>
+        </p:spPr>
+      </p:sp>
+    </p:spTree>
+  </p:cSld>
+  <p:clrMapOvr>
+    <a:masterClrMapping/>
+  </p:clrMapOvr>
+</p:notes>
+</file>
+
+<file path=ppt/notesSlides/notesSlide24.xml><?xml version="1.0" encoding="utf-8"?>
 <p:notes xmlns:a="http://schemas.openxmlformats.org/drawingml/2006/main" xmlns:r="http://schemas.openxmlformats.org/officeDocument/2006/relationships" xmlns:p="http://schemas.openxmlformats.org/presentationml/2006/main" showMasterPhAnim="0" showMasterSp="0">
   <p:cSld>
     <p:spTree>
@@ -18326,7 +18787,7 @@
       </p:sp>
       <p:sp>
         <p:nvSpPr>
-          <p:cNvPr id="1" name="Google Shape;96;p15"/>
+          <p:cNvPr id="2" name="Google Shape;96;p15"/>
           <p:cNvSpPr txBox="1"/>
           <p:nvPr/>
         </p:nvSpPr>
@@ -18475,7 +18936,7 @@
         <p:spPr>
           <a:xfrm>
             <a:off x="596670" y="622739"/>
-            <a:ext cx="9247189" cy="704215"/>
+            <a:ext cx="9247189" cy="781050"/>
           </a:xfrm>
           <a:prstGeom prst="rect">
             <a:avLst/>
@@ -18509,7 +18970,7 @@
               <a:buNone/>
             </a:pPr>
             <a:r>
-              <a:rPr lang="en-US" sz="3000" b="1" i="0" u="none" strike="noStrike" cap="none">
+              <a:rPr lang="en-US" sz="3500" b="1" i="0" u="none" strike="noStrike" cap="none">
                 <a:solidFill>
                   <a:srgbClr val="000000"/>
                 </a:solidFill>
@@ -18520,7 +18981,7 @@
               </a:rPr>
               <a:t>Model Selection</a:t>
             </a:r>
-            <a:endParaRPr sz="3000" b="1" i="0" u="none" strike="noStrike" cap="none">
+            <a:endParaRPr sz="3500" b="1" i="0" u="none" strike="noStrike" cap="none">
               <a:solidFill>
                 <a:srgbClr val="000000"/>
               </a:solidFill>
@@ -19707,7 +20168,7 @@
       </p:sp>
       <p:sp>
         <p:nvSpPr>
-          <p:cNvPr id="1" name="Text 10"/>
+          <p:cNvPr id="2" name="Text 10"/>
           <p:cNvSpPr/>
           <p:nvPr/>
         </p:nvSpPr>
@@ -20287,7 +20748,7 @@
       </p:sp>
       <p:sp>
         <p:nvSpPr>
-          <p:cNvPr id="1" name="Text Box 0"/>
+          <p:cNvPr id="3" name="Text Box 2"/>
           <p:cNvSpPr txBox="1"/>
           <p:nvPr/>
         </p:nvSpPr>
@@ -20823,14 +21284,50 @@
         </p:blipFill>
         <p:spPr>
           <a:xfrm>
-            <a:off x="1487170" y="2411730"/>
-            <a:ext cx="7527925" cy="4453890"/>
+            <a:off x="623570" y="2204720"/>
+            <a:ext cx="7527925" cy="4305935"/>
           </a:xfrm>
           <a:prstGeom prst="rect">
             <a:avLst/>
           </a:prstGeom>
         </p:spPr>
       </p:pic>
+      <p:sp>
+        <p:nvSpPr>
+          <p:cNvPr id="2" name="Text Box 1"/>
+          <p:cNvSpPr txBox="1"/>
+          <p:nvPr/>
+        </p:nvSpPr>
+        <p:spPr>
+          <a:xfrm>
+            <a:off x="8616315" y="2493010"/>
+            <a:ext cx="3474085" cy="935990"/>
+          </a:xfrm>
+          <a:prstGeom prst="rect">
+            <a:avLst/>
+          </a:prstGeom>
+          <a:noFill/>
+        </p:spPr>
+        <p:txBody>
+          <a:bodyPr wrap="square" rtlCol="0">
+            <a:noAutofit/>
+          </a:bodyPr>
+          <a:p>
+            <a:r>
+              <a:rPr lang="en-US" altLang="en-US"/>
+              <a:t>Receiver Operating Characteristic </a:t>
+            </a:r>
+            <a:endParaRPr lang="en-US" altLang="en-US"/>
+          </a:p>
+          <a:p>
+            <a:r>
+              <a:rPr lang="en-US" altLang="en-US"/>
+              <a:t>Area Under the Curve</a:t>
+            </a:r>
+            <a:endParaRPr lang="en-US"/>
+          </a:p>
+        </p:txBody>
+      </p:sp>
     </p:spTree>
   </p:cSld>
   <p:clrMapOvr>
@@ -20975,7 +21472,7 @@
       </p:sp>
       <p:pic>
         <p:nvPicPr>
-          <p:cNvPr id="1" name="Picture 0"/>
+          <p:cNvPr id="3" name="Picture 2"/>
           <p:cNvPicPr/>
           <p:nvPr/>
         </p:nvPicPr>
@@ -22236,7 +22733,7 @@
       </p:sp>
       <p:sp>
         <p:nvSpPr>
-          <p:cNvPr id="1" name="Text Box 0"/>
+          <p:cNvPr id="2" name="Text Box 1"/>
           <p:cNvSpPr txBox="1"/>
           <p:nvPr/>
         </p:nvSpPr>
@@ -23108,7 +23605,7 @@
       </p:sp>
       <p:pic>
         <p:nvPicPr>
-          <p:cNvPr id="1" name="Picture 0"/>
+          <p:cNvPr id="2" name="Picture 1"/>
           <p:cNvPicPr/>
           <p:nvPr/>
         </p:nvPicPr>
@@ -23212,8 +23709,8 @@
         </p:nvSpPr>
         <p:spPr>
           <a:xfrm>
-            <a:off x="373665" y="533324"/>
-            <a:ext cx="12423900" cy="785100"/>
+            <a:off x="373665" y="535349"/>
+            <a:ext cx="12423900" cy="781050"/>
           </a:xfrm>
           <a:prstGeom prst="rect">
             <a:avLst/>
@@ -23247,18 +23744,18 @@
               <a:buNone/>
             </a:pPr>
             <a:r>
-              <a:rPr lang="en-US" sz="3500" b="0" i="0" u="none" strike="noStrike" cap="none">
-                <a:solidFill>
-                  <a:schemeClr val="dk1"/>
+              <a:rPr lang="en-US" altLang="en-US" sz="3500" b="0" i="0" u="none" strike="noStrike" cap="none">
+                <a:solidFill>
+                  <a:srgbClr val="000000"/>
                 </a:solidFill>
                 <a:latin typeface="Arial" panose="020B0604020202020204"/>
                 <a:ea typeface="Arial" panose="020B0604020202020204"/>
                 <a:cs typeface="Arial" panose="020B0604020202020204"/>
                 <a:sym typeface="Arial" panose="020B0604020202020204"/>
               </a:rPr>
-              <a:t>Conclusion</a:t>
+              <a:t>Compute Real Financial Loss</a:t>
             </a:r>
-            <a:endParaRPr sz="3500" b="0" i="0" u="none" strike="noStrike" cap="none">
+            <a:endParaRPr lang="en-US" altLang="en-US" sz="3500" b="0" i="0" u="none" strike="noStrike" cap="none">
               <a:solidFill>
                 <a:srgbClr val="000000"/>
               </a:solidFill>
@@ -23333,7 +23830,7 @@
         <p:spPr>
           <a:xfrm>
             <a:off x="551180" y="1557020"/>
-            <a:ext cx="10899140" cy="4676775"/>
+            <a:ext cx="10271125" cy="3754120"/>
           </a:xfrm>
           <a:prstGeom prst="rect">
             <a:avLst/>
@@ -23377,115 +23874,22 @@
             </a:endParaRPr>
           </a:p>
           <a:p>
-            <a:pPr marL="285750" indent="-285750" algn="l">
+            <a:pPr marL="0" marR="0" lvl="0" indent="0" algn="l" rtl="0">
               <a:lnSpc>
                 <a:spcPct val="150000"/>
               </a:lnSpc>
-              <a:spcAft>
-                <a:spcPts val="0"/>
-              </a:spcAft>
+              <a:spcBef>
+                <a:spcPts val="0"/>
+              </a:spcBef>
+              <a:spcAft>
+                <a:spcPts val="0"/>
+              </a:spcAft>
+              <a:buClr>
+                <a:srgbClr val="000000"/>
+              </a:buClr>
               <a:buSzPts val="1900"/>
               <a:buFont typeface="Arial" panose="020B0604020202020204" pitchFamily="34" charset="0"/>
-              <a:buChar char="•"/>
-            </a:pPr>
-            <a:r>
-              <a:rPr lang="en-US" altLang="en-US" sz="1800">
-                <a:solidFill>
-                  <a:schemeClr val="dk1"/>
-                </a:solidFill>
-                <a:latin typeface="Montserrat" panose="00000500000000000000" charset="0"/>
-                <a:cs typeface="Montserrat" panose="00000500000000000000" charset="0"/>
-                <a:sym typeface="+mn-ea"/>
-              </a:rPr>
-              <a:t>Random Forest achieved the best results on Paytm data: 99.9% Accuracy, AUC-ROC of 0.970, Precision 87.4% and Recall 82.0%.</a:t>
-            </a:r>
-            <a:endParaRPr lang="en-US" altLang="en-US" sz="1800">
-              <a:solidFill>
-                <a:schemeClr val="dk1"/>
-              </a:solidFill>
-              <a:latin typeface="Montserrat" panose="00000500000000000000" charset="0"/>
-              <a:cs typeface="Montserrat" panose="00000500000000000000" charset="0"/>
-            </a:endParaRPr>
-          </a:p>
-          <a:p>
-            <a:pPr marL="285750" indent="-285750" algn="l">
-              <a:lnSpc>
-                <a:spcPct val="150000"/>
-              </a:lnSpc>
-              <a:spcAft>
-                <a:spcPts val="0"/>
-              </a:spcAft>
-              <a:buSzPts val="1900"/>
-              <a:buFont typeface="Arial" panose="020B0604020202020204" pitchFamily="34" charset="0"/>
-              <a:buChar char="•"/>
-            </a:pPr>
-            <a:r>
-              <a:rPr lang="en-US" altLang="en-US" sz="1800">
-                <a:solidFill>
-                  <a:schemeClr val="dk1"/>
-                </a:solidFill>
-                <a:latin typeface="Montserrat" panose="00000500000000000000" charset="0"/>
-                <a:cs typeface="Montserrat" panose="00000500000000000000" charset="0"/>
-                <a:sym typeface="+mn-ea"/>
-              </a:rPr>
-              <a:t>99.9% Accuracy: Out of every 1,000 transactions, the model correctly classifies 999 as either safe or fraudulent.</a:t>
-            </a:r>
-            <a:endParaRPr lang="en-US" altLang="en-US" sz="1800">
-              <a:solidFill>
-                <a:schemeClr val="dk1"/>
-              </a:solidFill>
-              <a:latin typeface="Montserrat" panose="00000500000000000000" charset="0"/>
-              <a:cs typeface="Montserrat" panose="00000500000000000000" charset="0"/>
-            </a:endParaRPr>
-          </a:p>
-          <a:p>
-            <a:pPr marL="285750" indent="-285750" algn="l">
-              <a:lnSpc>
-                <a:spcPct val="150000"/>
-              </a:lnSpc>
-              <a:spcAft>
-                <a:spcPts val="0"/>
-              </a:spcAft>
-              <a:buSzPts val="1900"/>
-              <a:buFont typeface="Arial" panose="020B0604020202020204" pitchFamily="34" charset="0"/>
-              <a:buChar char="•"/>
-            </a:pPr>
-            <a:r>
-              <a:rPr lang="en-US" altLang="en-US" sz="1800">
-                <a:solidFill>
-                  <a:schemeClr val="dk1"/>
-                </a:solidFill>
-                <a:latin typeface="Montserrat" panose="00000500000000000000" charset="0"/>
-                <a:cs typeface="Montserrat" panose="00000500000000000000" charset="0"/>
-                <a:sym typeface="+mn-ea"/>
-              </a:rPr>
-              <a:t>AUC-ROC of 0.970: This indicates outstanding model performance. The Area Under the Curve (AUC) measures how well the model separates the two classes (fraud vs. non-fraud). An AUC of 0.97 (out of 1.0) means it is highly unlikely the model will confuse a fraudulent transaction with a safe one.</a:t>
-            </a:r>
-            <a:endParaRPr lang="en-US" altLang="en-US" sz="1800">
-              <a:solidFill>
-                <a:schemeClr val="dk1"/>
-              </a:solidFill>
-              <a:latin typeface="Montserrat" panose="00000500000000000000" charset="0"/>
-              <a:cs typeface="Montserrat" panose="00000500000000000000" charset="0"/>
-            </a:endParaRPr>
-          </a:p>
-          <a:p>
-            <a:pPr marL="285750" marR="0" lvl="0" indent="-285750" algn="l" rtl="0">
-              <a:lnSpc>
-                <a:spcPct val="150000"/>
-              </a:lnSpc>
-              <a:spcBef>
-                <a:spcPts val="0"/>
-              </a:spcBef>
-              <a:spcAft>
-                <a:spcPts val="0"/>
-              </a:spcAft>
-              <a:buClr>
-                <a:srgbClr val="000000"/>
-              </a:buClr>
-              <a:buSzPts val="1900"/>
-              <a:buFont typeface="Arial" panose="020B0604020202020204" pitchFamily="34" charset="0"/>
-              <a:buChar char="•"/>
+              <a:buNone/>
             </a:pPr>
             <a:endParaRPr lang="en-US" altLang="en-US" sz="1800" b="0" i="0" u="none" strike="noStrike" cap="none">
               <a:solidFill>
@@ -23527,6 +23931,559 @@
           </a:p>
         </p:txBody>
       </p:sp>
+      <p:graphicFrame>
+        <p:nvGraphicFramePr>
+          <p:cNvPr id="1" name="Table 0"/>
+          <p:cNvGraphicFramePr/>
+          <p:nvPr>
+            <p:custDataLst>
+              <p:tags r:id="rId1"/>
+            </p:custDataLst>
+          </p:nvPr>
+        </p:nvGraphicFramePr>
+        <p:xfrm>
+          <a:off x="853440" y="1546225"/>
+          <a:ext cx="10205085" cy="3413125"/>
+        </p:xfrm>
+        <a:graphic>
+          <a:graphicData uri="http://schemas.openxmlformats.org/drawingml/2006/table">
+            <a:tbl>
+              <a:tblPr/>
+              <a:tblGrid>
+                <a:gridCol w="3401695"/>
+                <a:gridCol w="3401695"/>
+                <a:gridCol w="3401695"/>
+              </a:tblGrid>
+              <a:tr h="682625">
+                <a:tc>
+                  <a:txBody>
+                    <a:bodyPr/>
+                    <a:p>
+                      <a:r>
+                        <a:rPr lang="en-US" altLang="zh-CN" sz="1800" b="1">
+                          <a:latin typeface="Montserrat" panose="00000500000000000000" charset="0"/>
+                          <a:cs typeface="Montserrat" panose="00000500000000000000" charset="0"/>
+                        </a:rPr>
+                        <a:t>Case</a:t>
+                      </a:r>
+                      <a:endParaRPr lang="en-US" altLang="zh-CN" sz="1800" b="1">
+                        <a:latin typeface="Montserrat" panose="00000500000000000000" charset="0"/>
+                        <a:cs typeface="Montserrat" panose="00000500000000000000" charset="0"/>
+                      </a:endParaRPr>
+                    </a:p>
+                  </a:txBody>
+                  <a:tcPr marL="0" marR="0" marT="0" marB="0" anchor="ctr" anchorCtr="0">
+                    <a:lnL>
+                      <a:noFill/>
+                    </a:lnL>
+                    <a:lnR>
+                      <a:noFill/>
+                    </a:lnR>
+                    <a:lnT>
+                      <a:noFill/>
+                    </a:lnT>
+                    <a:lnB>
+                      <a:noFill/>
+                    </a:lnB>
+                    <a:noFill/>
+                  </a:tcPr>
+                </a:tc>
+                <a:tc>
+                  <a:txBody>
+                    <a:bodyPr/>
+                    <a:p>
+                      <a:r>
+                        <a:rPr lang="en-US" altLang="zh-CN" sz="1800" b="1">
+                          <a:latin typeface="Montserrat" panose="00000500000000000000" charset="0"/>
+                          <a:cs typeface="Montserrat" panose="00000500000000000000" charset="0"/>
+                        </a:rPr>
+                        <a:t>Meaning</a:t>
+                      </a:r>
+                      <a:endParaRPr lang="en-US" altLang="zh-CN" sz="1800" b="1">
+                        <a:latin typeface="Montserrat" panose="00000500000000000000" charset="0"/>
+                        <a:cs typeface="Montserrat" panose="00000500000000000000" charset="0"/>
+                      </a:endParaRPr>
+                    </a:p>
+                  </a:txBody>
+                  <a:tcPr marL="0" marR="0" marT="0" marB="0" anchor="ctr" anchorCtr="0">
+                    <a:lnL>
+                      <a:noFill/>
+                    </a:lnL>
+                    <a:lnR>
+                      <a:noFill/>
+                    </a:lnR>
+                    <a:lnT>
+                      <a:noFill/>
+                    </a:lnT>
+                    <a:lnB>
+                      <a:noFill/>
+                    </a:lnB>
+                    <a:noFill/>
+                  </a:tcPr>
+                </a:tc>
+                <a:tc>
+                  <a:txBody>
+                    <a:bodyPr/>
+                    <a:p>
+                      <a:r>
+                        <a:rPr lang="en-US" altLang="zh-CN" sz="1800" b="1">
+                          <a:latin typeface="Montserrat" panose="00000500000000000000" charset="0"/>
+                          <a:cs typeface="Montserrat" panose="00000500000000000000" charset="0"/>
+                        </a:rPr>
+                        <a:t>Cost Impact</a:t>
+                      </a:r>
+                      <a:endParaRPr lang="en-US" altLang="zh-CN" sz="1800" b="1">
+                        <a:latin typeface="Montserrat" panose="00000500000000000000" charset="0"/>
+                        <a:cs typeface="Montserrat" panose="00000500000000000000" charset="0"/>
+                      </a:endParaRPr>
+                    </a:p>
+                  </a:txBody>
+                  <a:tcPr marL="0" marR="0" marT="0" marB="0" anchor="ctr" anchorCtr="0">
+                    <a:lnL>
+                      <a:noFill/>
+                    </a:lnL>
+                    <a:lnR>
+                      <a:noFill/>
+                    </a:lnR>
+                    <a:lnT>
+                      <a:noFill/>
+                    </a:lnT>
+                    <a:lnB>
+                      <a:noFill/>
+                    </a:lnB>
+                    <a:noFill/>
+                  </a:tcPr>
+                </a:tc>
+              </a:tr>
+              <a:tr h="682625">
+                <a:tc>
+                  <a:txBody>
+                    <a:bodyPr/>
+                    <a:p>
+                      <a:r>
+                        <a:rPr lang="en-US" altLang="zh-CN" sz="1800">
+                          <a:latin typeface="Montserrat" panose="00000500000000000000" charset="0"/>
+                          <a:cs typeface="Montserrat" panose="00000500000000000000" charset="0"/>
+                        </a:rPr>
+                        <a:t>FN (Missed Fraud)</a:t>
+                      </a:r>
+                      <a:endParaRPr lang="en-US" altLang="zh-CN" sz="1800">
+                        <a:latin typeface="Montserrat" panose="00000500000000000000" charset="0"/>
+                        <a:cs typeface="Montserrat" panose="00000500000000000000" charset="0"/>
+                      </a:endParaRPr>
+                    </a:p>
+                  </a:txBody>
+                  <a:tcPr marL="0" marR="0" marT="0" marB="0" anchor="ctr" anchorCtr="0">
+                    <a:lnL>
+                      <a:noFill/>
+                    </a:lnL>
+                    <a:lnR>
+                      <a:noFill/>
+                    </a:lnR>
+                    <a:lnT>
+                      <a:noFill/>
+                    </a:lnT>
+                    <a:lnB>
+                      <a:noFill/>
+                    </a:lnB>
+                    <a:noFill/>
+                  </a:tcPr>
+                </a:tc>
+                <a:tc>
+                  <a:txBody>
+                    <a:bodyPr/>
+                    <a:p>
+                      <a:r>
+                        <a:rPr lang="en-US" altLang="zh-CN" sz="1800">
+                          <a:latin typeface="Montserrat" panose="00000500000000000000" charset="0"/>
+                          <a:cs typeface="Montserrat" panose="00000500000000000000" charset="0"/>
+                        </a:rPr>
+                        <a:t>Fraud allowed</a:t>
+                      </a:r>
+                      <a:endParaRPr lang="en-US" altLang="zh-CN" sz="1800">
+                        <a:latin typeface="Montserrat" panose="00000500000000000000" charset="0"/>
+                        <a:cs typeface="Montserrat" panose="00000500000000000000" charset="0"/>
+                      </a:endParaRPr>
+                    </a:p>
+                  </a:txBody>
+                  <a:tcPr marL="0" marR="0" marT="0" marB="0" anchor="ctr" anchorCtr="0">
+                    <a:lnL>
+                      <a:noFill/>
+                    </a:lnL>
+                    <a:lnR>
+                      <a:noFill/>
+                    </a:lnR>
+                    <a:lnT>
+                      <a:noFill/>
+                    </a:lnT>
+                    <a:lnB>
+                      <a:noFill/>
+                    </a:lnB>
+                    <a:noFill/>
+                  </a:tcPr>
+                </a:tc>
+                <a:tc>
+                  <a:txBody>
+                    <a:bodyPr/>
+                    <a:p>
+                      <a:r>
+                        <a:rPr lang="zh-CN" altLang="en-US" sz="1800">
+                          <a:latin typeface="Montserrat" panose="00000500000000000000" charset="0"/>
+                          <a:cs typeface="Montserrat" panose="00000500000000000000" charset="0"/>
+                        </a:rPr>
+                        <a:t>🔴 </a:t>
+                      </a:r>
+                      <a:r>
+                        <a:rPr lang="en-US" altLang="zh-CN" sz="1800">
+                          <a:latin typeface="Montserrat" panose="00000500000000000000" charset="0"/>
+                          <a:cs typeface="Montserrat" panose="00000500000000000000" charset="0"/>
+                        </a:rPr>
+                        <a:t>Huge Loss</a:t>
+                      </a:r>
+                      <a:endParaRPr lang="en-US" altLang="zh-CN" sz="1800">
+                        <a:latin typeface="Montserrat" panose="00000500000000000000" charset="0"/>
+                        <a:cs typeface="Montserrat" panose="00000500000000000000" charset="0"/>
+                      </a:endParaRPr>
+                    </a:p>
+                  </a:txBody>
+                  <a:tcPr marL="0" marR="0" marT="0" marB="0" anchor="ctr" anchorCtr="0">
+                    <a:lnL>
+                      <a:noFill/>
+                    </a:lnL>
+                    <a:lnR>
+                      <a:noFill/>
+                    </a:lnR>
+                    <a:lnT>
+                      <a:noFill/>
+                    </a:lnT>
+                    <a:lnB>
+                      <a:noFill/>
+                    </a:lnB>
+                    <a:noFill/>
+                  </a:tcPr>
+                </a:tc>
+              </a:tr>
+              <a:tr h="682625">
+                <a:tc>
+                  <a:txBody>
+                    <a:bodyPr/>
+                    <a:p>
+                      <a:r>
+                        <a:rPr lang="en-US" altLang="zh-CN" sz="1800">
+                          <a:latin typeface="Montserrat" panose="00000500000000000000" charset="0"/>
+                          <a:cs typeface="Montserrat" panose="00000500000000000000" charset="0"/>
+                        </a:rPr>
+                        <a:t>FP (Blocked Genuine)</a:t>
+                      </a:r>
+                      <a:endParaRPr lang="en-US" altLang="zh-CN" sz="1800">
+                        <a:latin typeface="Montserrat" panose="00000500000000000000" charset="0"/>
+                        <a:cs typeface="Montserrat" panose="00000500000000000000" charset="0"/>
+                      </a:endParaRPr>
+                    </a:p>
+                  </a:txBody>
+                  <a:tcPr marL="0" marR="0" marT="0" marB="0" anchor="ctr" anchorCtr="0">
+                    <a:lnL>
+                      <a:noFill/>
+                    </a:lnL>
+                    <a:lnR>
+                      <a:noFill/>
+                    </a:lnR>
+                    <a:lnT>
+                      <a:noFill/>
+                    </a:lnT>
+                    <a:lnB>
+                      <a:noFill/>
+                    </a:lnB>
+                    <a:noFill/>
+                  </a:tcPr>
+                </a:tc>
+                <a:tc>
+                  <a:txBody>
+                    <a:bodyPr/>
+                    <a:p>
+                      <a:r>
+                        <a:rPr lang="en-US" altLang="zh-CN" sz="1800">
+                          <a:latin typeface="Montserrat" panose="00000500000000000000" charset="0"/>
+                          <a:cs typeface="Montserrat" panose="00000500000000000000" charset="0"/>
+                        </a:rPr>
+                        <a:t>Customer blocked</a:t>
+                      </a:r>
+                      <a:endParaRPr lang="en-US" altLang="zh-CN" sz="1800">
+                        <a:latin typeface="Montserrat" panose="00000500000000000000" charset="0"/>
+                        <a:cs typeface="Montserrat" panose="00000500000000000000" charset="0"/>
+                      </a:endParaRPr>
+                    </a:p>
+                  </a:txBody>
+                  <a:tcPr marL="0" marR="0" marT="0" marB="0" anchor="ctr" anchorCtr="0">
+                    <a:lnL>
+                      <a:noFill/>
+                    </a:lnL>
+                    <a:lnR>
+                      <a:noFill/>
+                    </a:lnR>
+                    <a:lnT>
+                      <a:noFill/>
+                    </a:lnT>
+                    <a:lnB>
+                      <a:noFill/>
+                    </a:lnB>
+                    <a:noFill/>
+                  </a:tcPr>
+                </a:tc>
+                <a:tc>
+                  <a:txBody>
+                    <a:bodyPr/>
+                    <a:p>
+                      <a:r>
+                        <a:rPr lang="zh-CN" altLang="en-US" sz="1800">
+                          <a:latin typeface="Montserrat" panose="00000500000000000000" charset="0"/>
+                          <a:cs typeface="Montserrat" panose="00000500000000000000" charset="0"/>
+                        </a:rPr>
+                        <a:t>🟡 </a:t>
+                      </a:r>
+                      <a:r>
+                        <a:rPr lang="en-US" altLang="zh-CN" sz="1800">
+                          <a:latin typeface="Montserrat" panose="00000500000000000000" charset="0"/>
+                          <a:cs typeface="Montserrat" panose="00000500000000000000" charset="0"/>
+                        </a:rPr>
+                        <a:t>Lost revenue</a:t>
+                      </a:r>
+                      <a:endParaRPr lang="en-US" altLang="zh-CN" sz="1800">
+                        <a:latin typeface="Montserrat" panose="00000500000000000000" charset="0"/>
+                        <a:cs typeface="Montserrat" panose="00000500000000000000" charset="0"/>
+                      </a:endParaRPr>
+                    </a:p>
+                  </a:txBody>
+                  <a:tcPr marL="0" marR="0" marT="0" marB="0" anchor="ctr" anchorCtr="0">
+                    <a:lnL>
+                      <a:noFill/>
+                    </a:lnL>
+                    <a:lnR>
+                      <a:noFill/>
+                    </a:lnR>
+                    <a:lnT>
+                      <a:noFill/>
+                    </a:lnT>
+                    <a:lnB>
+                      <a:noFill/>
+                    </a:lnB>
+                    <a:noFill/>
+                  </a:tcPr>
+                </a:tc>
+              </a:tr>
+              <a:tr h="682625">
+                <a:tc>
+                  <a:txBody>
+                    <a:bodyPr/>
+                    <a:p>
+                      <a:r>
+                        <a:rPr lang="en-US" altLang="zh-CN" sz="1800">
+                          <a:latin typeface="Montserrat" panose="00000500000000000000" charset="0"/>
+                          <a:cs typeface="Montserrat" panose="00000500000000000000" charset="0"/>
+                        </a:rPr>
+                        <a:t>TP</a:t>
+                      </a:r>
+                      <a:endParaRPr lang="en-US" altLang="zh-CN" sz="1800">
+                        <a:latin typeface="Montserrat" panose="00000500000000000000" charset="0"/>
+                        <a:cs typeface="Montserrat" panose="00000500000000000000" charset="0"/>
+                      </a:endParaRPr>
+                    </a:p>
+                  </a:txBody>
+                  <a:tcPr marL="0" marR="0" marT="0" marB="0" anchor="ctr" anchorCtr="0">
+                    <a:lnL>
+                      <a:noFill/>
+                    </a:lnL>
+                    <a:lnR>
+                      <a:noFill/>
+                    </a:lnR>
+                    <a:lnT>
+                      <a:noFill/>
+                    </a:lnT>
+                    <a:lnB>
+                      <a:noFill/>
+                    </a:lnB>
+                    <a:noFill/>
+                  </a:tcPr>
+                </a:tc>
+                <a:tc>
+                  <a:txBody>
+                    <a:bodyPr/>
+                    <a:p>
+                      <a:r>
+                        <a:rPr lang="en-US" altLang="zh-CN" sz="1800">
+                          <a:latin typeface="Montserrat" panose="00000500000000000000" charset="0"/>
+                          <a:cs typeface="Montserrat" panose="00000500000000000000" charset="0"/>
+                        </a:rPr>
+                        <a:t>Fraud stopped</a:t>
+                      </a:r>
+                      <a:endParaRPr lang="en-US" altLang="zh-CN" sz="1800">
+                        <a:latin typeface="Montserrat" panose="00000500000000000000" charset="0"/>
+                        <a:cs typeface="Montserrat" panose="00000500000000000000" charset="0"/>
+                      </a:endParaRPr>
+                    </a:p>
+                  </a:txBody>
+                  <a:tcPr marL="0" marR="0" marT="0" marB="0" anchor="ctr" anchorCtr="0">
+                    <a:lnL>
+                      <a:noFill/>
+                    </a:lnL>
+                    <a:lnR>
+                      <a:noFill/>
+                    </a:lnR>
+                    <a:lnT>
+                      <a:noFill/>
+                    </a:lnT>
+                    <a:lnB>
+                      <a:noFill/>
+                    </a:lnB>
+                    <a:noFill/>
+                  </a:tcPr>
+                </a:tc>
+                <a:tc>
+                  <a:txBody>
+                    <a:bodyPr/>
+                    <a:p>
+                      <a:r>
+                        <a:rPr lang="zh-CN" altLang="en-US" sz="1800">
+                          <a:latin typeface="Montserrat" panose="00000500000000000000" charset="0"/>
+                          <a:cs typeface="Montserrat" panose="00000500000000000000" charset="0"/>
+                        </a:rPr>
+                        <a:t>🟢 </a:t>
+                      </a:r>
+                      <a:r>
+                        <a:rPr lang="en-US" altLang="zh-CN" sz="1800">
+                          <a:latin typeface="Montserrat" panose="00000500000000000000" charset="0"/>
+                          <a:cs typeface="Montserrat" panose="00000500000000000000" charset="0"/>
+                        </a:rPr>
+                        <a:t>Saved money</a:t>
+                      </a:r>
+                      <a:endParaRPr lang="en-US" altLang="zh-CN" sz="1800">
+                        <a:latin typeface="Montserrat" panose="00000500000000000000" charset="0"/>
+                        <a:cs typeface="Montserrat" panose="00000500000000000000" charset="0"/>
+                      </a:endParaRPr>
+                    </a:p>
+                  </a:txBody>
+                  <a:tcPr marL="0" marR="0" marT="0" marB="0" anchor="ctr" anchorCtr="0">
+                    <a:lnL>
+                      <a:noFill/>
+                    </a:lnL>
+                    <a:lnR>
+                      <a:noFill/>
+                    </a:lnR>
+                    <a:lnT>
+                      <a:noFill/>
+                    </a:lnT>
+                    <a:lnB>
+                      <a:noFill/>
+                    </a:lnB>
+                    <a:noFill/>
+                  </a:tcPr>
+                </a:tc>
+              </a:tr>
+              <a:tr h="682625">
+                <a:tc>
+                  <a:txBody>
+                    <a:bodyPr/>
+                    <a:p>
+                      <a:r>
+                        <a:rPr lang="en-US" altLang="zh-CN" sz="1800">
+                          <a:latin typeface="Montserrat" panose="00000500000000000000" charset="0"/>
+                          <a:cs typeface="Montserrat" panose="00000500000000000000" charset="0"/>
+                        </a:rPr>
+                        <a:t>TN</a:t>
+                      </a:r>
+                      <a:endParaRPr lang="en-US" altLang="zh-CN" sz="1800">
+                        <a:latin typeface="Montserrat" panose="00000500000000000000" charset="0"/>
+                        <a:cs typeface="Montserrat" panose="00000500000000000000" charset="0"/>
+                      </a:endParaRPr>
+                    </a:p>
+                  </a:txBody>
+                  <a:tcPr marL="0" marR="0" marT="0" marB="0" anchor="ctr" anchorCtr="0">
+                    <a:lnL>
+                      <a:noFill/>
+                    </a:lnL>
+                    <a:lnR>
+                      <a:noFill/>
+                    </a:lnR>
+                    <a:lnT>
+                      <a:noFill/>
+                    </a:lnT>
+                    <a:lnB>
+                      <a:noFill/>
+                    </a:lnB>
+                    <a:noFill/>
+                  </a:tcPr>
+                </a:tc>
+                <a:tc>
+                  <a:txBody>
+                    <a:bodyPr/>
+                    <a:p>
+                      <a:r>
+                        <a:rPr lang="en-US" altLang="zh-CN" sz="1800">
+                          <a:latin typeface="Montserrat" panose="00000500000000000000" charset="0"/>
+                          <a:cs typeface="Montserrat" panose="00000500000000000000" charset="0"/>
+                        </a:rPr>
+                        <a:t>Normal</a:t>
+                      </a:r>
+                      <a:endParaRPr lang="en-US" altLang="zh-CN" sz="1800">
+                        <a:latin typeface="Montserrat" panose="00000500000000000000" charset="0"/>
+                        <a:cs typeface="Montserrat" panose="00000500000000000000" charset="0"/>
+                      </a:endParaRPr>
+                    </a:p>
+                  </a:txBody>
+                  <a:tcPr marL="0" marR="0" marT="0" marB="0" anchor="ctr" anchorCtr="0">
+                    <a:lnL>
+                      <a:noFill/>
+                    </a:lnL>
+                    <a:lnR>
+                      <a:noFill/>
+                    </a:lnR>
+                    <a:lnT>
+                      <a:noFill/>
+                    </a:lnT>
+                    <a:lnB>
+                      <a:noFill/>
+                    </a:lnB>
+                    <a:noFill/>
+                  </a:tcPr>
+                </a:tc>
+                <a:tc>
+                  <a:txBody>
+                    <a:bodyPr/>
+                    <a:p>
+                      <a:r>
+                        <a:rPr lang="en-US" altLang="zh-CN" sz="1800">
+                          <a:latin typeface="Montserrat" panose="00000500000000000000" charset="0"/>
+                          <a:cs typeface="Montserrat" panose="00000500000000000000" charset="0"/>
+                        </a:rPr>
+                        <a:t>No impact</a:t>
+                      </a:r>
+                      <a:endParaRPr lang="en-US" altLang="zh-CN" sz="1800">
+                        <a:latin typeface="Montserrat" panose="00000500000000000000" charset="0"/>
+                        <a:cs typeface="Montserrat" panose="00000500000000000000" charset="0"/>
+                      </a:endParaRPr>
+                    </a:p>
+                  </a:txBody>
+                  <a:tcPr marL="0" marR="0" marT="0" marB="0" anchor="ctr" anchorCtr="0">
+                    <a:lnL>
+                      <a:noFill/>
+                    </a:lnL>
+                    <a:lnR>
+                      <a:noFill/>
+                    </a:lnR>
+                    <a:lnT>
+                      <a:noFill/>
+                    </a:lnT>
+                    <a:lnB>
+                      <a:noFill/>
+                    </a:lnB>
+                    <a:noFill/>
+                  </a:tcPr>
+                </a:tc>
+              </a:tr>
+            </a:tbl>
+          </a:graphicData>
+        </a:graphic>
+      </p:graphicFrame>
     </p:spTree>
   </p:cSld>
   <p:clrMapOvr>
@@ -23646,6 +24603,1839 @@
               <a:buNone/>
             </a:pPr>
             <a:r>
+              <a:rPr lang="en-US" altLang="en-US" sz="3500" b="0" i="0" u="none" strike="noStrike" cap="none">
+                <a:solidFill>
+                  <a:srgbClr val="000000"/>
+                </a:solidFill>
+                <a:latin typeface="Arial" panose="020B0604020202020204"/>
+                <a:ea typeface="Arial" panose="020B0604020202020204"/>
+                <a:cs typeface="Arial" panose="020B0604020202020204"/>
+                <a:sym typeface="Arial" panose="020B0604020202020204"/>
+              </a:rPr>
+              <a:t>Compute Real Financial Loss</a:t>
+            </a:r>
+            <a:endParaRPr lang="en-US" altLang="en-US" sz="3500" b="0" i="0" u="none" strike="noStrike" cap="none">
+              <a:solidFill>
+                <a:srgbClr val="000000"/>
+              </a:solidFill>
+              <a:latin typeface="Arial" panose="020B0604020202020204"/>
+              <a:ea typeface="Arial" panose="020B0604020202020204"/>
+              <a:cs typeface="Arial" panose="020B0604020202020204"/>
+              <a:sym typeface="Arial" panose="020B0604020202020204"/>
+            </a:endParaRPr>
+          </a:p>
+        </p:txBody>
+      </p:sp>
+      <p:sp>
+        <p:nvSpPr>
+          <p:cNvPr id="225" name="Google Shape;225;p30"/>
+          <p:cNvSpPr txBox="1"/>
+          <p:nvPr/>
+        </p:nvSpPr>
+        <p:spPr>
+          <a:xfrm>
+            <a:off x="712032" y="1490008"/>
+            <a:ext cx="6400800" cy="369300"/>
+          </a:xfrm>
+          <a:prstGeom prst="rect">
+            <a:avLst/>
+          </a:prstGeom>
+          <a:noFill/>
+          <a:ln>
+            <a:noFill/>
+          </a:ln>
+        </p:spPr>
+        <p:txBody>
+          <a:bodyPr spcFirstLastPara="1" wrap="square" lIns="91425" tIns="45700" rIns="91425" bIns="45700" anchor="t" anchorCtr="0">
+            <a:spAutoFit/>
+          </a:bodyPr>
+          <a:lstStyle/>
+          <a:p>
+            <a:pPr marL="0" marR="0" lvl="0" indent="0" algn="l" rtl="0">
+              <a:lnSpc>
+                <a:spcPct val="100000"/>
+              </a:lnSpc>
+              <a:spcBef>
+                <a:spcPts val="0"/>
+              </a:spcBef>
+              <a:spcAft>
+                <a:spcPts val="0"/>
+              </a:spcAft>
+              <a:buClr>
+                <a:srgbClr val="000000"/>
+              </a:buClr>
+              <a:buSzPts val="1800"/>
+              <a:buFont typeface="Arial" panose="020B0604020202020204"/>
+              <a:buNone/>
+            </a:pPr>
+            <a:endParaRPr sz="1800" b="0" i="0" u="none" strike="noStrike" cap="none">
+              <a:solidFill>
+                <a:schemeClr val="dk1"/>
+              </a:solidFill>
+              <a:latin typeface="Montserrat" panose="00000500000000000000"/>
+              <a:ea typeface="Montserrat" panose="00000500000000000000"/>
+              <a:cs typeface="Montserrat" panose="00000500000000000000"/>
+              <a:sym typeface="Montserrat" panose="00000500000000000000"/>
+            </a:endParaRPr>
+          </a:p>
+        </p:txBody>
+      </p:sp>
+      <p:sp>
+        <p:nvSpPr>
+          <p:cNvPr id="226" name="Google Shape;226;p30"/>
+          <p:cNvSpPr txBox="1"/>
+          <p:nvPr/>
+        </p:nvSpPr>
+        <p:spPr>
+          <a:xfrm>
+            <a:off x="551180" y="1557020"/>
+            <a:ext cx="10271125" cy="3754120"/>
+          </a:xfrm>
+          <a:prstGeom prst="rect">
+            <a:avLst/>
+          </a:prstGeom>
+          <a:noFill/>
+          <a:ln>
+            <a:noFill/>
+          </a:ln>
+        </p:spPr>
+        <p:txBody>
+          <a:bodyPr spcFirstLastPara="1" wrap="square" lIns="91425" tIns="91425" rIns="91425" bIns="91425" anchor="t" anchorCtr="0">
+            <a:noAutofit/>
+          </a:bodyPr>
+          <a:lstStyle/>
+          <a:p>
+            <a:pPr marL="914400" marR="0" lvl="0" indent="0" algn="l" rtl="0">
+              <a:lnSpc>
+                <a:spcPct val="150000"/>
+              </a:lnSpc>
+              <a:spcBef>
+                <a:spcPts val="0"/>
+              </a:spcBef>
+              <a:spcAft>
+                <a:spcPts val="0"/>
+              </a:spcAft>
+              <a:buClr>
+                <a:srgbClr val="000000"/>
+              </a:buClr>
+              <a:buSzPts val="1900"/>
+              <a:buFont typeface="Arial" panose="020B0604020202020204"/>
+              <a:buNone/>
+            </a:pPr>
+            <a:endParaRPr sz="1900" b="0" i="0" u="none" strike="noStrike" cap="none">
+              <a:solidFill>
+                <a:schemeClr val="dk1"/>
+              </a:solidFill>
+              <a:latin typeface="Arial" panose="020B0604020202020204"/>
+              <a:ea typeface="Arial" panose="020B0604020202020204"/>
+              <a:cs typeface="Arial" panose="020B0604020202020204"/>
+              <a:sym typeface="Arial" panose="020B0604020202020204"/>
+            </a:endParaRPr>
+          </a:p>
+          <a:p>
+            <a:pPr marL="0" marR="0" lvl="0" indent="0" algn="l" rtl="0">
+              <a:lnSpc>
+                <a:spcPct val="150000"/>
+              </a:lnSpc>
+              <a:spcBef>
+                <a:spcPts val="0"/>
+              </a:spcBef>
+              <a:spcAft>
+                <a:spcPts val="0"/>
+              </a:spcAft>
+              <a:buClr>
+                <a:srgbClr val="000000"/>
+              </a:buClr>
+              <a:buSzPts val="1900"/>
+              <a:buFont typeface="Arial" panose="020B0604020202020204" pitchFamily="34" charset="0"/>
+              <a:buNone/>
+            </a:pPr>
+            <a:endParaRPr lang="en-US" altLang="en-US" sz="1800" b="0" i="0" u="none" strike="noStrike" cap="none">
+              <a:solidFill>
+                <a:schemeClr val="dk1"/>
+              </a:solidFill>
+              <a:latin typeface="Montserrat" panose="00000500000000000000" charset="0"/>
+              <a:ea typeface="Arial" panose="020B0604020202020204"/>
+              <a:cs typeface="Montserrat" panose="00000500000000000000" charset="0"/>
+              <a:sym typeface="Arial" panose="020B0604020202020204"/>
+            </a:endParaRPr>
+          </a:p>
+          <a:p>
+            <a:pPr marL="342900" marR="0" lvl="0" indent="-342900" algn="l" rtl="0">
+              <a:lnSpc>
+                <a:spcPct val="150000"/>
+              </a:lnSpc>
+              <a:spcBef>
+                <a:spcPts val="0"/>
+              </a:spcBef>
+              <a:spcAft>
+                <a:spcPts val="0"/>
+              </a:spcAft>
+              <a:buClr>
+                <a:srgbClr val="000000"/>
+              </a:buClr>
+              <a:buSzPts val="1900"/>
+              <a:buFont typeface="Arial" panose="020B0604020202020204" pitchFamily="34" charset="0"/>
+              <a:buChar char="•"/>
+            </a:pPr>
+            <a:endParaRPr sz="1900" b="0" i="0" u="none" strike="noStrike" cap="none">
+              <a:solidFill>
+                <a:schemeClr val="dk1"/>
+              </a:solidFill>
+              <a:latin typeface="Arial" panose="020B0604020202020204"/>
+              <a:ea typeface="Arial" panose="020B0604020202020204"/>
+              <a:cs typeface="Arial" panose="020B0604020202020204"/>
+              <a:sym typeface="Arial" panose="020B0604020202020204"/>
+            </a:endParaRPr>
+          </a:p>
+        </p:txBody>
+      </p:sp>
+      <p:pic>
+        <p:nvPicPr>
+          <p:cNvPr id="2" name="Picture 1"/>
+          <p:cNvPicPr>
+            <a:picLocks noChangeAspect="1"/>
+          </p:cNvPicPr>
+          <p:nvPr/>
+        </p:nvPicPr>
+        <p:blipFill>
+          <a:blip r:embed="rId1"/>
+          <a:stretch>
+            <a:fillRect/>
+          </a:stretch>
+        </p:blipFill>
+        <p:spPr>
+          <a:xfrm>
+            <a:off x="601980" y="1720850"/>
+            <a:ext cx="9010015" cy="4391025"/>
+          </a:xfrm>
+          <a:prstGeom prst="rect">
+            <a:avLst/>
+          </a:prstGeom>
+        </p:spPr>
+      </p:pic>
+    </p:spTree>
+  </p:cSld>
+  <p:clrMapOvr>
+    <a:masterClrMapping/>
+  </p:clrMapOvr>
+</p:sld>
+</file>
+
+<file path=ppt/slides/slide2.xml><?xml version="1.0" encoding="utf-8"?>
+<p:sld xmlns:a="http://schemas.openxmlformats.org/drawingml/2006/main" xmlns:r="http://schemas.openxmlformats.org/officeDocument/2006/relationships" xmlns:p="http://schemas.openxmlformats.org/presentationml/2006/main">
+  <p:cSld>
+    <p:spTree>
+      <p:nvGrpSpPr>
+        <p:cNvPr id="103" name="Shape 103"/>
+        <p:cNvGrpSpPr/>
+        <p:nvPr/>
+      </p:nvGrpSpPr>
+      <p:grpSpPr>
+        <a:xfrm>
+          <a:off x="0" y="0"/>
+          <a:ext cx="0" cy="0"/>
+          <a:chOff x="0" y="0"/>
+          <a:chExt cx="0" cy="0"/>
+        </a:xfrm>
+      </p:grpSpPr>
+      <p:sp>
+        <p:nvSpPr>
+          <p:cNvPr id="104" name="Google Shape;104;p16"/>
+          <p:cNvSpPr txBox="1"/>
+          <p:nvPr/>
+        </p:nvSpPr>
+        <p:spPr>
+          <a:xfrm>
+            <a:off x="191346" y="836761"/>
+            <a:ext cx="11656800" cy="719455"/>
+          </a:xfrm>
+          <a:prstGeom prst="rect">
+            <a:avLst/>
+          </a:prstGeom>
+          <a:noFill/>
+          <a:ln>
+            <a:noFill/>
+          </a:ln>
+        </p:spPr>
+        <p:txBody>
+          <a:bodyPr spcFirstLastPara="1" wrap="square" lIns="105100" tIns="52525" rIns="105100" bIns="52525" anchor="t" anchorCtr="0">
+            <a:spAutoFit/>
+          </a:bodyPr>
+          <a:lstStyle/>
+          <a:p>
+            <a:pPr marL="0" marR="0" lvl="0" indent="0" algn="l" rtl="0">
+              <a:lnSpc>
+                <a:spcPct val="100000"/>
+              </a:lnSpc>
+              <a:spcBef>
+                <a:spcPts val="0"/>
+              </a:spcBef>
+              <a:spcAft>
+                <a:spcPts val="0"/>
+              </a:spcAft>
+              <a:buClr>
+                <a:srgbClr val="000000"/>
+              </a:buClr>
+              <a:buSzPts val="3533"/>
+              <a:buFont typeface="Arial" panose="020B0604020202020204"/>
+              <a:buNone/>
+            </a:pPr>
+            <a:r>
+              <a:rPr lang="en-US" sz="4000" b="1" i="0" u="none" strike="noStrike" cap="none">
+                <a:solidFill>
+                  <a:schemeClr val="dk1"/>
+                </a:solidFill>
+                <a:latin typeface="Montserrat" panose="00000500000000000000" charset="0"/>
+                <a:ea typeface="Arial" panose="020B0604020202020204"/>
+                <a:cs typeface="Montserrat" panose="00000500000000000000" charset="0"/>
+                <a:sym typeface="Arial" panose="020B0604020202020204"/>
+              </a:rPr>
+              <a:t>Problem Statement</a:t>
+            </a:r>
+            <a:endParaRPr sz="4000" b="1" i="0" u="none" strike="noStrike" cap="none">
+              <a:solidFill>
+                <a:schemeClr val="dk1"/>
+              </a:solidFill>
+              <a:latin typeface="Montserrat" panose="00000500000000000000" charset="0"/>
+              <a:ea typeface="Arial" panose="020B0604020202020204"/>
+              <a:cs typeface="Montserrat" panose="00000500000000000000" charset="0"/>
+              <a:sym typeface="Arial" panose="020B0604020202020204"/>
+            </a:endParaRPr>
+          </a:p>
+        </p:txBody>
+      </p:sp>
+      <p:sp>
+        <p:nvSpPr>
+          <p:cNvPr id="105" name="Google Shape;105;p16"/>
+          <p:cNvSpPr txBox="1"/>
+          <p:nvPr/>
+        </p:nvSpPr>
+        <p:spPr>
+          <a:xfrm>
+            <a:off x="318770" y="1718945"/>
+            <a:ext cx="11679555" cy="4859020"/>
+          </a:xfrm>
+          <a:prstGeom prst="rect">
+            <a:avLst/>
+          </a:prstGeom>
+          <a:noFill/>
+          <a:ln>
+            <a:noFill/>
+          </a:ln>
+        </p:spPr>
+        <p:txBody>
+          <a:bodyPr spcFirstLastPara="1" wrap="square" lIns="121900" tIns="121900" rIns="121900" bIns="121900" anchor="t" anchorCtr="0">
+            <a:spAutoFit/>
+          </a:bodyPr>
+          <a:lstStyle/>
+          <a:p>
+            <a:pPr marL="457200" marR="0" lvl="0" indent="0" algn="just" rtl="0">
+              <a:lnSpc>
+                <a:spcPct val="200000"/>
+              </a:lnSpc>
+              <a:spcBef>
+                <a:spcPts val="1600"/>
+              </a:spcBef>
+              <a:spcAft>
+                <a:spcPts val="0"/>
+              </a:spcAft>
+              <a:buClr>
+                <a:srgbClr val="000000"/>
+              </a:buClr>
+              <a:buSzPts val="2500"/>
+              <a:buFont typeface="Arial" panose="020B0604020202020204"/>
+              <a:buNone/>
+            </a:pPr>
+            <a:r>
+              <a:rPr lang="en-US" altLang="en-US" sz="2500" b="0" i="0" u="none" strike="noStrike" cap="none">
+                <a:solidFill>
+                  <a:srgbClr val="000000"/>
+                </a:solidFill>
+                <a:latin typeface="Montserrat" panose="00000500000000000000" charset="0"/>
+                <a:ea typeface="Arial" panose="020B0604020202020204"/>
+                <a:cs typeface="Montserrat" panose="00000500000000000000" charset="0"/>
+                <a:sym typeface="Arial" panose="020B0604020202020204"/>
+              </a:rPr>
+              <a:t>Online payment systems have become widely used due to their convenience and speed. However, the rise in digital transactions has also increased the risk of fraud, where unauthorized users exploit system vulnerabilities. This creates financial losses and reduces user trust. Therefore, an effective system is needed to detect and prevent fraudulent transactions in real time.</a:t>
+            </a:r>
+            <a:endParaRPr lang="en-US" altLang="en-US" sz="2500" b="0" i="0" u="none" strike="noStrike" cap="none">
+              <a:solidFill>
+                <a:srgbClr val="000000"/>
+              </a:solidFill>
+              <a:latin typeface="Montserrat" panose="00000500000000000000" charset="0"/>
+              <a:ea typeface="Arial" panose="020B0604020202020204"/>
+              <a:cs typeface="Montserrat" panose="00000500000000000000" charset="0"/>
+              <a:sym typeface="Arial" panose="020B0604020202020204"/>
+            </a:endParaRPr>
+          </a:p>
+        </p:txBody>
+      </p:sp>
+      <p:sp>
+        <p:nvSpPr>
+          <p:cNvPr id="106" name="Google Shape;106;p16"/>
+          <p:cNvSpPr txBox="1"/>
+          <p:nvPr>
+            <p:ph type="sldNum" idx="12"/>
+          </p:nvPr>
+        </p:nvSpPr>
+        <p:spPr>
+          <a:xfrm>
+            <a:off x="11296611" y="6014423"/>
+            <a:ext cx="731600" cy="524800"/>
+          </a:xfrm>
+          <a:prstGeom prst="rect">
+            <a:avLst/>
+          </a:prstGeom>
+          <a:noFill/>
+          <a:ln>
+            <a:noFill/>
+          </a:ln>
+        </p:spPr>
+        <p:txBody>
+          <a:bodyPr spcFirstLastPara="1" wrap="square" lIns="91425" tIns="91425" rIns="91425" bIns="91425" anchor="ctr" anchorCtr="0">
+            <a:noAutofit/>
+          </a:bodyPr>
+          <a:lstStyle/>
+          <a:p>
+            <a:pPr marL="0" marR="0" lvl="0" indent="0" algn="l" rtl="0">
+              <a:lnSpc>
+                <a:spcPct val="100000"/>
+              </a:lnSpc>
+              <a:spcBef>
+                <a:spcPts val="0"/>
+              </a:spcBef>
+              <a:spcAft>
+                <a:spcPts val="0"/>
+              </a:spcAft>
+              <a:buClr>
+                <a:srgbClr val="000000"/>
+              </a:buClr>
+              <a:buSzPts val="1400"/>
+              <a:buFont typeface="Arial" panose="020B0604020202020204"/>
+              <a:buNone/>
+            </a:pPr>
+            <a:fld id="{00000000-1234-1234-1234-123412341234}" type="slidenum">
+              <a:rPr lang="en-US"/>
+            </a:fld>
+            <a:endParaRPr lang="en-US"/>
+          </a:p>
+        </p:txBody>
+      </p:sp>
+      <p:sp>
+        <p:nvSpPr>
+          <p:cNvPr id="107" name="Google Shape;107;p16"/>
+          <p:cNvSpPr txBox="1"/>
+          <p:nvPr/>
+        </p:nvSpPr>
+        <p:spPr>
+          <a:xfrm>
+            <a:off x="169121" y="3541809"/>
+            <a:ext cx="11656800" cy="649800"/>
+          </a:xfrm>
+          <a:prstGeom prst="rect">
+            <a:avLst/>
+          </a:prstGeom>
+          <a:noFill/>
+          <a:ln>
+            <a:noFill/>
+          </a:ln>
+        </p:spPr>
+        <p:txBody>
+          <a:bodyPr spcFirstLastPara="1" wrap="square" lIns="105100" tIns="52525" rIns="105100" bIns="52525" anchor="t" anchorCtr="0">
+            <a:spAutoFit/>
+          </a:bodyPr>
+          <a:lstStyle/>
+          <a:p>
+            <a:pPr marL="0" marR="0" lvl="0" indent="0" algn="l" rtl="0">
+              <a:lnSpc>
+                <a:spcPct val="100000"/>
+              </a:lnSpc>
+              <a:spcBef>
+                <a:spcPts val="0"/>
+              </a:spcBef>
+              <a:spcAft>
+                <a:spcPts val="0"/>
+              </a:spcAft>
+              <a:buClr>
+                <a:srgbClr val="000000"/>
+              </a:buClr>
+              <a:buSzPts val="3533"/>
+              <a:buFont typeface="Arial" panose="020B0604020202020204"/>
+              <a:buNone/>
+            </a:pPr>
+            <a:endParaRPr sz="3535" b="0" i="0" u="none" strike="noStrike" cap="none">
+              <a:solidFill>
+                <a:schemeClr val="dk1"/>
+              </a:solidFill>
+              <a:latin typeface="Arial" panose="020B0604020202020204"/>
+              <a:ea typeface="Arial" panose="020B0604020202020204"/>
+              <a:cs typeface="Arial" panose="020B0604020202020204"/>
+              <a:sym typeface="Arial" panose="020B0604020202020204"/>
+            </a:endParaRPr>
+          </a:p>
+        </p:txBody>
+      </p:sp>
+    </p:spTree>
+  </p:cSld>
+  <p:clrMapOvr>
+    <a:masterClrMapping/>
+  </p:clrMapOvr>
+</p:sld>
+</file>
+
+<file path=ppt/slides/slide20.xml><?xml version="1.0" encoding="utf-8"?>
+<p:sld xmlns:a="http://schemas.openxmlformats.org/drawingml/2006/main" xmlns:r="http://schemas.openxmlformats.org/officeDocument/2006/relationships" xmlns:p="http://schemas.openxmlformats.org/presentationml/2006/main">
+  <p:cSld>
+    <p:spTree>
+      <p:nvGrpSpPr>
+        <p:cNvPr id="222" name="Shape 222"/>
+        <p:cNvGrpSpPr/>
+        <p:nvPr/>
+      </p:nvGrpSpPr>
+      <p:grpSpPr>
+        <a:xfrm>
+          <a:off x="0" y="0"/>
+          <a:ext cx="0" cy="0"/>
+          <a:chOff x="0" y="0"/>
+          <a:chExt cx="0" cy="0"/>
+        </a:xfrm>
+      </p:grpSpPr>
+      <p:sp>
+        <p:nvSpPr>
+          <p:cNvPr id="223" name="Google Shape;223;p30"/>
+          <p:cNvSpPr txBox="1"/>
+          <p:nvPr>
+            <p:ph type="sldNum" idx="12"/>
+          </p:nvPr>
+        </p:nvSpPr>
+        <p:spPr>
+          <a:xfrm>
+            <a:off x="11296611" y="6014423"/>
+            <a:ext cx="731600" cy="524800"/>
+          </a:xfrm>
+          <a:prstGeom prst="rect">
+            <a:avLst/>
+          </a:prstGeom>
+          <a:noFill/>
+          <a:ln>
+            <a:noFill/>
+          </a:ln>
+        </p:spPr>
+        <p:txBody>
+          <a:bodyPr spcFirstLastPara="1" wrap="square" lIns="91425" tIns="91425" rIns="91425" bIns="91425" anchor="ctr" anchorCtr="0">
+            <a:noAutofit/>
+          </a:bodyPr>
+          <a:lstStyle/>
+          <a:p>
+            <a:pPr marL="0" marR="0" lvl="0" indent="0" algn="l" rtl="0">
+              <a:lnSpc>
+                <a:spcPct val="100000"/>
+              </a:lnSpc>
+              <a:spcBef>
+                <a:spcPts val="0"/>
+              </a:spcBef>
+              <a:spcAft>
+                <a:spcPts val="0"/>
+              </a:spcAft>
+              <a:buClr>
+                <a:srgbClr val="000000"/>
+              </a:buClr>
+              <a:buSzPts val="1400"/>
+              <a:buFont typeface="Arial" panose="020B0604020202020204"/>
+              <a:buNone/>
+            </a:pPr>
+            <a:fld id="{00000000-1234-1234-1234-123412341234}" type="slidenum">
+              <a:rPr lang="en-US"/>
+            </a:fld>
+            <a:endParaRPr lang="en-US"/>
+          </a:p>
+        </p:txBody>
+      </p:sp>
+      <p:sp>
+        <p:nvSpPr>
+          <p:cNvPr id="224" name="Google Shape;224;p30"/>
+          <p:cNvSpPr txBox="1"/>
+          <p:nvPr/>
+        </p:nvSpPr>
+        <p:spPr>
+          <a:xfrm>
+            <a:off x="373665" y="535349"/>
+            <a:ext cx="12423900" cy="781050"/>
+          </a:xfrm>
+          <a:prstGeom prst="rect">
+            <a:avLst/>
+          </a:prstGeom>
+          <a:noFill/>
+          <a:ln>
+            <a:noFill/>
+          </a:ln>
+        </p:spPr>
+        <p:txBody>
+          <a:bodyPr spcFirstLastPara="1" wrap="square" lIns="121900" tIns="121900" rIns="121900" bIns="121900" anchor="ctr" anchorCtr="0">
+            <a:spAutoFit/>
+          </a:bodyPr>
+          <a:lstStyle/>
+          <a:p>
+            <a:pPr marL="0" marR="0" lvl="0" indent="0" algn="l" rtl="0">
+              <a:lnSpc>
+                <a:spcPct val="100000"/>
+              </a:lnSpc>
+              <a:spcBef>
+                <a:spcPts val="0"/>
+              </a:spcBef>
+              <a:spcAft>
+                <a:spcPts val="0"/>
+              </a:spcAft>
+              <a:buClr>
+                <a:srgbClr val="000000"/>
+              </a:buClr>
+              <a:buSzPts val="3500"/>
+              <a:buFont typeface="Arial" panose="020B0604020202020204"/>
+              <a:buNone/>
+            </a:pPr>
+            <a:r>
+              <a:rPr lang="en-US" altLang="en-US" sz="3500" b="0" i="0" u="none" strike="noStrike" cap="none">
+                <a:solidFill>
+                  <a:srgbClr val="000000"/>
+                </a:solidFill>
+                <a:latin typeface="Arial" panose="020B0604020202020204"/>
+                <a:ea typeface="Arial" panose="020B0604020202020204"/>
+                <a:cs typeface="Arial" panose="020B0604020202020204"/>
+                <a:sym typeface="Arial" panose="020B0604020202020204"/>
+              </a:rPr>
+              <a:t>Compute Real Financial Loss</a:t>
+            </a:r>
+            <a:endParaRPr lang="en-US" altLang="en-US" sz="3500" b="0" i="0" u="none" strike="noStrike" cap="none">
+              <a:solidFill>
+                <a:srgbClr val="000000"/>
+              </a:solidFill>
+              <a:latin typeface="Arial" panose="020B0604020202020204"/>
+              <a:ea typeface="Arial" panose="020B0604020202020204"/>
+              <a:cs typeface="Arial" panose="020B0604020202020204"/>
+              <a:sym typeface="Arial" panose="020B0604020202020204"/>
+            </a:endParaRPr>
+          </a:p>
+        </p:txBody>
+      </p:sp>
+      <p:sp>
+        <p:nvSpPr>
+          <p:cNvPr id="225" name="Google Shape;225;p30"/>
+          <p:cNvSpPr txBox="1"/>
+          <p:nvPr/>
+        </p:nvSpPr>
+        <p:spPr>
+          <a:xfrm>
+            <a:off x="712032" y="1490008"/>
+            <a:ext cx="6400800" cy="369300"/>
+          </a:xfrm>
+          <a:prstGeom prst="rect">
+            <a:avLst/>
+          </a:prstGeom>
+          <a:noFill/>
+          <a:ln>
+            <a:noFill/>
+          </a:ln>
+        </p:spPr>
+        <p:txBody>
+          <a:bodyPr spcFirstLastPara="1" wrap="square" lIns="91425" tIns="45700" rIns="91425" bIns="45700" anchor="t" anchorCtr="0">
+            <a:spAutoFit/>
+          </a:bodyPr>
+          <a:lstStyle/>
+          <a:p>
+            <a:pPr marL="0" marR="0" lvl="0" indent="0" algn="l" rtl="0">
+              <a:lnSpc>
+                <a:spcPct val="100000"/>
+              </a:lnSpc>
+              <a:spcBef>
+                <a:spcPts val="0"/>
+              </a:spcBef>
+              <a:spcAft>
+                <a:spcPts val="0"/>
+              </a:spcAft>
+              <a:buClr>
+                <a:srgbClr val="000000"/>
+              </a:buClr>
+              <a:buSzPts val="1800"/>
+              <a:buFont typeface="Arial" panose="020B0604020202020204"/>
+              <a:buNone/>
+            </a:pPr>
+            <a:endParaRPr sz="1800" b="0" i="0" u="none" strike="noStrike" cap="none">
+              <a:solidFill>
+                <a:schemeClr val="dk1"/>
+              </a:solidFill>
+              <a:latin typeface="Montserrat" panose="00000500000000000000"/>
+              <a:ea typeface="Montserrat" panose="00000500000000000000"/>
+              <a:cs typeface="Montserrat" panose="00000500000000000000"/>
+              <a:sym typeface="Montserrat" panose="00000500000000000000"/>
+            </a:endParaRPr>
+          </a:p>
+        </p:txBody>
+      </p:sp>
+      <p:sp>
+        <p:nvSpPr>
+          <p:cNvPr id="226" name="Google Shape;226;p30"/>
+          <p:cNvSpPr txBox="1"/>
+          <p:nvPr/>
+        </p:nvSpPr>
+        <p:spPr>
+          <a:xfrm>
+            <a:off x="551180" y="1557020"/>
+            <a:ext cx="10271125" cy="4982210"/>
+          </a:xfrm>
+          <a:prstGeom prst="rect">
+            <a:avLst/>
+          </a:prstGeom>
+          <a:noFill/>
+          <a:ln>
+            <a:noFill/>
+          </a:ln>
+        </p:spPr>
+        <p:txBody>
+          <a:bodyPr spcFirstLastPara="1" wrap="square" lIns="91425" tIns="91425" rIns="91425" bIns="91425" anchor="t" anchorCtr="0">
+            <a:noAutofit/>
+          </a:bodyPr>
+          <a:lstStyle/>
+          <a:p>
+            <a:pPr marL="914400" marR="0" lvl="0" indent="0" algn="l" rtl="0">
+              <a:lnSpc>
+                <a:spcPct val="150000"/>
+              </a:lnSpc>
+              <a:spcBef>
+                <a:spcPts val="0"/>
+              </a:spcBef>
+              <a:spcAft>
+                <a:spcPts val="0"/>
+              </a:spcAft>
+              <a:buClr>
+                <a:srgbClr val="000000"/>
+              </a:buClr>
+              <a:buSzPts val="1900"/>
+              <a:buFont typeface="Arial" panose="020B0604020202020204"/>
+              <a:buNone/>
+            </a:pPr>
+            <a:r>
+              <a:rPr lang="en-US" altLang="en-US" sz="1900" b="1" i="0" u="none" strike="noStrike" cap="none">
+                <a:solidFill>
+                  <a:schemeClr val="dk1"/>
+                </a:solidFill>
+                <a:latin typeface="Montserrat" panose="00000500000000000000" charset="0"/>
+                <a:ea typeface="Arial" panose="020B0604020202020204"/>
+                <a:cs typeface="Montserrat" panose="00000500000000000000" charset="0"/>
+                <a:sym typeface="Arial" panose="020B0604020202020204"/>
+              </a:rPr>
+              <a:t>With Cost Optimization</a:t>
+            </a:r>
+            <a:endParaRPr lang="en-US" altLang="en-US" sz="1900" b="1" i="0" u="none" strike="noStrike" cap="none">
+              <a:solidFill>
+                <a:schemeClr val="dk1"/>
+              </a:solidFill>
+              <a:latin typeface="Montserrat" panose="00000500000000000000" charset="0"/>
+              <a:ea typeface="Arial" panose="020B0604020202020204"/>
+              <a:cs typeface="Montserrat" panose="00000500000000000000" charset="0"/>
+              <a:sym typeface="Arial" panose="020B0604020202020204"/>
+            </a:endParaRPr>
+          </a:p>
+          <a:p>
+            <a:pPr marL="1257300" marR="0" lvl="0" indent="-342900" algn="l" rtl="0">
+              <a:lnSpc>
+                <a:spcPct val="150000"/>
+              </a:lnSpc>
+              <a:spcBef>
+                <a:spcPts val="0"/>
+              </a:spcBef>
+              <a:spcAft>
+                <a:spcPts val="0"/>
+              </a:spcAft>
+              <a:buClr>
+                <a:srgbClr val="000000"/>
+              </a:buClr>
+              <a:buSzPts val="1900"/>
+              <a:buFont typeface="Arial" panose="020B0604020202020204" pitchFamily="34" charset="0"/>
+              <a:buChar char="•"/>
+            </a:pPr>
+            <a:r>
+              <a:rPr lang="en-US" altLang="en-US" sz="1900" b="0" i="0" u="none" strike="noStrike" cap="none">
+                <a:solidFill>
+                  <a:schemeClr val="dk1"/>
+                </a:solidFill>
+                <a:latin typeface="Montserrat" panose="00000500000000000000" charset="0"/>
+                <a:ea typeface="Arial" panose="020B0604020202020204"/>
+                <a:cs typeface="Montserrat" panose="00000500000000000000" charset="0"/>
+                <a:sym typeface="Arial" panose="020B0604020202020204"/>
+              </a:rPr>
+              <a:t>Threshold adjusted based on ₹ impact</a:t>
+            </a:r>
+            <a:endParaRPr lang="en-US" altLang="en-US" sz="1900" b="0" i="0" u="none" strike="noStrike" cap="none">
+              <a:solidFill>
+                <a:schemeClr val="dk1"/>
+              </a:solidFill>
+              <a:latin typeface="Montserrat" panose="00000500000000000000" charset="0"/>
+              <a:ea typeface="Arial" panose="020B0604020202020204"/>
+              <a:cs typeface="Montserrat" panose="00000500000000000000" charset="0"/>
+              <a:sym typeface="Arial" panose="020B0604020202020204"/>
+            </a:endParaRPr>
+          </a:p>
+          <a:p>
+            <a:pPr marL="914400" marR="0" lvl="0" indent="0" algn="l" rtl="0">
+              <a:lnSpc>
+                <a:spcPct val="150000"/>
+              </a:lnSpc>
+              <a:spcBef>
+                <a:spcPts val="0"/>
+              </a:spcBef>
+              <a:spcAft>
+                <a:spcPts val="0"/>
+              </a:spcAft>
+              <a:buClr>
+                <a:srgbClr val="000000"/>
+              </a:buClr>
+              <a:buSzPts val="1900"/>
+              <a:buFont typeface="Arial" panose="020B0604020202020204" pitchFamily="34" charset="0"/>
+              <a:buNone/>
+            </a:pPr>
+            <a:r>
+              <a:rPr lang="en-US" altLang="en-US" sz="1900" b="1" i="0" u="none" strike="noStrike" cap="none">
+                <a:solidFill>
+                  <a:schemeClr val="dk1"/>
+                </a:solidFill>
+                <a:latin typeface="Montserrat" panose="00000500000000000000" charset="0"/>
+                <a:ea typeface="Arial" panose="020B0604020202020204"/>
+                <a:cs typeface="Montserrat" panose="00000500000000000000" charset="0"/>
+                <a:sym typeface="Arial" panose="020B0604020202020204"/>
+              </a:rPr>
+              <a:t>Minimizes</a:t>
+            </a:r>
+            <a:r>
+              <a:rPr lang="en-US" altLang="en-US" sz="1900" b="0" i="0" u="none" strike="noStrike" cap="none">
+                <a:solidFill>
+                  <a:schemeClr val="dk1"/>
+                </a:solidFill>
+                <a:latin typeface="Montserrat" panose="00000500000000000000" charset="0"/>
+                <a:ea typeface="Arial" panose="020B0604020202020204"/>
+                <a:cs typeface="Montserrat" panose="00000500000000000000" charset="0"/>
+                <a:sym typeface="Arial" panose="020B0604020202020204"/>
+              </a:rPr>
+              <a:t>:</a:t>
+            </a:r>
+            <a:endParaRPr lang="en-US" altLang="en-US" sz="1900" b="0" i="0" u="none" strike="noStrike" cap="none">
+              <a:solidFill>
+                <a:schemeClr val="dk1"/>
+              </a:solidFill>
+              <a:latin typeface="Montserrat" panose="00000500000000000000" charset="0"/>
+              <a:ea typeface="Arial" panose="020B0604020202020204"/>
+              <a:cs typeface="Montserrat" panose="00000500000000000000" charset="0"/>
+              <a:sym typeface="Arial" panose="020B0604020202020204"/>
+            </a:endParaRPr>
+          </a:p>
+          <a:p>
+            <a:pPr marL="1257300" marR="0" lvl="0" indent="-342900" algn="l" rtl="0">
+              <a:lnSpc>
+                <a:spcPct val="150000"/>
+              </a:lnSpc>
+              <a:spcBef>
+                <a:spcPts val="0"/>
+              </a:spcBef>
+              <a:spcAft>
+                <a:spcPts val="0"/>
+              </a:spcAft>
+              <a:buClr>
+                <a:srgbClr val="000000"/>
+              </a:buClr>
+              <a:buSzPts val="1900"/>
+              <a:buFont typeface="Arial" panose="020B0604020202020204" pitchFamily="34" charset="0"/>
+              <a:buChar char="•"/>
+            </a:pPr>
+            <a:r>
+              <a:rPr lang="en-US" altLang="en-US" sz="1900" b="0" i="0" u="none" strike="noStrike" cap="none">
+                <a:solidFill>
+                  <a:schemeClr val="dk1"/>
+                </a:solidFill>
+                <a:latin typeface="Montserrat" panose="00000500000000000000" charset="0"/>
+                <a:ea typeface="Arial" panose="020B0604020202020204"/>
+                <a:cs typeface="Montserrat" panose="00000500000000000000" charset="0"/>
+                <a:sym typeface="Arial" panose="020B0604020202020204"/>
+              </a:rPr>
+              <a:t>Fraud leakage (FN)</a:t>
+            </a:r>
+            <a:endParaRPr lang="en-US" altLang="en-US" sz="1900" b="0" i="0" u="none" strike="noStrike" cap="none">
+              <a:solidFill>
+                <a:schemeClr val="dk1"/>
+              </a:solidFill>
+              <a:latin typeface="Montserrat" panose="00000500000000000000" charset="0"/>
+              <a:ea typeface="Arial" panose="020B0604020202020204"/>
+              <a:cs typeface="Montserrat" panose="00000500000000000000" charset="0"/>
+              <a:sym typeface="Arial" panose="020B0604020202020204"/>
+            </a:endParaRPr>
+          </a:p>
+          <a:p>
+            <a:pPr marL="1257300" marR="0" lvl="0" indent="-342900" algn="l" rtl="0">
+              <a:lnSpc>
+                <a:spcPct val="150000"/>
+              </a:lnSpc>
+              <a:spcBef>
+                <a:spcPts val="0"/>
+              </a:spcBef>
+              <a:spcAft>
+                <a:spcPts val="0"/>
+              </a:spcAft>
+              <a:buClr>
+                <a:srgbClr val="000000"/>
+              </a:buClr>
+              <a:buSzPts val="1900"/>
+              <a:buFont typeface="Arial" panose="020B0604020202020204" pitchFamily="34" charset="0"/>
+              <a:buChar char="•"/>
+            </a:pPr>
+            <a:r>
+              <a:rPr lang="en-US" altLang="en-US" sz="1900" b="0" i="0" u="none" strike="noStrike" cap="none">
+                <a:solidFill>
+                  <a:schemeClr val="dk1"/>
+                </a:solidFill>
+                <a:latin typeface="Montserrat" panose="00000500000000000000" charset="0"/>
+                <a:ea typeface="Arial" panose="020B0604020202020204"/>
+                <a:cs typeface="Montserrat" panose="00000500000000000000" charset="0"/>
+                <a:sym typeface="Arial" panose="020B0604020202020204"/>
+              </a:rPr>
+              <a:t>Customer loss (FP)</a:t>
+            </a:r>
+            <a:endParaRPr lang="en-US" altLang="en-US" sz="1900" b="0" i="0" u="none" strike="noStrike" cap="none">
+              <a:solidFill>
+                <a:schemeClr val="dk1"/>
+              </a:solidFill>
+              <a:latin typeface="Montserrat" panose="00000500000000000000" charset="0"/>
+              <a:ea typeface="Arial" panose="020B0604020202020204"/>
+              <a:cs typeface="Montserrat" panose="00000500000000000000" charset="0"/>
+              <a:sym typeface="Arial" panose="020B0604020202020204"/>
+            </a:endParaRPr>
+          </a:p>
+          <a:p>
+            <a:pPr marL="914400" marR="0" lvl="0" indent="0" algn="l" rtl="0">
+              <a:lnSpc>
+                <a:spcPct val="150000"/>
+              </a:lnSpc>
+              <a:spcBef>
+                <a:spcPts val="0"/>
+              </a:spcBef>
+              <a:spcAft>
+                <a:spcPts val="0"/>
+              </a:spcAft>
+              <a:buClr>
+                <a:srgbClr val="000000"/>
+              </a:buClr>
+              <a:buSzPts val="1900"/>
+              <a:buFont typeface="Arial" panose="020B0604020202020204"/>
+              <a:buNone/>
+            </a:pPr>
+            <a:endParaRPr lang="zh-CN" altLang="en-US" sz="1900" b="0" i="0" u="none" strike="noStrike" cap="none">
+              <a:solidFill>
+                <a:schemeClr val="dk1"/>
+              </a:solidFill>
+              <a:latin typeface="Montserrat" panose="00000500000000000000" charset="0"/>
+              <a:ea typeface="Arial" panose="020B0604020202020204"/>
+              <a:cs typeface="Montserrat" panose="00000500000000000000" charset="0"/>
+              <a:sym typeface="Arial" panose="020B0604020202020204"/>
+            </a:endParaRPr>
+          </a:p>
+          <a:p>
+            <a:pPr marL="914400" marR="0" lvl="0" indent="0" algn="l" rtl="0">
+              <a:lnSpc>
+                <a:spcPct val="150000"/>
+              </a:lnSpc>
+              <a:spcBef>
+                <a:spcPts val="0"/>
+              </a:spcBef>
+              <a:spcAft>
+                <a:spcPts val="0"/>
+              </a:spcAft>
+              <a:buClr>
+                <a:srgbClr val="000000"/>
+              </a:buClr>
+              <a:buSzPts val="1900"/>
+              <a:buFont typeface="Arial" panose="020B0604020202020204"/>
+              <a:buNone/>
+            </a:pPr>
+            <a:r>
+              <a:rPr lang="en-US" altLang="en-US" sz="1900" b="1" i="0" u="none" strike="noStrike" cap="none">
+                <a:solidFill>
+                  <a:schemeClr val="dk1"/>
+                </a:solidFill>
+                <a:latin typeface="Montserrat" panose="00000500000000000000" charset="0"/>
+                <a:ea typeface="Arial" panose="020B0604020202020204"/>
+                <a:cs typeface="Montserrat" panose="00000500000000000000" charset="0"/>
+                <a:sym typeface="Arial" panose="020B0604020202020204"/>
+              </a:rPr>
+              <a:t>Direct business benefit:</a:t>
+            </a:r>
+            <a:endParaRPr lang="en-US" altLang="en-US" sz="1900" b="1" i="0" u="none" strike="noStrike" cap="none">
+              <a:solidFill>
+                <a:schemeClr val="dk1"/>
+              </a:solidFill>
+              <a:latin typeface="Montserrat" panose="00000500000000000000" charset="0"/>
+              <a:ea typeface="Arial" panose="020B0604020202020204"/>
+              <a:cs typeface="Montserrat" panose="00000500000000000000" charset="0"/>
+              <a:sym typeface="Arial" panose="020B0604020202020204"/>
+            </a:endParaRPr>
+          </a:p>
+          <a:p>
+            <a:pPr marL="1257300" marR="0" lvl="0" indent="-342900" algn="l" rtl="0">
+              <a:lnSpc>
+                <a:spcPct val="150000"/>
+              </a:lnSpc>
+              <a:spcBef>
+                <a:spcPts val="0"/>
+              </a:spcBef>
+              <a:spcAft>
+                <a:spcPts val="0"/>
+              </a:spcAft>
+              <a:buClr>
+                <a:srgbClr val="000000"/>
+              </a:buClr>
+              <a:buSzPts val="1900"/>
+              <a:buFont typeface="Arial" panose="020B0604020202020204" pitchFamily="34" charset="0"/>
+              <a:buChar char="•"/>
+            </a:pPr>
+            <a:r>
+              <a:rPr lang="en-US" altLang="en-US" sz="1900" b="0" i="0" u="none" strike="noStrike" cap="none">
+                <a:solidFill>
+                  <a:schemeClr val="dk1"/>
+                </a:solidFill>
+                <a:latin typeface="Montserrat" panose="00000500000000000000" charset="0"/>
+                <a:ea typeface="Arial" panose="020B0604020202020204"/>
+                <a:cs typeface="Montserrat" panose="00000500000000000000" charset="0"/>
+                <a:sym typeface="Arial" panose="020B0604020202020204"/>
+              </a:rPr>
+              <a:t>Reduced fraud loss</a:t>
+            </a:r>
+            <a:endParaRPr lang="en-US" altLang="en-US" sz="1900" b="0" i="0" u="none" strike="noStrike" cap="none">
+              <a:solidFill>
+                <a:schemeClr val="dk1"/>
+              </a:solidFill>
+              <a:latin typeface="Montserrat" panose="00000500000000000000" charset="0"/>
+              <a:ea typeface="Arial" panose="020B0604020202020204"/>
+              <a:cs typeface="Montserrat" panose="00000500000000000000" charset="0"/>
+              <a:sym typeface="Arial" panose="020B0604020202020204"/>
+            </a:endParaRPr>
+          </a:p>
+          <a:p>
+            <a:pPr marL="1257300" marR="0" lvl="0" indent="-342900" algn="l" rtl="0">
+              <a:lnSpc>
+                <a:spcPct val="150000"/>
+              </a:lnSpc>
+              <a:spcBef>
+                <a:spcPts val="0"/>
+              </a:spcBef>
+              <a:spcAft>
+                <a:spcPts val="0"/>
+              </a:spcAft>
+              <a:buClr>
+                <a:srgbClr val="000000"/>
+              </a:buClr>
+              <a:buSzPts val="1900"/>
+              <a:buFont typeface="Arial" panose="020B0604020202020204" pitchFamily="34" charset="0"/>
+              <a:buChar char="•"/>
+            </a:pPr>
+            <a:r>
+              <a:rPr lang="en-US" altLang="en-US" sz="1900" b="0" i="0" u="none" strike="noStrike" cap="none">
+                <a:solidFill>
+                  <a:schemeClr val="dk1"/>
+                </a:solidFill>
+                <a:latin typeface="Montserrat" panose="00000500000000000000" charset="0"/>
+                <a:ea typeface="Arial" panose="020B0604020202020204"/>
+                <a:cs typeface="Montserrat" panose="00000500000000000000" charset="0"/>
+                <a:sym typeface="Arial" panose="020B0604020202020204"/>
+              </a:rPr>
+              <a:t>Improved approval rate</a:t>
+            </a:r>
+            <a:endParaRPr lang="en-US" altLang="en-US" sz="1900" b="0" i="0" u="none" strike="noStrike" cap="none">
+              <a:solidFill>
+                <a:schemeClr val="dk1"/>
+              </a:solidFill>
+              <a:latin typeface="Montserrat" panose="00000500000000000000" charset="0"/>
+              <a:ea typeface="Arial" panose="020B0604020202020204"/>
+              <a:cs typeface="Montserrat" panose="00000500000000000000" charset="0"/>
+              <a:sym typeface="Arial" panose="020B0604020202020204"/>
+            </a:endParaRPr>
+          </a:p>
+          <a:p>
+            <a:pPr marL="1257300" marR="0" lvl="0" indent="-342900" algn="l" rtl="0">
+              <a:lnSpc>
+                <a:spcPct val="150000"/>
+              </a:lnSpc>
+              <a:spcBef>
+                <a:spcPts val="0"/>
+              </a:spcBef>
+              <a:spcAft>
+                <a:spcPts val="0"/>
+              </a:spcAft>
+              <a:buClr>
+                <a:srgbClr val="000000"/>
+              </a:buClr>
+              <a:buSzPts val="1900"/>
+              <a:buFont typeface="Arial" panose="020B0604020202020204" pitchFamily="34" charset="0"/>
+              <a:buChar char="•"/>
+            </a:pPr>
+            <a:r>
+              <a:rPr lang="en-US" altLang="en-US" sz="1900" b="0" i="0" u="none" strike="noStrike" cap="none">
+                <a:solidFill>
+                  <a:schemeClr val="dk1"/>
+                </a:solidFill>
+                <a:latin typeface="Montserrat" panose="00000500000000000000" charset="0"/>
+                <a:ea typeface="Arial" panose="020B0604020202020204"/>
+                <a:cs typeface="Montserrat" panose="00000500000000000000" charset="0"/>
+                <a:sym typeface="Arial" panose="020B0604020202020204"/>
+              </a:rPr>
+              <a:t>Increased revenue</a:t>
+            </a:r>
+            <a:endParaRPr sz="1900" b="0" i="0" u="none" strike="noStrike" cap="none">
+              <a:solidFill>
+                <a:schemeClr val="dk1"/>
+              </a:solidFill>
+              <a:latin typeface="Montserrat" panose="00000500000000000000" charset="0"/>
+              <a:ea typeface="Arial" panose="020B0604020202020204"/>
+              <a:cs typeface="Montserrat" panose="00000500000000000000" charset="0"/>
+              <a:sym typeface="Arial" panose="020B0604020202020204"/>
+            </a:endParaRPr>
+          </a:p>
+        </p:txBody>
+      </p:sp>
+    </p:spTree>
+  </p:cSld>
+  <p:clrMapOvr>
+    <a:masterClrMapping/>
+  </p:clrMapOvr>
+</p:sld>
+</file>
+
+<file path=ppt/slides/slide21.xml><?xml version="1.0" encoding="utf-8"?>
+<p:sld xmlns:a="http://schemas.openxmlformats.org/drawingml/2006/main" xmlns:r="http://schemas.openxmlformats.org/officeDocument/2006/relationships" xmlns:p="http://schemas.openxmlformats.org/presentationml/2006/main">
+  <p:cSld>
+    <p:spTree>
+      <p:nvGrpSpPr>
+        <p:cNvPr id="222" name="Shape 222"/>
+        <p:cNvGrpSpPr/>
+        <p:nvPr/>
+      </p:nvGrpSpPr>
+      <p:grpSpPr>
+        <a:xfrm>
+          <a:off x="0" y="0"/>
+          <a:ext cx="0" cy="0"/>
+          <a:chOff x="0" y="0"/>
+          <a:chExt cx="0" cy="0"/>
+        </a:xfrm>
+      </p:grpSpPr>
+      <p:sp>
+        <p:nvSpPr>
+          <p:cNvPr id="223" name="Google Shape;223;p30"/>
+          <p:cNvSpPr txBox="1"/>
+          <p:nvPr>
+            <p:ph type="sldNum" idx="12"/>
+          </p:nvPr>
+        </p:nvSpPr>
+        <p:spPr>
+          <a:xfrm>
+            <a:off x="11296611" y="6014423"/>
+            <a:ext cx="731600" cy="524800"/>
+          </a:xfrm>
+          <a:prstGeom prst="rect">
+            <a:avLst/>
+          </a:prstGeom>
+          <a:noFill/>
+          <a:ln>
+            <a:noFill/>
+          </a:ln>
+        </p:spPr>
+        <p:txBody>
+          <a:bodyPr spcFirstLastPara="1" wrap="square" lIns="91425" tIns="91425" rIns="91425" bIns="91425" anchor="ctr" anchorCtr="0">
+            <a:noAutofit/>
+          </a:bodyPr>
+          <a:lstStyle/>
+          <a:p>
+            <a:pPr marL="0" marR="0" lvl="0" indent="0" algn="l" rtl="0">
+              <a:lnSpc>
+                <a:spcPct val="100000"/>
+              </a:lnSpc>
+              <a:spcBef>
+                <a:spcPts val="0"/>
+              </a:spcBef>
+              <a:spcAft>
+                <a:spcPts val="0"/>
+              </a:spcAft>
+              <a:buClr>
+                <a:srgbClr val="000000"/>
+              </a:buClr>
+              <a:buSzPts val="1400"/>
+              <a:buFont typeface="Arial" panose="020B0604020202020204"/>
+              <a:buNone/>
+            </a:pPr>
+            <a:fld id="{00000000-1234-1234-1234-123412341234}" type="slidenum">
+              <a:rPr lang="en-US"/>
+            </a:fld>
+            <a:endParaRPr lang="en-US"/>
+          </a:p>
+        </p:txBody>
+      </p:sp>
+      <p:sp>
+        <p:nvSpPr>
+          <p:cNvPr id="224" name="Google Shape;224;p30"/>
+          <p:cNvSpPr txBox="1"/>
+          <p:nvPr/>
+        </p:nvSpPr>
+        <p:spPr>
+          <a:xfrm>
+            <a:off x="373665" y="535349"/>
+            <a:ext cx="12423900" cy="781050"/>
+          </a:xfrm>
+          <a:prstGeom prst="rect">
+            <a:avLst/>
+          </a:prstGeom>
+          <a:noFill/>
+          <a:ln>
+            <a:noFill/>
+          </a:ln>
+        </p:spPr>
+        <p:txBody>
+          <a:bodyPr spcFirstLastPara="1" wrap="square" lIns="121900" tIns="121900" rIns="121900" bIns="121900" anchor="ctr" anchorCtr="0">
+            <a:spAutoFit/>
+          </a:bodyPr>
+          <a:lstStyle/>
+          <a:p>
+            <a:pPr marL="0" marR="0" lvl="0" indent="0" algn="l" rtl="0">
+              <a:lnSpc>
+                <a:spcPct val="100000"/>
+              </a:lnSpc>
+              <a:spcBef>
+                <a:spcPts val="0"/>
+              </a:spcBef>
+              <a:spcAft>
+                <a:spcPts val="0"/>
+              </a:spcAft>
+              <a:buClr>
+                <a:srgbClr val="000000"/>
+              </a:buClr>
+              <a:buSzPts val="3500"/>
+              <a:buFont typeface="Arial" panose="020B0604020202020204"/>
+              <a:buNone/>
+            </a:pPr>
+            <a:r>
+              <a:rPr lang="en-US" altLang="en-US" sz="3500" b="0" i="0" u="none" strike="noStrike" cap="none">
+                <a:solidFill>
+                  <a:srgbClr val="000000"/>
+                </a:solidFill>
+                <a:latin typeface="Arial" panose="020B0604020202020204"/>
+                <a:ea typeface="Arial" panose="020B0604020202020204"/>
+                <a:cs typeface="Arial" panose="020B0604020202020204"/>
+                <a:sym typeface="Arial" panose="020B0604020202020204"/>
+              </a:rPr>
+              <a:t>Cost Optimization Curve</a:t>
+            </a:r>
+            <a:endParaRPr lang="en-US" altLang="en-US" sz="3500" b="0" i="0" u="none" strike="noStrike" cap="none">
+              <a:solidFill>
+                <a:srgbClr val="000000"/>
+              </a:solidFill>
+              <a:latin typeface="Arial" panose="020B0604020202020204"/>
+              <a:ea typeface="Arial" panose="020B0604020202020204"/>
+              <a:cs typeface="Arial" panose="020B0604020202020204"/>
+              <a:sym typeface="Arial" panose="020B0604020202020204"/>
+            </a:endParaRPr>
+          </a:p>
+        </p:txBody>
+      </p:sp>
+      <p:sp>
+        <p:nvSpPr>
+          <p:cNvPr id="225" name="Google Shape;225;p30"/>
+          <p:cNvSpPr txBox="1"/>
+          <p:nvPr/>
+        </p:nvSpPr>
+        <p:spPr>
+          <a:xfrm>
+            <a:off x="712032" y="1490008"/>
+            <a:ext cx="6400800" cy="369300"/>
+          </a:xfrm>
+          <a:prstGeom prst="rect">
+            <a:avLst/>
+          </a:prstGeom>
+          <a:noFill/>
+          <a:ln>
+            <a:noFill/>
+          </a:ln>
+        </p:spPr>
+        <p:txBody>
+          <a:bodyPr spcFirstLastPara="1" wrap="square" lIns="91425" tIns="45700" rIns="91425" bIns="45700" anchor="t" anchorCtr="0">
+            <a:spAutoFit/>
+          </a:bodyPr>
+          <a:lstStyle/>
+          <a:p>
+            <a:pPr marL="0" marR="0" lvl="0" indent="0" algn="l" rtl="0">
+              <a:lnSpc>
+                <a:spcPct val="100000"/>
+              </a:lnSpc>
+              <a:spcBef>
+                <a:spcPts val="0"/>
+              </a:spcBef>
+              <a:spcAft>
+                <a:spcPts val="0"/>
+              </a:spcAft>
+              <a:buClr>
+                <a:srgbClr val="000000"/>
+              </a:buClr>
+              <a:buSzPts val="1800"/>
+              <a:buFont typeface="Arial" panose="020B0604020202020204"/>
+              <a:buNone/>
+            </a:pPr>
+            <a:endParaRPr sz="1800" b="0" i="0" u="none" strike="noStrike" cap="none">
+              <a:solidFill>
+                <a:schemeClr val="dk1"/>
+              </a:solidFill>
+              <a:latin typeface="Montserrat" panose="00000500000000000000"/>
+              <a:ea typeface="Montserrat" panose="00000500000000000000"/>
+              <a:cs typeface="Montserrat" panose="00000500000000000000"/>
+              <a:sym typeface="Montserrat" panose="00000500000000000000"/>
+            </a:endParaRPr>
+          </a:p>
+        </p:txBody>
+      </p:sp>
+      <p:pic>
+        <p:nvPicPr>
+          <p:cNvPr id="1" name="Picture 0"/>
+          <p:cNvPicPr>
+            <a:picLocks noChangeAspect="1"/>
+          </p:cNvPicPr>
+          <p:nvPr/>
+        </p:nvPicPr>
+        <p:blipFill>
+          <a:blip r:embed="rId1"/>
+          <a:stretch>
+            <a:fillRect/>
+          </a:stretch>
+        </p:blipFill>
+        <p:spPr>
+          <a:xfrm>
+            <a:off x="1703705" y="1316355"/>
+            <a:ext cx="7874000" cy="5252085"/>
+          </a:xfrm>
+          <a:prstGeom prst="rect">
+            <a:avLst/>
+          </a:prstGeom>
+        </p:spPr>
+      </p:pic>
+    </p:spTree>
+  </p:cSld>
+  <p:clrMapOvr>
+    <a:masterClrMapping/>
+  </p:clrMapOvr>
+</p:sld>
+</file>
+
+<file path=ppt/slides/slide22.xml><?xml version="1.0" encoding="utf-8"?>
+<p:sld xmlns:a="http://schemas.openxmlformats.org/drawingml/2006/main" xmlns:r="http://schemas.openxmlformats.org/officeDocument/2006/relationships" xmlns:p="http://schemas.openxmlformats.org/presentationml/2006/main">
+  <p:cSld>
+    <p:spTree>
+      <p:nvGrpSpPr>
+        <p:cNvPr id="222" name="Shape 222"/>
+        <p:cNvGrpSpPr/>
+        <p:nvPr/>
+      </p:nvGrpSpPr>
+      <p:grpSpPr>
+        <a:xfrm>
+          <a:off x="0" y="0"/>
+          <a:ext cx="0" cy="0"/>
+          <a:chOff x="0" y="0"/>
+          <a:chExt cx="0" cy="0"/>
+        </a:xfrm>
+      </p:grpSpPr>
+      <p:sp>
+        <p:nvSpPr>
+          <p:cNvPr id="223" name="Google Shape;223;p30"/>
+          <p:cNvSpPr txBox="1"/>
+          <p:nvPr>
+            <p:ph type="sldNum" idx="12"/>
+          </p:nvPr>
+        </p:nvSpPr>
+        <p:spPr>
+          <a:xfrm>
+            <a:off x="11296611" y="6014423"/>
+            <a:ext cx="731600" cy="524800"/>
+          </a:xfrm>
+          <a:prstGeom prst="rect">
+            <a:avLst/>
+          </a:prstGeom>
+          <a:noFill/>
+          <a:ln>
+            <a:noFill/>
+          </a:ln>
+        </p:spPr>
+        <p:txBody>
+          <a:bodyPr spcFirstLastPara="1" wrap="square" lIns="91425" tIns="91425" rIns="91425" bIns="91425" anchor="ctr" anchorCtr="0">
+            <a:noAutofit/>
+          </a:bodyPr>
+          <a:lstStyle/>
+          <a:p>
+            <a:pPr marL="0" marR="0" lvl="0" indent="0" algn="l" rtl="0">
+              <a:lnSpc>
+                <a:spcPct val="100000"/>
+              </a:lnSpc>
+              <a:spcBef>
+                <a:spcPts val="0"/>
+              </a:spcBef>
+              <a:spcAft>
+                <a:spcPts val="0"/>
+              </a:spcAft>
+              <a:buClr>
+                <a:srgbClr val="000000"/>
+              </a:buClr>
+              <a:buSzPts val="1400"/>
+              <a:buFont typeface="Arial" panose="020B0604020202020204"/>
+              <a:buNone/>
+            </a:pPr>
+            <a:fld id="{00000000-1234-1234-1234-123412341234}" type="slidenum">
+              <a:rPr lang="en-US"/>
+            </a:fld>
+            <a:endParaRPr lang="en-US"/>
+          </a:p>
+        </p:txBody>
+      </p:sp>
+      <p:sp>
+        <p:nvSpPr>
+          <p:cNvPr id="224" name="Google Shape;224;p30"/>
+          <p:cNvSpPr txBox="1"/>
+          <p:nvPr/>
+        </p:nvSpPr>
+        <p:spPr>
+          <a:xfrm>
+            <a:off x="373665" y="533324"/>
+            <a:ext cx="12423900" cy="785100"/>
+          </a:xfrm>
+          <a:prstGeom prst="rect">
+            <a:avLst/>
+          </a:prstGeom>
+          <a:noFill/>
+          <a:ln>
+            <a:noFill/>
+          </a:ln>
+        </p:spPr>
+        <p:txBody>
+          <a:bodyPr spcFirstLastPara="1" wrap="square" lIns="121900" tIns="121900" rIns="121900" bIns="121900" anchor="ctr" anchorCtr="0">
+            <a:spAutoFit/>
+          </a:bodyPr>
+          <a:lstStyle/>
+          <a:p>
+            <a:pPr marL="0" marR="0" lvl="0" indent="0" algn="l" rtl="0">
+              <a:lnSpc>
+                <a:spcPct val="100000"/>
+              </a:lnSpc>
+              <a:spcBef>
+                <a:spcPts val="0"/>
+              </a:spcBef>
+              <a:spcAft>
+                <a:spcPts val="0"/>
+              </a:spcAft>
+              <a:buClr>
+                <a:srgbClr val="000000"/>
+              </a:buClr>
+              <a:buSzPts val="3500"/>
+              <a:buFont typeface="Arial" panose="020B0604020202020204"/>
+              <a:buNone/>
+            </a:pPr>
+            <a:r>
+              <a:rPr lang="en-US" sz="3500" b="0" i="0" u="none" strike="noStrike" cap="none">
+                <a:solidFill>
+                  <a:schemeClr val="dk1"/>
+                </a:solidFill>
+                <a:latin typeface="Arial" panose="020B0604020202020204"/>
+                <a:ea typeface="Arial" panose="020B0604020202020204"/>
+                <a:cs typeface="Arial" panose="020B0604020202020204"/>
+                <a:sym typeface="Arial" panose="020B0604020202020204"/>
+              </a:rPr>
+              <a:t>Conclusion</a:t>
+            </a:r>
+            <a:endParaRPr sz="3500" b="0" i="0" u="none" strike="noStrike" cap="none">
+              <a:solidFill>
+                <a:srgbClr val="000000"/>
+              </a:solidFill>
+              <a:latin typeface="Arial" panose="020B0604020202020204"/>
+              <a:ea typeface="Arial" panose="020B0604020202020204"/>
+              <a:cs typeface="Arial" panose="020B0604020202020204"/>
+              <a:sym typeface="Arial" panose="020B0604020202020204"/>
+            </a:endParaRPr>
+          </a:p>
+        </p:txBody>
+      </p:sp>
+      <p:sp>
+        <p:nvSpPr>
+          <p:cNvPr id="225" name="Google Shape;225;p30"/>
+          <p:cNvSpPr txBox="1"/>
+          <p:nvPr/>
+        </p:nvSpPr>
+        <p:spPr>
+          <a:xfrm>
+            <a:off x="712032" y="1490008"/>
+            <a:ext cx="6400800" cy="369300"/>
+          </a:xfrm>
+          <a:prstGeom prst="rect">
+            <a:avLst/>
+          </a:prstGeom>
+          <a:noFill/>
+          <a:ln>
+            <a:noFill/>
+          </a:ln>
+        </p:spPr>
+        <p:txBody>
+          <a:bodyPr spcFirstLastPara="1" wrap="square" lIns="91425" tIns="45700" rIns="91425" bIns="45700" anchor="t" anchorCtr="0">
+            <a:spAutoFit/>
+          </a:bodyPr>
+          <a:lstStyle/>
+          <a:p>
+            <a:pPr marL="0" marR="0" lvl="0" indent="0" algn="l" rtl="0">
+              <a:lnSpc>
+                <a:spcPct val="100000"/>
+              </a:lnSpc>
+              <a:spcBef>
+                <a:spcPts val="0"/>
+              </a:spcBef>
+              <a:spcAft>
+                <a:spcPts val="0"/>
+              </a:spcAft>
+              <a:buClr>
+                <a:srgbClr val="000000"/>
+              </a:buClr>
+              <a:buSzPts val="1800"/>
+              <a:buFont typeface="Arial" panose="020B0604020202020204"/>
+              <a:buNone/>
+            </a:pPr>
+            <a:endParaRPr sz="1800" b="0" i="0" u="none" strike="noStrike" cap="none">
+              <a:solidFill>
+                <a:schemeClr val="dk1"/>
+              </a:solidFill>
+              <a:latin typeface="Montserrat" panose="00000500000000000000"/>
+              <a:ea typeface="Montserrat" panose="00000500000000000000"/>
+              <a:cs typeface="Montserrat" panose="00000500000000000000"/>
+              <a:sym typeface="Montserrat" panose="00000500000000000000"/>
+            </a:endParaRPr>
+          </a:p>
+        </p:txBody>
+      </p:sp>
+      <p:sp>
+        <p:nvSpPr>
+          <p:cNvPr id="226" name="Google Shape;226;p30"/>
+          <p:cNvSpPr txBox="1"/>
+          <p:nvPr/>
+        </p:nvSpPr>
+        <p:spPr>
+          <a:xfrm>
+            <a:off x="551180" y="1557020"/>
+            <a:ext cx="10899140" cy="4676775"/>
+          </a:xfrm>
+          <a:prstGeom prst="rect">
+            <a:avLst/>
+          </a:prstGeom>
+          <a:noFill/>
+          <a:ln>
+            <a:noFill/>
+          </a:ln>
+        </p:spPr>
+        <p:txBody>
+          <a:bodyPr spcFirstLastPara="1" wrap="square" lIns="91425" tIns="91425" rIns="91425" bIns="91425" anchor="t" anchorCtr="0">
+            <a:noAutofit/>
+          </a:bodyPr>
+          <a:lstStyle/>
+          <a:p>
+            <a:pPr marL="914400" marR="0" lvl="0" indent="0" algn="l" rtl="0">
+              <a:lnSpc>
+                <a:spcPct val="150000"/>
+              </a:lnSpc>
+              <a:spcBef>
+                <a:spcPts val="0"/>
+              </a:spcBef>
+              <a:spcAft>
+                <a:spcPts val="0"/>
+              </a:spcAft>
+              <a:buClr>
+                <a:srgbClr val="000000"/>
+              </a:buClr>
+              <a:buSzPts val="1900"/>
+              <a:buFont typeface="Arial" panose="020B0604020202020204"/>
+              <a:buNone/>
+            </a:pPr>
+            <a:endParaRPr sz="1900" b="0" i="0" u="none" strike="noStrike" cap="none">
+              <a:solidFill>
+                <a:schemeClr val="dk1"/>
+              </a:solidFill>
+              <a:latin typeface="Arial" panose="020B0604020202020204"/>
+              <a:ea typeface="Arial" panose="020B0604020202020204"/>
+              <a:cs typeface="Arial" panose="020B0604020202020204"/>
+              <a:sym typeface="Arial" panose="020B0604020202020204"/>
+            </a:endParaRPr>
+          </a:p>
+          <a:p>
+            <a:pPr marL="285750" indent="-285750" algn="l">
+              <a:lnSpc>
+                <a:spcPct val="150000"/>
+              </a:lnSpc>
+              <a:spcAft>
+                <a:spcPts val="0"/>
+              </a:spcAft>
+              <a:buSzPts val="1900"/>
+              <a:buFont typeface="Arial" panose="020B0604020202020204" pitchFamily="34" charset="0"/>
+              <a:buChar char="•"/>
+            </a:pPr>
+            <a:r>
+              <a:rPr lang="en-US" altLang="en-US" sz="1800">
+                <a:solidFill>
+                  <a:schemeClr val="dk1"/>
+                </a:solidFill>
+                <a:latin typeface="Montserrat" panose="00000500000000000000" charset="0"/>
+                <a:cs typeface="Montserrat" panose="00000500000000000000" charset="0"/>
+                <a:sym typeface="+mn-ea"/>
+              </a:rPr>
+              <a:t>Random Forest achieved the best results on Paytm data: 99.9% Accuracy, AUC-ROC of 0.970, Precision 87.4% and Recall 82.0%.</a:t>
+            </a:r>
+            <a:endParaRPr lang="en-US" altLang="en-US" sz="1800">
+              <a:solidFill>
+                <a:schemeClr val="dk1"/>
+              </a:solidFill>
+              <a:latin typeface="Montserrat" panose="00000500000000000000" charset="0"/>
+              <a:cs typeface="Montserrat" panose="00000500000000000000" charset="0"/>
+            </a:endParaRPr>
+          </a:p>
+          <a:p>
+            <a:pPr marL="285750" indent="-285750" algn="l">
+              <a:lnSpc>
+                <a:spcPct val="150000"/>
+              </a:lnSpc>
+              <a:spcAft>
+                <a:spcPts val="0"/>
+              </a:spcAft>
+              <a:buSzPts val="1900"/>
+              <a:buFont typeface="Arial" panose="020B0604020202020204" pitchFamily="34" charset="0"/>
+              <a:buChar char="•"/>
+            </a:pPr>
+            <a:r>
+              <a:rPr lang="en-US" altLang="en-US" sz="1800">
+                <a:solidFill>
+                  <a:schemeClr val="dk1"/>
+                </a:solidFill>
+                <a:latin typeface="Montserrat" panose="00000500000000000000" charset="0"/>
+                <a:cs typeface="Montserrat" panose="00000500000000000000" charset="0"/>
+                <a:sym typeface="+mn-ea"/>
+              </a:rPr>
+              <a:t>99.9% Accuracy: Out of every 1,000 transactions, the model correctly classifies 999 as either safe or fraudulent.</a:t>
+            </a:r>
+            <a:endParaRPr lang="en-US" altLang="en-US" sz="1800">
+              <a:solidFill>
+                <a:schemeClr val="dk1"/>
+              </a:solidFill>
+              <a:latin typeface="Montserrat" panose="00000500000000000000" charset="0"/>
+              <a:cs typeface="Montserrat" panose="00000500000000000000" charset="0"/>
+            </a:endParaRPr>
+          </a:p>
+          <a:p>
+            <a:pPr marL="285750" indent="-285750" algn="l">
+              <a:lnSpc>
+                <a:spcPct val="150000"/>
+              </a:lnSpc>
+              <a:spcAft>
+                <a:spcPts val="0"/>
+              </a:spcAft>
+              <a:buSzPts val="1900"/>
+              <a:buFont typeface="Arial" panose="020B0604020202020204" pitchFamily="34" charset="0"/>
+              <a:buChar char="•"/>
+            </a:pPr>
+            <a:r>
+              <a:rPr lang="en-US" altLang="en-US" sz="1800">
+                <a:solidFill>
+                  <a:schemeClr val="dk1"/>
+                </a:solidFill>
+                <a:latin typeface="Montserrat" panose="00000500000000000000" charset="0"/>
+                <a:cs typeface="Montserrat" panose="00000500000000000000" charset="0"/>
+                <a:sym typeface="+mn-ea"/>
+              </a:rPr>
+              <a:t>AUC-ROC of 0.970: This indicates outstanding model performance. The Area Under the Curve (AUC) measures how well the model separates the two classes (fraud vs. non-fraud). An AUC of 0.97 (out of 1.0) means it is highly unlikely the model will confuse a fraudulent transaction with a safe one.</a:t>
+            </a:r>
+            <a:endParaRPr lang="en-US" altLang="en-US" sz="1800">
+              <a:solidFill>
+                <a:schemeClr val="dk1"/>
+              </a:solidFill>
+              <a:latin typeface="Montserrat" panose="00000500000000000000" charset="0"/>
+              <a:cs typeface="Montserrat" panose="00000500000000000000" charset="0"/>
+            </a:endParaRPr>
+          </a:p>
+          <a:p>
+            <a:pPr marL="285750" marR="0" lvl="0" indent="-285750" algn="l" rtl="0">
+              <a:lnSpc>
+                <a:spcPct val="150000"/>
+              </a:lnSpc>
+              <a:spcBef>
+                <a:spcPts val="0"/>
+              </a:spcBef>
+              <a:spcAft>
+                <a:spcPts val="0"/>
+              </a:spcAft>
+              <a:buClr>
+                <a:srgbClr val="000000"/>
+              </a:buClr>
+              <a:buSzPts val="1900"/>
+              <a:buFont typeface="Arial" panose="020B0604020202020204" pitchFamily="34" charset="0"/>
+              <a:buChar char="•"/>
+            </a:pPr>
+            <a:endParaRPr lang="en-US" altLang="en-US" sz="1800" b="0" i="0" u="none" strike="noStrike" cap="none">
+              <a:solidFill>
+                <a:schemeClr val="dk1"/>
+              </a:solidFill>
+              <a:latin typeface="Montserrat" panose="00000500000000000000" charset="0"/>
+              <a:ea typeface="Arial" panose="020B0604020202020204"/>
+              <a:cs typeface="Montserrat" panose="00000500000000000000" charset="0"/>
+              <a:sym typeface="Arial" panose="020B0604020202020204"/>
+            </a:endParaRPr>
+          </a:p>
+          <a:p>
+            <a:pPr marL="342900" marR="0" lvl="0" indent="-342900" algn="l" rtl="0">
+              <a:lnSpc>
+                <a:spcPct val="150000"/>
+              </a:lnSpc>
+              <a:spcBef>
+                <a:spcPts val="0"/>
+              </a:spcBef>
+              <a:spcAft>
+                <a:spcPts val="0"/>
+              </a:spcAft>
+              <a:buClr>
+                <a:srgbClr val="000000"/>
+              </a:buClr>
+              <a:buSzPts val="1900"/>
+              <a:buFont typeface="Arial" panose="020B0604020202020204" pitchFamily="34" charset="0"/>
+              <a:buChar char="•"/>
+            </a:pPr>
+            <a:endParaRPr sz="1900" b="0" i="0" u="none" strike="noStrike" cap="none">
+              <a:solidFill>
+                <a:schemeClr val="dk1"/>
+              </a:solidFill>
+              <a:latin typeface="Arial" panose="020B0604020202020204"/>
+              <a:ea typeface="Arial" panose="020B0604020202020204"/>
+              <a:cs typeface="Arial" panose="020B0604020202020204"/>
+              <a:sym typeface="Arial" panose="020B0604020202020204"/>
+            </a:endParaRPr>
+          </a:p>
+        </p:txBody>
+      </p:sp>
+    </p:spTree>
+  </p:cSld>
+  <p:clrMapOvr>
+    <a:masterClrMapping/>
+  </p:clrMapOvr>
+</p:sld>
+</file>
+
+<file path=ppt/slides/slide23.xml><?xml version="1.0" encoding="utf-8"?>
+<p:sld xmlns:a="http://schemas.openxmlformats.org/drawingml/2006/main" xmlns:r="http://schemas.openxmlformats.org/officeDocument/2006/relationships" xmlns:p="http://schemas.openxmlformats.org/presentationml/2006/main">
+  <p:cSld>
+    <p:spTree>
+      <p:nvGrpSpPr>
+        <p:cNvPr id="222" name="Shape 222"/>
+        <p:cNvGrpSpPr/>
+        <p:nvPr/>
+      </p:nvGrpSpPr>
+      <p:grpSpPr>
+        <a:xfrm>
+          <a:off x="0" y="0"/>
+          <a:ext cx="0" cy="0"/>
+          <a:chOff x="0" y="0"/>
+          <a:chExt cx="0" cy="0"/>
+        </a:xfrm>
+      </p:grpSpPr>
+      <p:sp>
+        <p:nvSpPr>
+          <p:cNvPr id="223" name="Google Shape;223;p30"/>
+          <p:cNvSpPr txBox="1"/>
+          <p:nvPr>
+            <p:ph type="sldNum" idx="12"/>
+          </p:nvPr>
+        </p:nvSpPr>
+        <p:spPr>
+          <a:xfrm>
+            <a:off x="11296611" y="6014423"/>
+            <a:ext cx="731600" cy="524800"/>
+          </a:xfrm>
+          <a:prstGeom prst="rect">
+            <a:avLst/>
+          </a:prstGeom>
+          <a:noFill/>
+          <a:ln>
+            <a:noFill/>
+          </a:ln>
+        </p:spPr>
+        <p:txBody>
+          <a:bodyPr spcFirstLastPara="1" wrap="square" lIns="91425" tIns="91425" rIns="91425" bIns="91425" anchor="ctr" anchorCtr="0">
+            <a:noAutofit/>
+          </a:bodyPr>
+          <a:lstStyle/>
+          <a:p>
+            <a:pPr marL="0" marR="0" lvl="0" indent="0" algn="l" rtl="0">
+              <a:lnSpc>
+                <a:spcPct val="100000"/>
+              </a:lnSpc>
+              <a:spcBef>
+                <a:spcPts val="0"/>
+              </a:spcBef>
+              <a:spcAft>
+                <a:spcPts val="0"/>
+              </a:spcAft>
+              <a:buClr>
+                <a:srgbClr val="000000"/>
+              </a:buClr>
+              <a:buSzPts val="1400"/>
+              <a:buFont typeface="Arial" panose="020B0604020202020204"/>
+              <a:buNone/>
+            </a:pPr>
+            <a:fld id="{00000000-1234-1234-1234-123412341234}" type="slidenum">
+              <a:rPr lang="en-US"/>
+            </a:fld>
+            <a:endParaRPr lang="en-US"/>
+          </a:p>
+        </p:txBody>
+      </p:sp>
+      <p:sp>
+        <p:nvSpPr>
+          <p:cNvPr id="224" name="Google Shape;224;p30"/>
+          <p:cNvSpPr txBox="1"/>
+          <p:nvPr/>
+        </p:nvSpPr>
+        <p:spPr>
+          <a:xfrm>
+            <a:off x="373665" y="535349"/>
+            <a:ext cx="12423900" cy="781050"/>
+          </a:xfrm>
+          <a:prstGeom prst="rect">
+            <a:avLst/>
+          </a:prstGeom>
+          <a:noFill/>
+          <a:ln>
+            <a:noFill/>
+          </a:ln>
+        </p:spPr>
+        <p:txBody>
+          <a:bodyPr spcFirstLastPara="1" wrap="square" lIns="121900" tIns="121900" rIns="121900" bIns="121900" anchor="ctr" anchorCtr="0">
+            <a:spAutoFit/>
+          </a:bodyPr>
+          <a:lstStyle/>
+          <a:p>
+            <a:pPr marL="0" marR="0" lvl="0" indent="0" algn="l" rtl="0">
+              <a:lnSpc>
+                <a:spcPct val="100000"/>
+              </a:lnSpc>
+              <a:spcBef>
+                <a:spcPts val="0"/>
+              </a:spcBef>
+              <a:spcAft>
+                <a:spcPts val="0"/>
+              </a:spcAft>
+              <a:buClr>
+                <a:srgbClr val="000000"/>
+              </a:buClr>
+              <a:buSzPts val="3500"/>
+              <a:buFont typeface="Arial" panose="020B0604020202020204"/>
+              <a:buNone/>
+            </a:pPr>
+            <a:r>
               <a:rPr lang="en-US" sz="3500" b="1" i="0" u="none" strike="noStrike" cap="none">
                 <a:solidFill>
                   <a:schemeClr val="dk1"/>
@@ -24587,269 +27377,7 @@
 </p:sld>
 </file>
 
-<file path=ppt/slides/slide2.xml><?xml version="1.0" encoding="utf-8"?>
-<p:sld xmlns:a="http://schemas.openxmlformats.org/drawingml/2006/main" xmlns:r="http://schemas.openxmlformats.org/officeDocument/2006/relationships" xmlns:p="http://schemas.openxmlformats.org/presentationml/2006/main">
-  <p:cSld>
-    <p:spTree>
-      <p:nvGrpSpPr>
-        <p:cNvPr id="103" name="Shape 103"/>
-        <p:cNvGrpSpPr/>
-        <p:nvPr/>
-      </p:nvGrpSpPr>
-      <p:grpSpPr>
-        <a:xfrm>
-          <a:off x="0" y="0"/>
-          <a:ext cx="0" cy="0"/>
-          <a:chOff x="0" y="0"/>
-          <a:chExt cx="0" cy="0"/>
-        </a:xfrm>
-      </p:grpSpPr>
-      <p:sp>
-        <p:nvSpPr>
-          <p:cNvPr id="104" name="Google Shape;104;p16"/>
-          <p:cNvSpPr txBox="1"/>
-          <p:nvPr/>
-        </p:nvSpPr>
-        <p:spPr>
-          <a:xfrm>
-            <a:off x="191346" y="836761"/>
-            <a:ext cx="11656800" cy="719455"/>
-          </a:xfrm>
-          <a:prstGeom prst="rect">
-            <a:avLst/>
-          </a:prstGeom>
-          <a:noFill/>
-          <a:ln>
-            <a:noFill/>
-          </a:ln>
-        </p:spPr>
-        <p:txBody>
-          <a:bodyPr spcFirstLastPara="1" wrap="square" lIns="105100" tIns="52525" rIns="105100" bIns="52525" anchor="t" anchorCtr="0">
-            <a:spAutoFit/>
-          </a:bodyPr>
-          <a:lstStyle/>
-          <a:p>
-            <a:pPr marL="0" marR="0" lvl="0" indent="0" algn="l" rtl="0">
-              <a:lnSpc>
-                <a:spcPct val="100000"/>
-              </a:lnSpc>
-              <a:spcBef>
-                <a:spcPts val="0"/>
-              </a:spcBef>
-              <a:spcAft>
-                <a:spcPts val="0"/>
-              </a:spcAft>
-              <a:buClr>
-                <a:srgbClr val="000000"/>
-              </a:buClr>
-              <a:buSzPts val="3533"/>
-              <a:buFont typeface="Arial" panose="020B0604020202020204"/>
-              <a:buNone/>
-            </a:pPr>
-            <a:r>
-              <a:rPr lang="en-US" sz="4000" b="1" i="0" u="none" strike="noStrike" cap="none">
-                <a:solidFill>
-                  <a:schemeClr val="dk1"/>
-                </a:solidFill>
-                <a:latin typeface="Montserrat" panose="00000500000000000000" charset="0"/>
-                <a:ea typeface="Arial" panose="020B0604020202020204"/>
-                <a:cs typeface="Montserrat" panose="00000500000000000000" charset="0"/>
-                <a:sym typeface="Arial" panose="020B0604020202020204"/>
-              </a:rPr>
-              <a:t>Problem Statement</a:t>
-            </a:r>
-            <a:endParaRPr sz="4000" b="1" i="0" u="none" strike="noStrike" cap="none">
-              <a:solidFill>
-                <a:schemeClr val="dk1"/>
-              </a:solidFill>
-              <a:latin typeface="Montserrat" panose="00000500000000000000" charset="0"/>
-              <a:ea typeface="Arial" panose="020B0604020202020204"/>
-              <a:cs typeface="Montserrat" panose="00000500000000000000" charset="0"/>
-              <a:sym typeface="Arial" panose="020B0604020202020204"/>
-            </a:endParaRPr>
-          </a:p>
-        </p:txBody>
-      </p:sp>
-      <p:sp>
-        <p:nvSpPr>
-          <p:cNvPr id="105" name="Google Shape;105;p16"/>
-          <p:cNvSpPr txBox="1"/>
-          <p:nvPr/>
-        </p:nvSpPr>
-        <p:spPr>
-          <a:xfrm>
-            <a:off x="318770" y="1718945"/>
-            <a:ext cx="11679555" cy="4859020"/>
-          </a:xfrm>
-          <a:prstGeom prst="rect">
-            <a:avLst/>
-          </a:prstGeom>
-          <a:noFill/>
-          <a:ln>
-            <a:noFill/>
-          </a:ln>
-        </p:spPr>
-        <p:txBody>
-          <a:bodyPr spcFirstLastPara="1" wrap="square" lIns="121900" tIns="121900" rIns="121900" bIns="121900" anchor="t" anchorCtr="0">
-            <a:spAutoFit/>
-          </a:bodyPr>
-          <a:lstStyle/>
-          <a:p>
-            <a:pPr marL="457200" marR="0" lvl="0" indent="0" algn="just" rtl="0">
-              <a:lnSpc>
-                <a:spcPct val="200000"/>
-              </a:lnSpc>
-              <a:spcBef>
-                <a:spcPts val="1600"/>
-              </a:spcBef>
-              <a:spcAft>
-                <a:spcPts val="0"/>
-              </a:spcAft>
-              <a:buClr>
-                <a:srgbClr val="000000"/>
-              </a:buClr>
-              <a:buSzPts val="2500"/>
-              <a:buFont typeface="Arial" panose="020B0604020202020204"/>
-              <a:buNone/>
-            </a:pPr>
-            <a:r>
-              <a:rPr lang="en-US" altLang="en-US" sz="2500" b="0" i="0" u="none" strike="noStrike" cap="none">
-                <a:solidFill>
-                  <a:srgbClr val="000000"/>
-                </a:solidFill>
-                <a:latin typeface="Montserrat" panose="00000500000000000000" charset="0"/>
-                <a:ea typeface="Arial" panose="020B0604020202020204"/>
-                <a:cs typeface="Montserrat" panose="00000500000000000000" charset="0"/>
-                <a:sym typeface="Arial" panose="020B0604020202020204"/>
-              </a:rPr>
-              <a:t>Online payment systems have become widely used due to their convenience and speed. However, the rise in digital transactions has also increased the risk of fraud, where unauthorized users exploit system vulnerabilities. This creates financial losses and reduces user trust. Therefore, an effective system is needed to detect and prevent fraudulent transactions in real time.</a:t>
-            </a:r>
-            <a:endParaRPr lang="en-US" altLang="en-US" sz="2500" b="0" i="0" u="none" strike="noStrike" cap="none">
-              <a:solidFill>
-                <a:srgbClr val="000000"/>
-              </a:solidFill>
-              <a:latin typeface="Montserrat" panose="00000500000000000000" charset="0"/>
-              <a:ea typeface="Arial" panose="020B0604020202020204"/>
-              <a:cs typeface="Montserrat" panose="00000500000000000000" charset="0"/>
-              <a:sym typeface="Arial" panose="020B0604020202020204"/>
-            </a:endParaRPr>
-          </a:p>
-        </p:txBody>
-      </p:sp>
-      <p:sp>
-        <p:nvSpPr>
-          <p:cNvPr id="106" name="Google Shape;106;p16"/>
-          <p:cNvSpPr txBox="1"/>
-          <p:nvPr>
-            <p:ph type="sldNum" idx="12"/>
-          </p:nvPr>
-        </p:nvSpPr>
-        <p:spPr>
-          <a:xfrm>
-            <a:off x="11296611" y="6014423"/>
-            <a:ext cx="731600" cy="524800"/>
-          </a:xfrm>
-          <a:prstGeom prst="rect">
-            <a:avLst/>
-          </a:prstGeom>
-          <a:noFill/>
-          <a:ln>
-            <a:noFill/>
-          </a:ln>
-        </p:spPr>
-        <p:txBody>
-          <a:bodyPr spcFirstLastPara="1" wrap="square" lIns="91425" tIns="91425" rIns="91425" bIns="91425" anchor="ctr" anchorCtr="0">
-            <a:noAutofit/>
-          </a:bodyPr>
-          <a:lstStyle/>
-          <a:p>
-            <a:pPr marL="0" marR="0" lvl="0" indent="0" algn="l" rtl="0">
-              <a:lnSpc>
-                <a:spcPct val="100000"/>
-              </a:lnSpc>
-              <a:spcBef>
-                <a:spcPts val="0"/>
-              </a:spcBef>
-              <a:spcAft>
-                <a:spcPts val="0"/>
-              </a:spcAft>
-              <a:buClr>
-                <a:srgbClr val="000000"/>
-              </a:buClr>
-              <a:buSzPts val="1400"/>
-              <a:buFont typeface="Arial" panose="020B0604020202020204"/>
-              <a:buNone/>
-            </a:pPr>
-            <a:fld id="{00000000-1234-1234-1234-123412341234}" type="slidenum">
-              <a:rPr lang="en-US"/>
-            </a:fld>
-            <a:endParaRPr lang="en-US"/>
-          </a:p>
-        </p:txBody>
-      </p:sp>
-      <p:sp>
-        <p:nvSpPr>
-          <p:cNvPr id="107" name="Google Shape;107;p16"/>
-          <p:cNvSpPr txBox="1"/>
-          <p:nvPr/>
-        </p:nvSpPr>
-        <p:spPr>
-          <a:xfrm>
-            <a:off x="169121" y="3541809"/>
-            <a:ext cx="11656800" cy="649800"/>
-          </a:xfrm>
-          <a:prstGeom prst="rect">
-            <a:avLst/>
-          </a:prstGeom>
-          <a:noFill/>
-          <a:ln>
-            <a:noFill/>
-          </a:ln>
-        </p:spPr>
-        <p:txBody>
-          <a:bodyPr spcFirstLastPara="1" wrap="square" lIns="105100" tIns="52525" rIns="105100" bIns="52525" anchor="t" anchorCtr="0">
-            <a:spAutoFit/>
-          </a:bodyPr>
-          <a:lstStyle/>
-          <a:p>
-            <a:pPr marL="0" marR="0" lvl="0" indent="0" algn="l" rtl="0">
-              <a:lnSpc>
-                <a:spcPct val="100000"/>
-              </a:lnSpc>
-              <a:spcBef>
-                <a:spcPts val="0"/>
-              </a:spcBef>
-              <a:spcAft>
-                <a:spcPts val="0"/>
-              </a:spcAft>
-              <a:buClr>
-                <a:srgbClr val="000000"/>
-              </a:buClr>
-              <a:buSzPts val="3533"/>
-              <a:buFont typeface="Arial" panose="020B0604020202020204"/>
-              <a:buNone/>
-            </a:pPr>
-            <a:endParaRPr sz="3535" b="0" i="0" u="none" strike="noStrike" cap="none">
-              <a:solidFill>
-                <a:schemeClr val="dk1"/>
-              </a:solidFill>
-              <a:latin typeface="Arial" panose="020B0604020202020204"/>
-              <a:ea typeface="Arial" panose="020B0604020202020204"/>
-              <a:cs typeface="Arial" panose="020B0604020202020204"/>
-              <a:sym typeface="Arial" panose="020B0604020202020204"/>
-            </a:endParaRPr>
-          </a:p>
-        </p:txBody>
-      </p:sp>
-    </p:spTree>
-  </p:cSld>
-  <p:clrMapOvr>
-    <a:masterClrMapping/>
-  </p:clrMapOvr>
-</p:sld>
-</file>
-
-<file path=ppt/slides/slide20.xml><?xml version="1.0" encoding="utf-8"?>
+<file path=ppt/slides/slide24.xml><?xml version="1.0" encoding="utf-8"?>
 <p:sld xmlns:a="http://schemas.openxmlformats.org/drawingml/2006/main" xmlns:r="http://schemas.openxmlformats.org/officeDocument/2006/relationships" xmlns:p="http://schemas.openxmlformats.org/presentationml/2006/main">
   <p:cSld>
     <p:spTree>
@@ -25189,7 +27717,7 @@
         <p:spPr>
           <a:xfrm>
             <a:off x="767244" y="1053110"/>
-            <a:ext cx="10835100" cy="6603365"/>
+            <a:ext cx="10835100" cy="5012690"/>
           </a:xfrm>
           <a:prstGeom prst="rect">
             <a:avLst/>
@@ -25256,66 +27784,6 @@
                 <a:sym typeface="Arial" panose="020B0604020202020204"/>
               </a:rPr>
               <a:t>Build models to precisely identify fraudulent transactions using patterns, anomalies, and user behavior from historical payment data.</a:t>
-            </a:r>
-            <a:endParaRPr lang="en-US" altLang="en-US" sz="2000">
-              <a:solidFill>
-                <a:schemeClr val="dk1"/>
-              </a:solidFill>
-              <a:latin typeface="Montserrat" panose="00000500000000000000" charset="0"/>
-              <a:cs typeface="Montserrat" panose="00000500000000000000" charset="0"/>
-              <a:sym typeface="Arial" panose="020B0604020202020204"/>
-            </a:endParaRPr>
-          </a:p>
-          <a:p>
-            <a:pPr marL="457200" marR="0" lvl="0" indent="-368300" algn="l" rtl="0">
-              <a:lnSpc>
-                <a:spcPct val="150000"/>
-              </a:lnSpc>
-              <a:spcBef>
-                <a:spcPts val="1600"/>
-              </a:spcBef>
-              <a:spcAft>
-                <a:spcPts val="0"/>
-              </a:spcAft>
-              <a:buClr>
-                <a:schemeClr val="dk1"/>
-              </a:buClr>
-              <a:buSzPts val="2200"/>
-              <a:buFont typeface="Montserrat" panose="00000500000000000000"/>
-              <a:buChar char="●"/>
-            </a:pPr>
-            <a:r>
-              <a:rPr lang="en-US" altLang="en-US" sz="2000" b="1">
-                <a:solidFill>
-                  <a:schemeClr val="dk1"/>
-                </a:solidFill>
-                <a:latin typeface="Montserrat" panose="00000500000000000000" charset="0"/>
-                <a:cs typeface="Montserrat" panose="00000500000000000000" charset="0"/>
-                <a:sym typeface="Arial" panose="020B0604020202020204"/>
-              </a:rPr>
-              <a:t>Handle Class Imbalance</a:t>
-            </a:r>
-            <a:r>
-              <a:rPr lang="en-US" sz="2000">
-                <a:solidFill>
-                  <a:schemeClr val="dk1"/>
-                </a:solidFill>
-                <a:latin typeface="Montserrat" panose="00000500000000000000" charset="0"/>
-                <a:cs typeface="Montserrat" panose="00000500000000000000" charset="0"/>
-                <a:sym typeface="Arial" panose="020B0604020202020204"/>
-              </a:rPr>
-              <a:t>: </a:t>
-            </a:r>
-            <a:r>
-              <a:rPr lang="en-US" altLang="en-US" sz="2000">
-                <a:solidFill>
-                  <a:schemeClr val="dk1"/>
-                </a:solidFill>
-                <a:latin typeface="Montserrat" panose="00000500000000000000" charset="0"/>
-                <a:cs typeface="Montserrat" panose="00000500000000000000" charset="0"/>
-                <a:sym typeface="Arial" panose="020B0604020202020204"/>
-              </a:rPr>
-              <a:t>Apply techniques like SMOTE, undersampling, or class weighting to manage imbalance between legitimate and fraudulent transaction data.</a:t>
             </a:r>
             <a:endParaRPr lang="en-US" altLang="en-US" sz="2000">
               <a:solidFill>
@@ -28888,17 +31356,6 @@
             <a:pPr marL="0" indent="0">
               <a:buNone/>
             </a:pPr>
-            <a:r>
-              <a:rPr lang="en-US" sz="1100" b="1" dirty="0">
-                <a:solidFill>
-                  <a:srgbClr val="0D3B6E"/>
-                </a:solidFill>
-                <a:latin typeface="Calibri" panose="020F0502020204030204" pitchFamily="34" charset="0"/>
-                <a:ea typeface="Calibri" panose="020F0502020204030204" pitchFamily="34" charset="-122"/>
-                <a:cs typeface="Calibri" panose="020F0502020204030204" pitchFamily="34" charset="-120"/>
-              </a:rPr>
-              <a:t>Key Finding</a:t>
-            </a:r>
             <a:endParaRPr lang="en-US" sz="1100" dirty="0"/>
           </a:p>
         </p:txBody>
@@ -32465,7 +34922,7 @@
                 <a:cs typeface="Montserrat" panose="00000500000000000000" charset="0"/>
                 <a:sym typeface="+mn-ea"/>
               </a:rPr>
-              <a:t>With only 100 fraud cases vs 51,523 legitimate, a model trained without SMOTE wouldWith  predict 'Legit' always and still get 99.8% accuracy. SMOTE creates synthetic fraud examples to force the model to actually learn fraud patterns</a:t>
+              <a:t>With only 100 fraud cases vs 51,523 legitimate, a model trained without SMOTE would  predict 'Legit' always and still get 99.8% accuracy. SMOTE creates synthetic fraud examples to force the model to actually learn fraud patterns</a:t>
             </a:r>
             <a:endParaRPr lang="en-US" sz="1800" dirty="0">
               <a:solidFill>
@@ -32998,7 +35455,8 @@
 
 <file path=ppt/tags/tag22.xml><?xml version="1.0" encoding="utf-8"?>
 <p:tagLst xmlns:p="http://schemas.openxmlformats.org/presentationml/2006/main">
-  <p:tag name="KSO_WM_DIAGRAM_VIRTUALLY_FRAME" val="{&quot;height&quot;:301.68,&quot;left&quot;:432,&quot;top&quot;:82.8,&quot;width&quot;:270}"/>
+  <p:tag name="TABLE_ENDDRAG_ORIGIN_RECT" val="803*268"/>
+  <p:tag name="TABLE_ENDDRAG_RECT" val="67*121*803*268"/>
 </p:tagLst>
 </file>
 
@@ -33069,6 +35527,12 @@
 </file>
 
 <file path=ppt/tags/tag33.xml><?xml version="1.0" encoding="utf-8"?>
+<p:tagLst xmlns:p="http://schemas.openxmlformats.org/presentationml/2006/main">
+  <p:tag name="KSO_WM_DIAGRAM_VIRTUALLY_FRAME" val="{&quot;height&quot;:301.68,&quot;left&quot;:432,&quot;top&quot;:82.8,&quot;width&quot;:270}"/>
+</p:tagLst>
+</file>
+
+<file path=ppt/tags/tag34.xml><?xml version="1.0" encoding="utf-8"?>
 <p:tagLst xmlns:p="http://schemas.openxmlformats.org/presentationml/2006/main">
   <p:tag name="KSO_WM_DIAGRAM_VIRTUALLY_FRAME" val="{&quot;height&quot;:301.68,&quot;left&quot;:432,&quot;top&quot;:82.8,&quot;width&quot;:270}"/>
 </p:tagLst>

--- a/ShraddhaTiwari - Final Presentation.pptx
+++ b/ShraddhaTiwari - Final Presentation.pptx
@@ -23933,7 +23933,7 @@
       </p:sp>
       <p:graphicFrame>
         <p:nvGraphicFramePr>
-          <p:cNvPr id="1" name="Table 0"/>
+          <p:cNvPr id="2" name="Table 1"/>
           <p:cNvGraphicFramePr/>
           <p:nvPr>
             <p:custDataLst>
@@ -25896,7 +25896,7 @@
       </p:sp>
       <p:pic>
         <p:nvPicPr>
-          <p:cNvPr id="1" name="Picture 0"/>
+          <p:cNvPr id="2" name="Picture 1"/>
           <p:cNvPicPr>
             <a:picLocks noChangeAspect="1"/>
           </p:cNvPicPr>
@@ -25910,14 +25910,134 @@
         </p:blipFill>
         <p:spPr>
           <a:xfrm>
-            <a:off x="1703705" y="1316355"/>
-            <a:ext cx="7874000" cy="5252085"/>
+            <a:off x="623570" y="1316355"/>
+            <a:ext cx="5936615" cy="4913630"/>
           </a:xfrm>
           <a:prstGeom prst="rect">
             <a:avLst/>
           </a:prstGeom>
         </p:spPr>
       </p:pic>
+      <p:sp>
+        <p:nvSpPr>
+          <p:cNvPr id="208" name="Google Shape;208;p28"/>
+          <p:cNvSpPr txBox="1"/>
+          <p:nvPr/>
+        </p:nvSpPr>
+        <p:spPr>
+          <a:xfrm>
+            <a:off x="6805295" y="1489710"/>
+            <a:ext cx="5027930" cy="1656715"/>
+          </a:xfrm>
+          <a:prstGeom prst="rect">
+            <a:avLst/>
+          </a:prstGeom>
+          <a:noFill/>
+          <a:ln>
+            <a:noFill/>
+          </a:ln>
+        </p:spPr>
+        <p:txBody>
+          <a:bodyPr spcFirstLastPara="1" wrap="square" lIns="91425" tIns="91425" rIns="91425" bIns="91425" anchor="t" anchorCtr="0">
+            <a:noAutofit/>
+          </a:bodyPr>
+          <a:lstStyle/>
+          <a:p>
+            <a:pPr marL="0" indent="0">
+              <a:lnSpc>
+                <a:spcPct val="110000"/>
+              </a:lnSpc>
+              <a:buNone/>
+            </a:pPr>
+            <a:r>
+              <a:rPr lang="en-US" altLang="en-US" sz="1800">
+                <a:solidFill>
+                  <a:schemeClr val="dk1"/>
+                </a:solidFill>
+                <a:latin typeface="Montserrat" panose="00000500000000000000" charset="0"/>
+                <a:cs typeface="Montserrat" panose="00000500000000000000" charset="0"/>
+                <a:sym typeface="+mn-ea"/>
+              </a:rPr>
+              <a:t>Cost curve shows optimal threshold minimizing financial loss by balancing false positives and false negatives in fraud detection system</a:t>
+            </a:r>
+            <a:r>
+              <a:rPr lang="en-US" sz="1800">
+                <a:solidFill>
+                  <a:schemeClr val="dk1"/>
+                </a:solidFill>
+                <a:latin typeface="Montserrat" panose="00000500000000000000" charset="0"/>
+                <a:cs typeface="Montserrat" panose="00000500000000000000" charset="0"/>
+                <a:sym typeface="+mn-ea"/>
+              </a:rPr>
+              <a:t>ance.</a:t>
+            </a:r>
+            <a:endParaRPr lang="en-US" sz="1800" b="0" i="0" u="none" strike="noStrike" cap="none">
+              <a:solidFill>
+                <a:schemeClr val="dk1"/>
+              </a:solidFill>
+              <a:latin typeface="Montserrat" panose="00000500000000000000" charset="0"/>
+              <a:ea typeface="Arial" panose="020B0604020202020204"/>
+              <a:cs typeface="Montserrat" panose="00000500000000000000" charset="0"/>
+              <a:sym typeface="Arial" panose="020B0604020202020204"/>
+            </a:endParaRPr>
+          </a:p>
+        </p:txBody>
+      </p:sp>
+      <p:sp>
+        <p:nvSpPr>
+          <p:cNvPr id="1" name="Google Shape;208;p28"/>
+          <p:cNvSpPr txBox="1"/>
+          <p:nvPr/>
+        </p:nvSpPr>
+        <p:spPr>
+          <a:xfrm>
+            <a:off x="6804660" y="3429000"/>
+            <a:ext cx="5016500" cy="1647825"/>
+          </a:xfrm>
+          <a:prstGeom prst="rect">
+            <a:avLst/>
+          </a:prstGeom>
+          <a:noFill/>
+          <a:ln>
+            <a:noFill/>
+          </a:ln>
+        </p:spPr>
+        <p:txBody>
+          <a:bodyPr spcFirstLastPara="1" wrap="square" lIns="91425" tIns="91425" rIns="91425" bIns="91425" anchor="t" anchorCtr="0">
+            <a:noAutofit/>
+          </a:bodyPr>
+          <a:lstStyle/>
+          <a:p>
+            <a:pPr marL="0" indent="0">
+              <a:lnSpc>
+                <a:spcPct val="110000"/>
+              </a:lnSpc>
+              <a:buNone/>
+            </a:pPr>
+            <a:r>
+              <a:rPr lang="en-US" altLang="en-US" sz="1800" b="1" i="0" u="none" strike="noStrike" cap="none">
+                <a:solidFill>
+                  <a:schemeClr val="dk1"/>
+                </a:solidFill>
+                <a:latin typeface="Montserrat" panose="00000500000000000000" charset="0"/>
+                <a:ea typeface="Arial" panose="020B0604020202020204"/>
+                <a:cs typeface="Montserrat" panose="00000500000000000000" charset="0"/>
+                <a:sym typeface="Arial" panose="020B0604020202020204"/>
+              </a:rPr>
+              <a:t>We optimized threshold based on cost instead of accuracy, reducing total fraud-related financial loss and improving business profitability.</a:t>
+            </a:r>
+            <a:endParaRPr lang="en-US" altLang="en-US" sz="1800" b="1" i="0" u="none" strike="noStrike" cap="none">
+              <a:solidFill>
+                <a:schemeClr val="dk1"/>
+              </a:solidFill>
+              <a:latin typeface="Montserrat" panose="00000500000000000000" charset="0"/>
+              <a:ea typeface="Arial" panose="020B0604020202020204"/>
+              <a:cs typeface="Montserrat" panose="00000500000000000000" charset="0"/>
+              <a:sym typeface="Arial" panose="020B0604020202020204"/>
+            </a:endParaRPr>
+          </a:p>
+        </p:txBody>
+      </p:sp>
     </p:spTree>
   </p:cSld>
   <p:clrMapOvr>

--- a/ShraddhaTiwari - Final Presentation.pptx
+++ b/ShraddhaTiwari - Final Presentation.pptx
@@ -18,39 +18,40 @@
     <p:sldId id="273" r:id="rId11"/>
     <p:sldId id="263" r:id="rId12"/>
     <p:sldId id="264" r:id="rId13"/>
-    <p:sldId id="265" r:id="rId14"/>
-    <p:sldId id="267" r:id="rId15"/>
-    <p:sldId id="268" r:id="rId16"/>
-    <p:sldId id="274" r:id="rId17"/>
-    <p:sldId id="276" r:id="rId18"/>
-    <p:sldId id="269" r:id="rId19"/>
-    <p:sldId id="270" r:id="rId20"/>
-    <p:sldId id="277" r:id="rId21"/>
-    <p:sldId id="278" r:id="rId22"/>
-    <p:sldId id="279" r:id="rId23"/>
-    <p:sldId id="280" r:id="rId24"/>
-    <p:sldId id="271" r:id="rId25"/>
-    <p:sldId id="275" r:id="rId26"/>
-    <p:sldId id="272" r:id="rId27"/>
+    <p:sldId id="281" r:id="rId14"/>
+    <p:sldId id="265" r:id="rId15"/>
+    <p:sldId id="267" r:id="rId16"/>
+    <p:sldId id="268" r:id="rId17"/>
+    <p:sldId id="274" r:id="rId18"/>
+    <p:sldId id="276" r:id="rId19"/>
+    <p:sldId id="269" r:id="rId20"/>
+    <p:sldId id="270" r:id="rId21"/>
+    <p:sldId id="277" r:id="rId22"/>
+    <p:sldId id="278" r:id="rId23"/>
+    <p:sldId id="279" r:id="rId24"/>
+    <p:sldId id="280" r:id="rId25"/>
+    <p:sldId id="271" r:id="rId26"/>
+    <p:sldId id="275" r:id="rId27"/>
+    <p:sldId id="272" r:id="rId28"/>
   </p:sldIdLst>
   <p:sldSz cx="12192000" cy="6858000"/>
   <p:notesSz cx="6858000" cy="9144000"/>
   <p:embeddedFontLst>
     <p:embeddedFont>
       <p:font typeface="Calibri" panose="020F0502020204030204"/>
-      <p:regular r:id="rId31"/>
+      <p:regular r:id="rId32"/>
     </p:embeddedFont>
     <p:embeddedFont>
       <p:font typeface="Montserrat" panose="00000500000000000000" charset="0"/>
-      <p:regular r:id="rId32"/>
+      <p:regular r:id="rId33"/>
     </p:embeddedFont>
     <p:embeddedFont>
       <p:font typeface="Montserrat" panose="00000500000000000000"/>
-      <p:regular r:id="rId33"/>
+      <p:regular r:id="rId34"/>
     </p:embeddedFont>
     <p:embeddedFont>
       <p:font typeface="Calibri" panose="020F0502020204030204" pitchFamily="34" charset="-122"/>
-      <p:regular r:id="rId34"/>
+      <p:regular r:id="rId35"/>
     </p:embeddedFont>
   </p:embeddedFontLst>
   <p:defaultTextStyle>
@@ -2177,6 +2178,128 @@
   <p:cSld>
     <p:spTree>
       <p:nvGrpSpPr>
+        <p:cNvPr id="166" name="Shape 166"/>
+        <p:cNvGrpSpPr/>
+        <p:nvPr/>
+      </p:nvGrpSpPr>
+      <p:grpSpPr>
+        <a:xfrm>
+          <a:off x="0" y="0"/>
+          <a:ext cx="0" cy="0"/>
+          <a:chOff x="0" y="0"/>
+          <a:chExt cx="0" cy="0"/>
+        </a:xfrm>
+      </p:grpSpPr>
+      <p:sp>
+        <p:nvSpPr>
+          <p:cNvPr id="167" name="Google Shape;167;p10:notes"/>
+          <p:cNvSpPr/>
+          <p:nvPr>
+            <p:ph type="sldImg" idx="2"/>
+          </p:nvPr>
+        </p:nvSpPr>
+        <p:spPr>
+          <a:xfrm>
+            <a:off x="381000" y="685800"/>
+            <a:ext cx="6096000" cy="3429000"/>
+          </a:xfrm>
+          <a:custGeom>
+            <a:avLst/>
+            <a:gdLst/>
+            <a:ahLst/>
+            <a:cxnLst/>
+            <a:rect l="l" t="t" r="r" b="b"/>
+            <a:pathLst>
+              <a:path w="120000" h="120000" extrusionOk="0">
+                <a:moveTo>
+                  <a:pt x="0" y="0"/>
+                </a:moveTo>
+                <a:lnTo>
+                  <a:pt x="120000" y="0"/>
+                </a:lnTo>
+                <a:lnTo>
+                  <a:pt x="120000" y="120000"/>
+                </a:lnTo>
+                <a:lnTo>
+                  <a:pt x="0" y="120000"/>
+                </a:lnTo>
+                <a:close/>
+              </a:path>
+            </a:pathLst>
+          </a:custGeom>
+          <a:noFill/>
+          <a:ln w="9525" cap="flat" cmpd="sng">
+            <a:solidFill>
+              <a:srgbClr val="000000"/>
+            </a:solidFill>
+            <a:prstDash val="solid"/>
+            <a:round/>
+            <a:headEnd type="none" w="sm" len="sm"/>
+            <a:tailEnd type="none" w="sm" len="sm"/>
+          </a:ln>
+        </p:spPr>
+      </p:sp>
+      <p:sp>
+        <p:nvSpPr>
+          <p:cNvPr id="168" name="Google Shape;168;p10:notes"/>
+          <p:cNvSpPr txBox="1"/>
+          <p:nvPr>
+            <p:ph type="body" idx="1"/>
+          </p:nvPr>
+        </p:nvSpPr>
+        <p:spPr>
+          <a:xfrm>
+            <a:off x="685800" y="4343400"/>
+            <a:ext cx="5486400" cy="4114800"/>
+          </a:xfrm>
+          <a:prstGeom prst="rect">
+            <a:avLst/>
+          </a:prstGeom>
+          <a:noFill/>
+          <a:ln>
+            <a:noFill/>
+          </a:ln>
+        </p:spPr>
+        <p:txBody>
+          <a:bodyPr spcFirstLastPara="1" wrap="square" lIns="91425" tIns="91425" rIns="91425" bIns="91425" anchor="t" anchorCtr="0">
+            <a:noAutofit/>
+          </a:bodyPr>
+          <a:lstStyle/>
+          <a:p>
+            <a:pPr marL="457200" lvl="0" indent="0" algn="l" rtl="0">
+              <a:lnSpc>
+                <a:spcPct val="115000"/>
+              </a:lnSpc>
+              <a:spcBef>
+                <a:spcPts val="1200"/>
+              </a:spcBef>
+              <a:spcAft>
+                <a:spcPts val="1200"/>
+              </a:spcAft>
+              <a:buClr>
+                <a:schemeClr val="dk1"/>
+              </a:buClr>
+              <a:buSzPts val="1100"/>
+              <a:buFont typeface="Calibri" panose="020F0502020204030204"/>
+              <a:buNone/>
+            </a:pPr>
+            <a:endParaRPr sz="1200"/>
+          </a:p>
+        </p:txBody>
+      </p:sp>
+    </p:spTree>
+  </p:cSld>
+  <p:clrMapOvr>
+    <a:masterClrMapping/>
+  </p:clrMapOvr>
+</p:notes>
+</file>
+
+<file path=ppt/notesSlides/notesSlide13.xml><?xml version="1.0" encoding="utf-8"?>
+<p:notes xmlns:a="http://schemas.openxmlformats.org/drawingml/2006/main" xmlns:r="http://schemas.openxmlformats.org/officeDocument/2006/relationships" xmlns:p="http://schemas.openxmlformats.org/presentationml/2006/main" showMasterPhAnim="0" showMasterSp="0">
+  <p:cSld>
+    <p:spTree>
+      <p:nvGrpSpPr>
         <p:cNvPr id="184" name="Shape 184"/>
         <p:cNvGrpSpPr/>
         <p:nvPr/>
@@ -2294,7 +2417,7 @@
 </p:notes>
 </file>
 
-<file path=ppt/notesSlides/notesSlide13.xml><?xml version="1.0" encoding="utf-8"?>
+<file path=ppt/notesSlides/notesSlide14.xml><?xml version="1.0" encoding="utf-8"?>
 <p:notes xmlns:a="http://schemas.openxmlformats.org/drawingml/2006/main" xmlns:r="http://schemas.openxmlformats.org/officeDocument/2006/relationships" xmlns:p="http://schemas.openxmlformats.org/presentationml/2006/main" showMasterPhAnim="0" showMasterSp="0">
   <p:cSld>
     <p:spTree>
@@ -2402,128 +2525,6 @@
             <a:tailEnd type="none" w="sm" len="sm"/>
           </a:ln>
         </p:spPr>
-      </p:sp>
-    </p:spTree>
-  </p:cSld>
-  <p:clrMapOvr>
-    <a:masterClrMapping/>
-  </p:clrMapOvr>
-</p:notes>
-</file>
-
-<file path=ppt/notesSlides/notesSlide14.xml><?xml version="1.0" encoding="utf-8"?>
-<p:notes xmlns:a="http://schemas.openxmlformats.org/drawingml/2006/main" xmlns:r="http://schemas.openxmlformats.org/officeDocument/2006/relationships" xmlns:p="http://schemas.openxmlformats.org/presentationml/2006/main" showMasterPhAnim="0" showMasterSp="0">
-  <p:cSld>
-    <p:spTree>
-      <p:nvGrpSpPr>
-        <p:cNvPr id="176" name="Shape 176"/>
-        <p:cNvGrpSpPr/>
-        <p:nvPr/>
-      </p:nvGrpSpPr>
-      <p:grpSpPr>
-        <a:xfrm>
-          <a:off x="0" y="0"/>
-          <a:ext cx="0" cy="0"/>
-          <a:chOff x="0" y="0"/>
-          <a:chExt cx="0" cy="0"/>
-        </a:xfrm>
-      </p:grpSpPr>
-      <p:sp>
-        <p:nvSpPr>
-          <p:cNvPr id="177" name="Google Shape;177;p11:notes"/>
-          <p:cNvSpPr/>
-          <p:nvPr>
-            <p:ph type="sldImg" idx="2"/>
-          </p:nvPr>
-        </p:nvSpPr>
-        <p:spPr>
-          <a:xfrm>
-            <a:off x="381000" y="685800"/>
-            <a:ext cx="6096000" cy="3429000"/>
-          </a:xfrm>
-          <a:custGeom>
-            <a:avLst/>
-            <a:gdLst/>
-            <a:ahLst/>
-            <a:cxnLst/>
-            <a:rect l="l" t="t" r="r" b="b"/>
-            <a:pathLst>
-              <a:path w="120000" h="120000" extrusionOk="0">
-                <a:moveTo>
-                  <a:pt x="0" y="0"/>
-                </a:moveTo>
-                <a:lnTo>
-                  <a:pt x="120000" y="0"/>
-                </a:lnTo>
-                <a:lnTo>
-                  <a:pt x="120000" y="120000"/>
-                </a:lnTo>
-                <a:lnTo>
-                  <a:pt x="0" y="120000"/>
-                </a:lnTo>
-                <a:close/>
-              </a:path>
-            </a:pathLst>
-          </a:custGeom>
-          <a:noFill/>
-          <a:ln w="9525" cap="flat" cmpd="sng">
-            <a:solidFill>
-              <a:srgbClr val="000000"/>
-            </a:solidFill>
-            <a:prstDash val="solid"/>
-            <a:round/>
-            <a:headEnd type="none" w="sm" len="sm"/>
-            <a:tailEnd type="none" w="sm" len="sm"/>
-          </a:ln>
-        </p:spPr>
-      </p:sp>
-      <p:sp>
-        <p:nvSpPr>
-          <p:cNvPr id="178" name="Google Shape;178;p11:notes"/>
-          <p:cNvSpPr txBox="1"/>
-          <p:nvPr>
-            <p:ph type="body" idx="1"/>
-          </p:nvPr>
-        </p:nvSpPr>
-        <p:spPr>
-          <a:xfrm>
-            <a:off x="685800" y="4343400"/>
-            <a:ext cx="5486400" cy="4114800"/>
-          </a:xfrm>
-          <a:prstGeom prst="rect">
-            <a:avLst/>
-          </a:prstGeom>
-          <a:noFill/>
-          <a:ln>
-            <a:noFill/>
-          </a:ln>
-        </p:spPr>
-        <p:txBody>
-          <a:bodyPr spcFirstLastPara="1" wrap="square" lIns="91425" tIns="91425" rIns="91425" bIns="91425" anchor="t" anchorCtr="0">
-            <a:noAutofit/>
-          </a:bodyPr>
-          <a:lstStyle/>
-          <a:p>
-            <a:pPr marL="457200" lvl="0" indent="0" algn="l" rtl="0">
-              <a:lnSpc>
-                <a:spcPct val="115000"/>
-              </a:lnSpc>
-              <a:spcBef>
-                <a:spcPts val="1200"/>
-              </a:spcBef>
-              <a:spcAft>
-                <a:spcPts val="1200"/>
-              </a:spcAft>
-              <a:buClr>
-                <a:schemeClr val="dk1"/>
-              </a:buClr>
-              <a:buSzPts val="1100"/>
-              <a:buFont typeface="Calibri" panose="020F0502020204030204"/>
-              <a:buNone/>
-            </a:pPr>
-            <a:endParaRPr sz="1200"/>
-          </a:p>
-        </p:txBody>
       </p:sp>
     </p:spTree>
   </p:cSld>
@@ -2660,6 +2661,128 @@
   <p:cSld>
     <p:spTree>
       <p:nvGrpSpPr>
+        <p:cNvPr id="176" name="Shape 176"/>
+        <p:cNvGrpSpPr/>
+        <p:nvPr/>
+      </p:nvGrpSpPr>
+      <p:grpSpPr>
+        <a:xfrm>
+          <a:off x="0" y="0"/>
+          <a:ext cx="0" cy="0"/>
+          <a:chOff x="0" y="0"/>
+          <a:chExt cx="0" cy="0"/>
+        </a:xfrm>
+      </p:grpSpPr>
+      <p:sp>
+        <p:nvSpPr>
+          <p:cNvPr id="177" name="Google Shape;177;p11:notes"/>
+          <p:cNvSpPr/>
+          <p:nvPr>
+            <p:ph type="sldImg" idx="2"/>
+          </p:nvPr>
+        </p:nvSpPr>
+        <p:spPr>
+          <a:xfrm>
+            <a:off x="381000" y="685800"/>
+            <a:ext cx="6096000" cy="3429000"/>
+          </a:xfrm>
+          <a:custGeom>
+            <a:avLst/>
+            <a:gdLst/>
+            <a:ahLst/>
+            <a:cxnLst/>
+            <a:rect l="l" t="t" r="r" b="b"/>
+            <a:pathLst>
+              <a:path w="120000" h="120000" extrusionOk="0">
+                <a:moveTo>
+                  <a:pt x="0" y="0"/>
+                </a:moveTo>
+                <a:lnTo>
+                  <a:pt x="120000" y="0"/>
+                </a:lnTo>
+                <a:lnTo>
+                  <a:pt x="120000" y="120000"/>
+                </a:lnTo>
+                <a:lnTo>
+                  <a:pt x="0" y="120000"/>
+                </a:lnTo>
+                <a:close/>
+              </a:path>
+            </a:pathLst>
+          </a:custGeom>
+          <a:noFill/>
+          <a:ln w="9525" cap="flat" cmpd="sng">
+            <a:solidFill>
+              <a:srgbClr val="000000"/>
+            </a:solidFill>
+            <a:prstDash val="solid"/>
+            <a:round/>
+            <a:headEnd type="none" w="sm" len="sm"/>
+            <a:tailEnd type="none" w="sm" len="sm"/>
+          </a:ln>
+        </p:spPr>
+      </p:sp>
+      <p:sp>
+        <p:nvSpPr>
+          <p:cNvPr id="178" name="Google Shape;178;p11:notes"/>
+          <p:cNvSpPr txBox="1"/>
+          <p:nvPr>
+            <p:ph type="body" idx="1"/>
+          </p:nvPr>
+        </p:nvSpPr>
+        <p:spPr>
+          <a:xfrm>
+            <a:off x="685800" y="4343400"/>
+            <a:ext cx="5486400" cy="4114800"/>
+          </a:xfrm>
+          <a:prstGeom prst="rect">
+            <a:avLst/>
+          </a:prstGeom>
+          <a:noFill/>
+          <a:ln>
+            <a:noFill/>
+          </a:ln>
+        </p:spPr>
+        <p:txBody>
+          <a:bodyPr spcFirstLastPara="1" wrap="square" lIns="91425" tIns="91425" rIns="91425" bIns="91425" anchor="t" anchorCtr="0">
+            <a:noAutofit/>
+          </a:bodyPr>
+          <a:lstStyle/>
+          <a:p>
+            <a:pPr marL="457200" lvl="0" indent="0" algn="l" rtl="0">
+              <a:lnSpc>
+                <a:spcPct val="115000"/>
+              </a:lnSpc>
+              <a:spcBef>
+                <a:spcPts val="1200"/>
+              </a:spcBef>
+              <a:spcAft>
+                <a:spcPts val="1200"/>
+              </a:spcAft>
+              <a:buClr>
+                <a:schemeClr val="dk1"/>
+              </a:buClr>
+              <a:buSzPts val="1100"/>
+              <a:buFont typeface="Calibri" panose="020F0502020204030204"/>
+              <a:buNone/>
+            </a:pPr>
+            <a:endParaRPr sz="1200"/>
+          </a:p>
+        </p:txBody>
+      </p:sp>
+    </p:spTree>
+  </p:cSld>
+  <p:clrMapOvr>
+    <a:masterClrMapping/>
+  </p:clrMapOvr>
+</p:notes>
+</file>
+
+<file path=ppt/notesSlides/notesSlide17.xml><?xml version="1.0" encoding="utf-8"?>
+<p:notes xmlns:a="http://schemas.openxmlformats.org/drawingml/2006/main" xmlns:r="http://schemas.openxmlformats.org/officeDocument/2006/relationships" xmlns:p="http://schemas.openxmlformats.org/presentationml/2006/main" showMasterPhAnim="0" showMasterSp="0">
+  <p:cSld>
+    <p:spTree>
+      <p:nvGrpSpPr>
         <p:cNvPr id="201" name="Shape 201"/>
         <p:cNvGrpSpPr/>
         <p:nvPr/>
@@ -2772,7 +2895,7 @@
 </p:notes>
 </file>
 
-<file path=ppt/notesSlides/notesSlide17.xml><?xml version="1.0" encoding="utf-8"?>
+<file path=ppt/notesSlides/notesSlide18.xml><?xml version="1.0" encoding="utf-8"?>
 <p:notes xmlns:a="http://schemas.openxmlformats.org/drawingml/2006/main" xmlns:r="http://schemas.openxmlformats.org/officeDocument/2006/relationships" xmlns:p="http://schemas.openxmlformats.org/presentationml/2006/main" showMasterPhAnim="0" showMasterSp="0">
   <p:cSld>
     <p:spTree>
@@ -2835,123 +2958,6 @@
       <p:sp>
         <p:nvSpPr>
           <p:cNvPr id="212" name="Google Shape;212;g30f48fe88b2_0_3:notes"/>
-          <p:cNvSpPr/>
-          <p:nvPr>
-            <p:ph type="sldImg" idx="2"/>
-          </p:nvPr>
-        </p:nvSpPr>
-        <p:spPr>
-          <a:xfrm>
-            <a:off x="685800" y="1143000"/>
-            <a:ext cx="5486400" cy="3086100"/>
-          </a:xfrm>
-          <a:custGeom>
-            <a:avLst/>
-            <a:gdLst/>
-            <a:ahLst/>
-            <a:cxnLst/>
-            <a:rect l="l" t="t" r="r" b="b"/>
-            <a:pathLst>
-              <a:path w="120000" h="120000" extrusionOk="0">
-                <a:moveTo>
-                  <a:pt x="0" y="0"/>
-                </a:moveTo>
-                <a:lnTo>
-                  <a:pt x="120000" y="0"/>
-                </a:lnTo>
-                <a:lnTo>
-                  <a:pt x="120000" y="120000"/>
-                </a:lnTo>
-                <a:lnTo>
-                  <a:pt x="0" y="120000"/>
-                </a:lnTo>
-                <a:close/>
-              </a:path>
-            </a:pathLst>
-          </a:custGeom>
-          <a:noFill/>
-          <a:ln w="12700" cap="flat" cmpd="sng">
-            <a:solidFill>
-              <a:srgbClr val="000000"/>
-            </a:solidFill>
-            <a:prstDash val="solid"/>
-            <a:round/>
-            <a:headEnd type="none" w="sm" len="sm"/>
-            <a:tailEnd type="none" w="sm" len="sm"/>
-          </a:ln>
-        </p:spPr>
-      </p:sp>
-    </p:spTree>
-  </p:cSld>
-  <p:clrMapOvr>
-    <a:masterClrMapping/>
-  </p:clrMapOvr>
-</p:notes>
-</file>
-
-<file path=ppt/notesSlides/notesSlide18.xml><?xml version="1.0" encoding="utf-8"?>
-<p:notes xmlns:a="http://schemas.openxmlformats.org/drawingml/2006/main" xmlns:r="http://schemas.openxmlformats.org/officeDocument/2006/relationships" xmlns:p="http://schemas.openxmlformats.org/presentationml/2006/main" showMasterPhAnim="0" showMasterSp="0">
-  <p:cSld>
-    <p:spTree>
-      <p:nvGrpSpPr>
-        <p:cNvPr id="219" name="Shape 219"/>
-        <p:cNvGrpSpPr/>
-        <p:nvPr/>
-      </p:nvGrpSpPr>
-      <p:grpSpPr>
-        <a:xfrm>
-          <a:off x="0" y="0"/>
-          <a:ext cx="0" cy="0"/>
-          <a:chOff x="0" y="0"/>
-          <a:chExt cx="0" cy="0"/>
-        </a:xfrm>
-      </p:grpSpPr>
-      <p:sp>
-        <p:nvSpPr>
-          <p:cNvPr id="220" name="Google Shape;220;p16:notes"/>
-          <p:cNvSpPr txBox="1"/>
-          <p:nvPr>
-            <p:ph type="body" idx="1"/>
-          </p:nvPr>
-        </p:nvSpPr>
-        <p:spPr>
-          <a:xfrm>
-            <a:off x="685800" y="4400550"/>
-            <a:ext cx="5486400" cy="3600450"/>
-          </a:xfrm>
-          <a:prstGeom prst="rect">
-            <a:avLst/>
-          </a:prstGeom>
-          <a:noFill/>
-          <a:ln>
-            <a:noFill/>
-          </a:ln>
-        </p:spPr>
-        <p:txBody>
-          <a:bodyPr spcFirstLastPara="1" wrap="square" lIns="91425" tIns="45700" rIns="91425" bIns="45700" anchor="t" anchorCtr="0">
-            <a:noAutofit/>
-          </a:bodyPr>
-          <a:lstStyle/>
-          <a:p>
-            <a:pPr marL="0" lvl="0" indent="0" algn="l" rtl="0">
-              <a:lnSpc>
-                <a:spcPct val="100000"/>
-              </a:lnSpc>
-              <a:spcBef>
-                <a:spcPts val="0"/>
-              </a:spcBef>
-              <a:spcAft>
-                <a:spcPts val="0"/>
-              </a:spcAft>
-              <a:buSzPts val="1400"/>
-              <a:buNone/>
-            </a:pPr>
-          </a:p>
-        </p:txBody>
-      </p:sp>
-      <p:sp>
-        <p:nvSpPr>
-          <p:cNvPr id="221" name="Google Shape;221;p16:notes"/>
           <p:cNvSpPr/>
           <p:nvPr>
             <p:ph type="sldImg" idx="2"/>
@@ -3804,6 +3810,123 @@
 </file>
 
 <file path=ppt/notesSlides/notesSlide24.xml><?xml version="1.0" encoding="utf-8"?>
+<p:notes xmlns:a="http://schemas.openxmlformats.org/drawingml/2006/main" xmlns:r="http://schemas.openxmlformats.org/officeDocument/2006/relationships" xmlns:p="http://schemas.openxmlformats.org/presentationml/2006/main" showMasterPhAnim="0" showMasterSp="0">
+  <p:cSld>
+    <p:spTree>
+      <p:nvGrpSpPr>
+        <p:cNvPr id="219" name="Shape 219"/>
+        <p:cNvGrpSpPr/>
+        <p:nvPr/>
+      </p:nvGrpSpPr>
+      <p:grpSpPr>
+        <a:xfrm>
+          <a:off x="0" y="0"/>
+          <a:ext cx="0" cy="0"/>
+          <a:chOff x="0" y="0"/>
+          <a:chExt cx="0" cy="0"/>
+        </a:xfrm>
+      </p:grpSpPr>
+      <p:sp>
+        <p:nvSpPr>
+          <p:cNvPr id="220" name="Google Shape;220;p16:notes"/>
+          <p:cNvSpPr txBox="1"/>
+          <p:nvPr>
+            <p:ph type="body" idx="1"/>
+          </p:nvPr>
+        </p:nvSpPr>
+        <p:spPr>
+          <a:xfrm>
+            <a:off x="685800" y="4400550"/>
+            <a:ext cx="5486400" cy="3600450"/>
+          </a:xfrm>
+          <a:prstGeom prst="rect">
+            <a:avLst/>
+          </a:prstGeom>
+          <a:noFill/>
+          <a:ln>
+            <a:noFill/>
+          </a:ln>
+        </p:spPr>
+        <p:txBody>
+          <a:bodyPr spcFirstLastPara="1" wrap="square" lIns="91425" tIns="45700" rIns="91425" bIns="45700" anchor="t" anchorCtr="0">
+            <a:noAutofit/>
+          </a:bodyPr>
+          <a:lstStyle/>
+          <a:p>
+            <a:pPr marL="0" lvl="0" indent="0" algn="l" rtl="0">
+              <a:lnSpc>
+                <a:spcPct val="100000"/>
+              </a:lnSpc>
+              <a:spcBef>
+                <a:spcPts val="0"/>
+              </a:spcBef>
+              <a:spcAft>
+                <a:spcPts val="0"/>
+              </a:spcAft>
+              <a:buSzPts val="1400"/>
+              <a:buNone/>
+            </a:pPr>
+          </a:p>
+        </p:txBody>
+      </p:sp>
+      <p:sp>
+        <p:nvSpPr>
+          <p:cNvPr id="221" name="Google Shape;221;p16:notes"/>
+          <p:cNvSpPr/>
+          <p:nvPr>
+            <p:ph type="sldImg" idx="2"/>
+          </p:nvPr>
+        </p:nvSpPr>
+        <p:spPr>
+          <a:xfrm>
+            <a:off x="685800" y="1143000"/>
+            <a:ext cx="5486400" cy="3086100"/>
+          </a:xfrm>
+          <a:custGeom>
+            <a:avLst/>
+            <a:gdLst/>
+            <a:ahLst/>
+            <a:cxnLst/>
+            <a:rect l="l" t="t" r="r" b="b"/>
+            <a:pathLst>
+              <a:path w="120000" h="120000" extrusionOk="0">
+                <a:moveTo>
+                  <a:pt x="0" y="0"/>
+                </a:moveTo>
+                <a:lnTo>
+                  <a:pt x="120000" y="0"/>
+                </a:lnTo>
+                <a:lnTo>
+                  <a:pt x="120000" y="120000"/>
+                </a:lnTo>
+                <a:lnTo>
+                  <a:pt x="0" y="120000"/>
+                </a:lnTo>
+                <a:close/>
+              </a:path>
+            </a:pathLst>
+          </a:custGeom>
+          <a:noFill/>
+          <a:ln w="12700" cap="flat" cmpd="sng">
+            <a:solidFill>
+              <a:srgbClr val="000000"/>
+            </a:solidFill>
+            <a:prstDash val="solid"/>
+            <a:round/>
+            <a:headEnd type="none" w="sm" len="sm"/>
+            <a:tailEnd type="none" w="sm" len="sm"/>
+          </a:ln>
+        </p:spPr>
+      </p:sp>
+    </p:spTree>
+  </p:cSld>
+  <p:clrMapOvr>
+    <a:masterClrMapping/>
+  </p:clrMapOvr>
+</p:notes>
+</file>
+
+<file path=ppt/notesSlides/notesSlide25.xml><?xml version="1.0" encoding="utf-8"?>
 <p:notes xmlns:a="http://schemas.openxmlformats.org/drawingml/2006/main" xmlns:r="http://schemas.openxmlformats.org/officeDocument/2006/relationships" xmlns:p="http://schemas.openxmlformats.org/presentationml/2006/main" showMasterPhAnim="0" showMasterSp="0">
   <p:cSld>
     <p:spTree>
@@ -19512,8 +19635,8 @@
         </p:nvSpPr>
         <p:spPr>
           <a:xfrm>
-            <a:off x="354623" y="663079"/>
-            <a:ext cx="9247200" cy="781050"/>
+            <a:off x="354330" y="662940"/>
+            <a:ext cx="11132820" cy="781050"/>
           </a:xfrm>
           <a:prstGeom prst="rect">
             <a:avLst/>
@@ -19556,7 +19679,31 @@
                 <a:cs typeface="Montserrat" panose="00000500000000000000" charset="0"/>
                 <a:sym typeface="Arial" panose="020B0604020202020204"/>
               </a:rPr>
-              <a:t>Training and Testing the Models</a:t>
+              <a:t>Test For </a:t>
+            </a:r>
+            <a:r>
+              <a:rPr lang="en-US" altLang="en-US" sz="3500" b="1" i="0" u="none" strike="noStrike" cap="none">
+                <a:solidFill>
+                  <a:schemeClr val="dk1"/>
+                </a:solidFill>
+                <a:latin typeface="Montserrat" panose="00000500000000000000" charset="0"/>
+                <a:ea typeface="Arial" panose="020B0604020202020204"/>
+                <a:cs typeface="Montserrat" panose="00000500000000000000" charset="0"/>
+                <a:sym typeface="Arial" panose="020B0604020202020204"/>
+              </a:rPr>
+              <a:t>Oversampling &amp; Undersampling</a:t>
+            </a:r>
+            <a:r>
+              <a:rPr lang="en-US" sz="3500" b="1" i="0" u="none" strike="noStrike" cap="none">
+                <a:solidFill>
+                  <a:schemeClr val="dk1"/>
+                </a:solidFill>
+                <a:latin typeface="Montserrat" panose="00000500000000000000" charset="0"/>
+                <a:ea typeface="Arial" panose="020B0604020202020204"/>
+                <a:cs typeface="Montserrat" panose="00000500000000000000" charset="0"/>
+                <a:sym typeface="Arial" panose="020B0604020202020204"/>
+              </a:rPr>
+              <a:t> </a:t>
             </a:r>
             <a:endParaRPr sz="3500" b="1" i="0" u="none" strike="noStrike" cap="none">
               <a:solidFill>
@@ -19579,7 +19726,7 @@
         <p:spPr>
           <a:xfrm>
             <a:off x="263525" y="1341120"/>
-            <a:ext cx="11222990" cy="962660"/>
+            <a:ext cx="11478260" cy="962660"/>
           </a:xfrm>
           <a:prstGeom prst="rect">
             <a:avLst/>
@@ -19613,52 +19760,25 @@
               <a:buNone/>
             </a:pPr>
             <a:r>
-              <a:rPr lang="en-US" sz="1800" dirty="0">
-                <a:solidFill>
-                  <a:srgbClr val="4A6080"/>
+              <a:rPr lang="en-US" altLang="en-US" sz="1900" b="0" i="0" u="none" strike="noStrike" cap="none">
+                <a:solidFill>
+                  <a:schemeClr val="dk1"/>
                 </a:solidFill>
                 <a:latin typeface="Montserrat" panose="00000500000000000000" charset="0"/>
-                <a:ea typeface="Calibri" panose="020F0502020204030204" pitchFamily="34" charset="-122"/>
+                <a:ea typeface="Arial" panose="020B0604020202020204"/>
                 <a:cs typeface="Montserrat" panose="00000500000000000000" charset="0"/>
-                <a:sym typeface="+mn-ea"/>
+                <a:sym typeface="Arial" panose="020B0604020202020204"/>
               </a:rPr>
-              <a:t>All models trained on SMOTE-balanced data. Evaluation performed on the original imbalanced test set (10,303 samples: 10,223 legit + 80 fraud... 20% hold-out stratified split).</a:t>
+              <a:t>Oversampling increases minority class, undersampling reduces majority class; both improve imbalance handling before applying SMOTE for better fraud detection performance.</a:t>
             </a:r>
-            <a:endParaRPr lang="en-US" sz="1800" dirty="0">
-              <a:solidFill>
-                <a:srgbClr val="4A6080"/>
-              </a:solidFill>
-              <a:latin typeface="Montserrat" panose="00000500000000000000" charset="0"/>
-              <a:ea typeface="Calibri" panose="020F0502020204030204" pitchFamily="34" charset="-122"/>
-              <a:cs typeface="Montserrat" panose="00000500000000000000" charset="0"/>
-            </a:endParaRPr>
-          </a:p>
-          <a:p>
-            <a:pPr marL="107950" marR="0" lvl="0" indent="0" algn="l" rtl="0">
-              <a:lnSpc>
-                <a:spcPct val="150000"/>
-              </a:lnSpc>
-              <a:spcBef>
-                <a:spcPts val="0"/>
-              </a:spcBef>
-              <a:spcAft>
-                <a:spcPts val="0"/>
-              </a:spcAft>
-              <a:buClr>
-                <a:schemeClr val="dk1"/>
-              </a:buClr>
-              <a:buSzPts val="1900"/>
-              <a:buFont typeface="Arial" panose="020B0604020202020204"/>
-              <a:buNone/>
-            </a:pPr>
             <a:r>
               <a:rPr lang="en-US" sz="1900" b="0" i="0" u="none" strike="noStrike" cap="none">
                 <a:solidFill>
                   <a:schemeClr val="dk1"/>
                 </a:solidFill>
-                <a:latin typeface="Arial" panose="020B0604020202020204"/>
+                <a:latin typeface="Montserrat" panose="00000500000000000000" charset="0"/>
                 <a:ea typeface="Arial" panose="020B0604020202020204"/>
-                <a:cs typeface="Arial" panose="020B0604020202020204"/>
+                <a:cs typeface="Montserrat" panose="00000500000000000000" charset="0"/>
                 <a:sym typeface="Arial" panose="020B0604020202020204"/>
               </a:rPr>
               <a:t> </a:t>
@@ -19667,9 +19787,9 @@
               <a:solidFill>
                 <a:schemeClr val="dk1"/>
               </a:solidFill>
-              <a:latin typeface="Arial" panose="020B0604020202020204"/>
+              <a:latin typeface="Montserrat" panose="00000500000000000000" charset="0"/>
               <a:ea typeface="Arial" panose="020B0604020202020204"/>
-              <a:cs typeface="Arial" panose="020B0604020202020204"/>
+              <a:cs typeface="Montserrat" panose="00000500000000000000" charset="0"/>
               <a:sym typeface="Arial" panose="020B0604020202020204"/>
             </a:endParaRPr>
           </a:p>
@@ -19734,7 +19854,759 @@
         </p:nvSpPr>
         <p:spPr>
           <a:xfrm>
-            <a:off x="46990" y="3093085"/>
+            <a:off x="335280" y="2924810"/>
+            <a:ext cx="5583555" cy="3642360"/>
+          </a:xfrm>
+          <a:prstGeom prst="rect">
+            <a:avLst/>
+          </a:prstGeom>
+          <a:noFill/>
+        </p:spPr>
+        <p:txBody>
+          <a:bodyPr wrap="square" lIns="0" tIns="0" rIns="0" bIns="0" rtlCol="0" anchor="t"/>
+          <a:lstStyle/>
+          <a:p>
+            <a:pPr marL="0" algn="l">
+              <a:buClrTx/>
+              <a:buSzTx/>
+              <a:buNone/>
+            </a:pPr>
+            <a:r>
+              <a:rPr lang="en-US" altLang="en-US" dirty="0">
+                <a:solidFill>
+                  <a:srgbClr val="1A3A5C"/>
+                </a:solidFill>
+                <a:latin typeface="Montserrat" panose="00000500000000000000" charset="0"/>
+                <a:ea typeface="Courier New" panose="02070309020205020404" pitchFamily="34" charset="-122"/>
+                <a:cs typeface="Montserrat" panose="00000500000000000000" charset="0"/>
+              </a:rPr>
+              <a:t>datasets = {</a:t>
+            </a:r>
+            <a:endParaRPr lang="en-US" altLang="en-US" dirty="0">
+              <a:solidFill>
+                <a:srgbClr val="1A3A5C"/>
+              </a:solidFill>
+              <a:latin typeface="Montserrat" panose="00000500000000000000" charset="0"/>
+              <a:ea typeface="Courier New" panose="02070309020205020404" pitchFamily="34" charset="-122"/>
+              <a:cs typeface="Montserrat" panose="00000500000000000000" charset="0"/>
+            </a:endParaRPr>
+          </a:p>
+          <a:p>
+            <a:pPr marL="0" algn="l">
+              <a:buClrTx/>
+              <a:buSzTx/>
+              <a:buNone/>
+            </a:pPr>
+            <a:r>
+              <a:rPr lang="en-US" altLang="en-US" dirty="0">
+                <a:solidFill>
+                  <a:srgbClr val="1A3A5C"/>
+                </a:solidFill>
+                <a:latin typeface="Montserrat" panose="00000500000000000000" charset="0"/>
+                <a:ea typeface="Courier New" panose="02070309020205020404" pitchFamily="34" charset="-122"/>
+                <a:cs typeface="Montserrat" panose="00000500000000000000" charset="0"/>
+              </a:rPr>
+              <a:t>    "Original": (X_train, y_train),</a:t>
+            </a:r>
+            <a:endParaRPr lang="en-US" altLang="en-US" dirty="0">
+              <a:solidFill>
+                <a:srgbClr val="1A3A5C"/>
+              </a:solidFill>
+              <a:latin typeface="Montserrat" panose="00000500000000000000" charset="0"/>
+              <a:ea typeface="Courier New" panose="02070309020205020404" pitchFamily="34" charset="-122"/>
+              <a:cs typeface="Montserrat" panose="00000500000000000000" charset="0"/>
+            </a:endParaRPr>
+          </a:p>
+          <a:p>
+            <a:pPr marL="0" algn="l">
+              <a:buClrTx/>
+              <a:buSzTx/>
+              <a:buNone/>
+            </a:pPr>
+            <a:r>
+              <a:rPr lang="en-US" altLang="en-US" dirty="0">
+                <a:solidFill>
+                  <a:srgbClr val="1A3A5C"/>
+                </a:solidFill>
+                <a:latin typeface="Montserrat" panose="00000500000000000000" charset="0"/>
+                <a:ea typeface="Courier New" panose="02070309020205020404" pitchFamily="34" charset="-122"/>
+                <a:cs typeface="Montserrat" panose="00000500000000000000" charset="0"/>
+              </a:rPr>
+              <a:t>    "Oversampled": (X_over, y_over),</a:t>
+            </a:r>
+            <a:endParaRPr lang="en-US" altLang="en-US" dirty="0">
+              <a:solidFill>
+                <a:srgbClr val="1A3A5C"/>
+              </a:solidFill>
+              <a:latin typeface="Montserrat" panose="00000500000000000000" charset="0"/>
+              <a:ea typeface="Courier New" panose="02070309020205020404" pitchFamily="34" charset="-122"/>
+              <a:cs typeface="Montserrat" panose="00000500000000000000" charset="0"/>
+            </a:endParaRPr>
+          </a:p>
+          <a:p>
+            <a:pPr marL="0" algn="l">
+              <a:buClrTx/>
+              <a:buSzTx/>
+              <a:buNone/>
+            </a:pPr>
+            <a:r>
+              <a:rPr lang="en-US" altLang="en-US" dirty="0">
+                <a:solidFill>
+                  <a:srgbClr val="1A3A5C"/>
+                </a:solidFill>
+                <a:latin typeface="Montserrat" panose="00000500000000000000" charset="0"/>
+                <a:ea typeface="Courier New" panose="02070309020205020404" pitchFamily="34" charset="-122"/>
+                <a:cs typeface="Montserrat" panose="00000500000000000000" charset="0"/>
+              </a:rPr>
+              <a:t>    "Undersampled": (X_under, y_under),</a:t>
+            </a:r>
+            <a:endParaRPr lang="en-US" altLang="en-US" dirty="0">
+              <a:solidFill>
+                <a:srgbClr val="1A3A5C"/>
+              </a:solidFill>
+              <a:latin typeface="Montserrat" panose="00000500000000000000" charset="0"/>
+              <a:ea typeface="Courier New" panose="02070309020205020404" pitchFamily="34" charset="-122"/>
+              <a:cs typeface="Montserrat" panose="00000500000000000000" charset="0"/>
+            </a:endParaRPr>
+          </a:p>
+          <a:p>
+            <a:pPr marL="0" algn="l">
+              <a:buClrTx/>
+              <a:buSzTx/>
+              <a:buNone/>
+            </a:pPr>
+            <a:r>
+              <a:rPr lang="en-US" altLang="en-US" dirty="0">
+                <a:solidFill>
+                  <a:srgbClr val="1A3A5C"/>
+                </a:solidFill>
+                <a:latin typeface="Montserrat" panose="00000500000000000000" charset="0"/>
+                <a:ea typeface="Courier New" panose="02070309020205020404" pitchFamily="34" charset="-122"/>
+                <a:cs typeface="Montserrat" panose="00000500000000000000" charset="0"/>
+              </a:rPr>
+              <a:t>   }</a:t>
+            </a:r>
+            <a:endParaRPr lang="en-US" altLang="en-US" dirty="0">
+              <a:solidFill>
+                <a:srgbClr val="1A3A5C"/>
+              </a:solidFill>
+              <a:latin typeface="Montserrat" panose="00000500000000000000" charset="0"/>
+              <a:ea typeface="Courier New" panose="02070309020205020404" pitchFamily="34" charset="-122"/>
+              <a:cs typeface="Montserrat" panose="00000500000000000000" charset="0"/>
+            </a:endParaRPr>
+          </a:p>
+          <a:p>
+            <a:pPr marL="0" algn="l">
+              <a:buClrTx/>
+              <a:buSzTx/>
+              <a:buNone/>
+            </a:pPr>
+            <a:endParaRPr lang="en-US" altLang="en-US" dirty="0">
+              <a:solidFill>
+                <a:srgbClr val="1A3A5C"/>
+              </a:solidFill>
+              <a:latin typeface="Montserrat" panose="00000500000000000000" charset="0"/>
+              <a:ea typeface="Courier New" panose="02070309020205020404" pitchFamily="34" charset="-122"/>
+              <a:cs typeface="Montserrat" panose="00000500000000000000" charset="0"/>
+            </a:endParaRPr>
+          </a:p>
+          <a:p>
+            <a:pPr marL="0" algn="l">
+              <a:buClrTx/>
+              <a:buSzTx/>
+              <a:buNone/>
+            </a:pPr>
+            <a:r>
+              <a:rPr lang="en-US" altLang="en-US" dirty="0">
+                <a:solidFill>
+                  <a:srgbClr val="1A3A5C"/>
+                </a:solidFill>
+                <a:latin typeface="Montserrat" panose="00000500000000000000" charset="0"/>
+                <a:ea typeface="Courier New" panose="02070309020205020404" pitchFamily="34" charset="-122"/>
+                <a:cs typeface="Montserrat" panose="00000500000000000000" charset="0"/>
+              </a:rPr>
+              <a:t>for name, (X_tr, y_tr) in datasets.items():</a:t>
+            </a:r>
+            <a:endParaRPr lang="en-US" altLang="en-US" dirty="0">
+              <a:solidFill>
+                <a:srgbClr val="1A3A5C"/>
+              </a:solidFill>
+              <a:latin typeface="Montserrat" panose="00000500000000000000" charset="0"/>
+              <a:ea typeface="Courier New" panose="02070309020205020404" pitchFamily="34" charset="-122"/>
+              <a:cs typeface="Montserrat" panose="00000500000000000000" charset="0"/>
+            </a:endParaRPr>
+          </a:p>
+          <a:p>
+            <a:pPr marL="0" algn="l">
+              <a:buClrTx/>
+              <a:buSzTx/>
+              <a:buNone/>
+            </a:pPr>
+            <a:r>
+              <a:rPr lang="en-US" altLang="en-US" dirty="0">
+                <a:solidFill>
+                  <a:srgbClr val="1A3A5C"/>
+                </a:solidFill>
+                <a:latin typeface="Montserrat" panose="00000500000000000000" charset="0"/>
+                <a:ea typeface="Courier New" panose="02070309020205020404" pitchFamily="34" charset="-122"/>
+                <a:cs typeface="Montserrat" panose="00000500000000000000" charset="0"/>
+              </a:rPr>
+              <a:t>    print(f"\n===== {name} Dataset =====")</a:t>
+            </a:r>
+            <a:endParaRPr lang="en-US" altLang="en-US" dirty="0">
+              <a:solidFill>
+                <a:srgbClr val="1A3A5C"/>
+              </a:solidFill>
+              <a:latin typeface="Montserrat" panose="00000500000000000000" charset="0"/>
+              <a:ea typeface="Courier New" panose="02070309020205020404" pitchFamily="34" charset="-122"/>
+              <a:cs typeface="Montserrat" panose="00000500000000000000" charset="0"/>
+            </a:endParaRPr>
+          </a:p>
+          <a:p>
+            <a:pPr marL="0" algn="l">
+              <a:buClrTx/>
+              <a:buSzTx/>
+              <a:buNone/>
+            </a:pPr>
+            <a:endParaRPr lang="en-US" altLang="en-US" dirty="0">
+              <a:solidFill>
+                <a:srgbClr val="1A3A5C"/>
+              </a:solidFill>
+              <a:latin typeface="Montserrat" panose="00000500000000000000" charset="0"/>
+              <a:ea typeface="Courier New" panose="02070309020205020404" pitchFamily="34" charset="-122"/>
+              <a:cs typeface="Montserrat" panose="00000500000000000000" charset="0"/>
+            </a:endParaRPr>
+          </a:p>
+          <a:p>
+            <a:pPr marL="0" algn="l">
+              <a:buClrTx/>
+              <a:buSzTx/>
+              <a:buNone/>
+            </a:pPr>
+            <a:r>
+              <a:rPr lang="en-US" altLang="en-US" dirty="0">
+                <a:solidFill>
+                  <a:srgbClr val="1A3A5C"/>
+                </a:solidFill>
+                <a:latin typeface="Montserrat" panose="00000500000000000000" charset="0"/>
+                <a:ea typeface="Courier New" panose="02070309020205020404" pitchFamily="34" charset="-122"/>
+                <a:cs typeface="Montserrat" panose="00000500000000000000" charset="0"/>
+              </a:rPr>
+              <a:t>    for model in models:</a:t>
+            </a:r>
+            <a:endParaRPr lang="en-US" altLang="en-US" dirty="0">
+              <a:solidFill>
+                <a:srgbClr val="1A3A5C"/>
+              </a:solidFill>
+              <a:latin typeface="Montserrat" panose="00000500000000000000" charset="0"/>
+              <a:ea typeface="Courier New" panose="02070309020205020404" pitchFamily="34" charset="-122"/>
+              <a:cs typeface="Montserrat" panose="00000500000000000000" charset="0"/>
+            </a:endParaRPr>
+          </a:p>
+          <a:p>
+            <a:pPr marL="0" algn="l">
+              <a:buClrTx/>
+              <a:buSzTx/>
+              <a:buNone/>
+            </a:pPr>
+            <a:r>
+              <a:rPr lang="en-US" altLang="en-US" dirty="0">
+                <a:solidFill>
+                  <a:srgbClr val="1A3A5C"/>
+                </a:solidFill>
+                <a:latin typeface="Montserrat" panose="00000500000000000000" charset="0"/>
+                <a:ea typeface="Courier New" panose="02070309020205020404" pitchFamily="34" charset="-122"/>
+                <a:cs typeface="Montserrat" panose="00000500000000000000" charset="0"/>
+              </a:rPr>
+              <a:t>        model.fit(X_tr, y_tr)</a:t>
+            </a:r>
+            <a:endParaRPr lang="en-US" altLang="en-US" dirty="0">
+              <a:solidFill>
+                <a:srgbClr val="1A3A5C"/>
+              </a:solidFill>
+              <a:latin typeface="Montserrat" panose="00000500000000000000" charset="0"/>
+              <a:ea typeface="Courier New" panose="02070309020205020404" pitchFamily="34" charset="-122"/>
+              <a:cs typeface="Montserrat" panose="00000500000000000000" charset="0"/>
+            </a:endParaRPr>
+          </a:p>
+          <a:p>
+            <a:pPr marL="0" algn="l">
+              <a:buClrTx/>
+              <a:buSzTx/>
+              <a:buNone/>
+            </a:pPr>
+            <a:endParaRPr lang="en-US" altLang="en-US" dirty="0">
+              <a:solidFill>
+                <a:srgbClr val="1A3A5C"/>
+              </a:solidFill>
+              <a:latin typeface="Montserrat" panose="00000500000000000000" charset="0"/>
+              <a:ea typeface="Courier New" panose="02070309020205020404" pitchFamily="34" charset="-122"/>
+              <a:cs typeface="Montserrat" panose="00000500000000000000" charset="0"/>
+            </a:endParaRPr>
+          </a:p>
+          <a:p>
+            <a:pPr marL="0" algn="l">
+              <a:buClrTx/>
+              <a:buSzTx/>
+              <a:buNone/>
+            </a:pPr>
+            <a:r>
+              <a:rPr lang="en-US" altLang="en-US" dirty="0">
+                <a:solidFill>
+                  <a:srgbClr val="1A3A5C"/>
+                </a:solidFill>
+                <a:latin typeface="Montserrat" panose="00000500000000000000" charset="0"/>
+                <a:ea typeface="Courier New" panose="02070309020205020404" pitchFamily="34" charset="-122"/>
+                <a:cs typeface="Montserrat" panose="00000500000000000000" charset="0"/>
+              </a:rPr>
+              <a:t>        y_prob = model.predict_proba(X_test)[:, 1]</a:t>
+            </a:r>
+            <a:endParaRPr lang="en-US" altLang="en-US" dirty="0">
+              <a:solidFill>
+                <a:srgbClr val="1A3A5C"/>
+              </a:solidFill>
+              <a:latin typeface="Montserrat" panose="00000500000000000000" charset="0"/>
+              <a:ea typeface="Courier New" panose="02070309020205020404" pitchFamily="34" charset="-122"/>
+              <a:cs typeface="Montserrat" panose="00000500000000000000" charset="0"/>
+            </a:endParaRPr>
+          </a:p>
+          <a:p>
+            <a:pPr marL="0" algn="l">
+              <a:buClrTx/>
+              <a:buSzTx/>
+              <a:buNone/>
+            </a:pPr>
+            <a:r>
+              <a:rPr lang="en-US" altLang="en-US" dirty="0">
+                <a:solidFill>
+                  <a:srgbClr val="1A3A5C"/>
+                </a:solidFill>
+                <a:latin typeface="Montserrat" panose="00000500000000000000" charset="0"/>
+                <a:ea typeface="Courier New" panose="02070309020205020404" pitchFamily="34" charset="-122"/>
+                <a:cs typeface="Montserrat" panose="00000500000000000000" charset="0"/>
+              </a:rPr>
+              <a:t>        print(f"{model.__class__.__name__} ROC-AUC:", ras(y_test, y_prob))</a:t>
+            </a:r>
+            <a:endParaRPr lang="en-US" altLang="en-US" dirty="0">
+              <a:solidFill>
+                <a:srgbClr val="1A3A5C"/>
+              </a:solidFill>
+              <a:latin typeface="Montserrat" panose="00000500000000000000" charset="0"/>
+              <a:ea typeface="Courier New" panose="02070309020205020404" pitchFamily="34" charset="-122"/>
+              <a:cs typeface="Montserrat" panose="00000500000000000000" charset="0"/>
+            </a:endParaRPr>
+          </a:p>
+          <a:p>
+            <a:pPr marL="0" algn="l">
+              <a:buClrTx/>
+              <a:buSzTx/>
+              <a:buNone/>
+            </a:pPr>
+            <a:endParaRPr lang="en-US" altLang="en-US" dirty="0">
+              <a:solidFill>
+                <a:srgbClr val="1A3A5C"/>
+              </a:solidFill>
+              <a:latin typeface="Montserrat" panose="00000500000000000000" charset="0"/>
+              <a:ea typeface="Courier New" panose="02070309020205020404" pitchFamily="34" charset="-122"/>
+              <a:cs typeface="Montserrat" panose="00000500000000000000" charset="0"/>
+            </a:endParaRPr>
+          </a:p>
+        </p:txBody>
+      </p:sp>
+      <p:sp>
+        <p:nvSpPr>
+          <p:cNvPr id="2" name="Text 10"/>
+          <p:cNvSpPr/>
+          <p:nvPr/>
+        </p:nvSpPr>
+        <p:spPr>
+          <a:xfrm>
+            <a:off x="6383655" y="3140710"/>
+            <a:ext cx="5354320" cy="2472690"/>
+          </a:xfrm>
+          <a:prstGeom prst="rect">
+            <a:avLst/>
+          </a:prstGeom>
+          <a:noFill/>
+        </p:spPr>
+        <p:txBody>
+          <a:bodyPr wrap="square" lIns="0" tIns="0" rIns="0" bIns="0" rtlCol="0" anchor="t"/>
+          <a:lstStyle/>
+          <a:p>
+            <a:pPr marL="0" algn="l">
+              <a:buClrTx/>
+              <a:buSzTx/>
+              <a:buNone/>
+            </a:pPr>
+            <a:endParaRPr lang="en-US" altLang="en-US" dirty="0">
+              <a:solidFill>
+                <a:srgbClr val="1A3A5C"/>
+              </a:solidFill>
+              <a:latin typeface="Montserrat" panose="00000500000000000000" charset="0"/>
+              <a:ea typeface="Courier New" panose="02070309020205020404" pitchFamily="34" charset="-122"/>
+              <a:cs typeface="Montserrat" panose="00000500000000000000" charset="0"/>
+            </a:endParaRPr>
+          </a:p>
+        </p:txBody>
+      </p:sp>
+      <p:sp>
+        <p:nvSpPr>
+          <p:cNvPr id="6" name="Text Box 5"/>
+          <p:cNvSpPr txBox="1"/>
+          <p:nvPr>
+            <p:custDataLst>
+              <p:tags r:id="rId1"/>
+            </p:custDataLst>
+          </p:nvPr>
+        </p:nvSpPr>
+        <p:spPr>
+          <a:xfrm>
+            <a:off x="335280" y="2421255"/>
+            <a:ext cx="4064000" cy="368300"/>
+          </a:xfrm>
+          <a:prstGeom prst="rect">
+            <a:avLst/>
+          </a:prstGeom>
+          <a:noFill/>
+        </p:spPr>
+        <p:txBody>
+          <a:bodyPr wrap="square" rtlCol="0">
+            <a:spAutoFit/>
+          </a:bodyPr>
+          <a:p>
+            <a:r>
+              <a:rPr lang="en-US" altLang="en-US" sz="1800" b="1">
+                <a:latin typeface="Montserrat" panose="00000500000000000000" charset="0"/>
+                <a:cs typeface="Montserrat" panose="00000500000000000000" charset="0"/>
+              </a:rPr>
+              <a:t>Train Models on Each Technique</a:t>
+            </a:r>
+            <a:endParaRPr lang="en-US" altLang="en-US" sz="1800" b="1">
+              <a:latin typeface="Montserrat" panose="00000500000000000000" charset="0"/>
+              <a:cs typeface="Montserrat" panose="00000500000000000000" charset="0"/>
+            </a:endParaRPr>
+          </a:p>
+        </p:txBody>
+      </p:sp>
+      <p:sp>
+        <p:nvSpPr>
+          <p:cNvPr id="5" name="Text Box 4"/>
+          <p:cNvSpPr txBox="1"/>
+          <p:nvPr>
+            <p:custDataLst>
+              <p:tags r:id="rId2"/>
+            </p:custDataLst>
+          </p:nvPr>
+        </p:nvSpPr>
+        <p:spPr>
+          <a:xfrm>
+            <a:off x="6023610" y="2406015"/>
+            <a:ext cx="4064000" cy="368300"/>
+          </a:xfrm>
+          <a:prstGeom prst="rect">
+            <a:avLst/>
+          </a:prstGeom>
+          <a:noFill/>
+        </p:spPr>
+        <p:txBody>
+          <a:bodyPr wrap="square" rtlCol="0">
+            <a:spAutoFit/>
+          </a:bodyPr>
+          <a:p>
+            <a:r>
+              <a:rPr lang="en-US" sz="1800" b="1">
+                <a:latin typeface="Montserrat" panose="00000500000000000000" charset="0"/>
+                <a:cs typeface="Montserrat" panose="00000500000000000000" charset="0"/>
+              </a:rPr>
+              <a:t>Result</a:t>
+            </a:r>
+            <a:endParaRPr lang="en-US" sz="1800" b="1">
+              <a:latin typeface="Montserrat" panose="00000500000000000000" charset="0"/>
+              <a:cs typeface="Montserrat" panose="00000500000000000000" charset="0"/>
+            </a:endParaRPr>
+          </a:p>
+        </p:txBody>
+      </p:sp>
+      <p:pic>
+        <p:nvPicPr>
+          <p:cNvPr id="1" name="Picture 0"/>
+          <p:cNvPicPr>
+            <a:picLocks noChangeAspect="1"/>
+          </p:cNvPicPr>
+          <p:nvPr/>
+        </p:nvPicPr>
+        <p:blipFill>
+          <a:blip r:embed="rId3"/>
+          <a:stretch>
+            <a:fillRect/>
+          </a:stretch>
+        </p:blipFill>
+        <p:spPr>
+          <a:xfrm>
+            <a:off x="5704840" y="2780665"/>
+            <a:ext cx="6408420" cy="3338195"/>
+          </a:xfrm>
+          <a:prstGeom prst="rect">
+            <a:avLst/>
+          </a:prstGeom>
+        </p:spPr>
+      </p:pic>
+    </p:spTree>
+  </p:cSld>
+  <p:clrMapOvr>
+    <a:masterClrMapping/>
+  </p:clrMapOvr>
+</p:sld>
+</file>
+
+<file path=ppt/slides/slide12.xml><?xml version="1.0" encoding="utf-8"?>
+<p:sld xmlns:a="http://schemas.openxmlformats.org/drawingml/2006/main" xmlns:r="http://schemas.openxmlformats.org/officeDocument/2006/relationships" xmlns:p="http://schemas.openxmlformats.org/presentationml/2006/main">
+  <p:cSld>
+    <p:spTree>
+      <p:nvGrpSpPr>
+        <p:cNvPr id="169" name="Shape 169"/>
+        <p:cNvGrpSpPr/>
+        <p:nvPr/>
+      </p:nvGrpSpPr>
+      <p:grpSpPr>
+        <a:xfrm>
+          <a:off x="0" y="0"/>
+          <a:ext cx="0" cy="0"/>
+          <a:chOff x="0" y="0"/>
+          <a:chExt cx="0" cy="0"/>
+        </a:xfrm>
+      </p:grpSpPr>
+      <p:sp>
+        <p:nvSpPr>
+          <p:cNvPr id="170" name="Google Shape;170;p24"/>
+          <p:cNvSpPr txBox="1"/>
+          <p:nvPr/>
+        </p:nvSpPr>
+        <p:spPr>
+          <a:xfrm>
+            <a:off x="354623" y="663079"/>
+            <a:ext cx="9247200" cy="781050"/>
+          </a:xfrm>
+          <a:prstGeom prst="rect">
+            <a:avLst/>
+          </a:prstGeom>
+          <a:noFill/>
+          <a:ln>
+            <a:noFill/>
+          </a:ln>
+        </p:spPr>
+        <p:txBody>
+          <a:bodyPr spcFirstLastPara="1" wrap="square" lIns="121900" tIns="121900" rIns="121900" bIns="121900" anchor="t" anchorCtr="0">
+            <a:spAutoFit/>
+          </a:bodyPr>
+          <a:lstStyle/>
+          <a:p>
+            <a:pPr marL="0" marR="0" lvl="0" indent="0" algn="l" rtl="0">
+              <a:lnSpc>
+                <a:spcPct val="100000"/>
+              </a:lnSpc>
+              <a:spcBef>
+                <a:spcPts val="0"/>
+              </a:spcBef>
+              <a:spcAft>
+                <a:spcPts val="0"/>
+              </a:spcAft>
+              <a:buClr>
+                <a:srgbClr val="000000"/>
+              </a:buClr>
+              <a:buSzPts val="3500"/>
+              <a:buFont typeface="Arial" panose="020B0604020202020204"/>
+              <a:buNone/>
+            </a:pPr>
+            <a:r>
+              <a:rPr lang="en-US" sz="3500" b="1" i="0" u="none" strike="noStrike" cap="none">
+                <a:solidFill>
+                  <a:schemeClr val="dk1"/>
+                </a:solidFill>
+                <a:latin typeface="Montserrat" panose="00000500000000000000" charset="0"/>
+                <a:ea typeface="Arial" panose="020B0604020202020204"/>
+                <a:cs typeface="Montserrat" panose="00000500000000000000" charset="0"/>
+                <a:sym typeface="Arial" panose="020B0604020202020204"/>
+              </a:rPr>
+              <a:t>Training and Testing the Models</a:t>
+            </a:r>
+            <a:endParaRPr sz="3500" b="1" i="0" u="none" strike="noStrike" cap="none">
+              <a:solidFill>
+                <a:srgbClr val="000000"/>
+              </a:solidFill>
+              <a:latin typeface="Montserrat" panose="00000500000000000000" charset="0"/>
+              <a:ea typeface="Arial" panose="020B0604020202020204"/>
+              <a:cs typeface="Montserrat" panose="00000500000000000000" charset="0"/>
+              <a:sym typeface="Arial" panose="020B0604020202020204"/>
+            </a:endParaRPr>
+          </a:p>
+        </p:txBody>
+      </p:sp>
+      <p:sp>
+        <p:nvSpPr>
+          <p:cNvPr id="171" name="Google Shape;171;p24"/>
+          <p:cNvSpPr txBox="1"/>
+          <p:nvPr/>
+        </p:nvSpPr>
+        <p:spPr>
+          <a:xfrm>
+            <a:off x="263525" y="1341120"/>
+            <a:ext cx="11222990" cy="962660"/>
+          </a:xfrm>
+          <a:prstGeom prst="rect">
+            <a:avLst/>
+          </a:prstGeom>
+          <a:noFill/>
+          <a:ln>
+            <a:noFill/>
+          </a:ln>
+        </p:spPr>
+        <p:txBody>
+          <a:bodyPr spcFirstLastPara="1" wrap="square" lIns="91425" tIns="45700" rIns="91425" bIns="45700" anchor="t" anchorCtr="0">
+            <a:noAutofit/>
+          </a:bodyPr>
+          <a:lstStyle/>
+          <a:p>
+            <a:pPr marL="107950" marR="0" lvl="0" indent="0" algn="l" rtl="0">
+              <a:lnSpc>
+                <a:spcPct val="150000"/>
+              </a:lnSpc>
+              <a:spcBef>
+                <a:spcPts val="0"/>
+              </a:spcBef>
+              <a:spcAft>
+                <a:spcPts val="0"/>
+              </a:spcAft>
+              <a:buClr>
+                <a:schemeClr val="dk1"/>
+              </a:buClr>
+              <a:buSzPts val="1900"/>
+              <a:buFont typeface="Arial" panose="020B0604020202020204"/>
+              <a:buNone/>
+            </a:pPr>
+            <a:r>
+              <a:rPr lang="en-US" sz="1800" dirty="0">
+                <a:solidFill>
+                  <a:srgbClr val="4A6080"/>
+                </a:solidFill>
+                <a:latin typeface="Montserrat" panose="00000500000000000000" charset="0"/>
+                <a:ea typeface="Calibri" panose="020F0502020204030204" pitchFamily="34" charset="-122"/>
+                <a:cs typeface="Montserrat" panose="00000500000000000000" charset="0"/>
+                <a:sym typeface="+mn-ea"/>
+              </a:rPr>
+              <a:t>All models trained on SMOTE-balanced data. Evaluation performed on the original imbalanced test set (10,303 samples: 10,223 legit + 80 fraud... 20% hold-out stratified split).</a:t>
+            </a:r>
+            <a:endParaRPr lang="en-US" sz="1800" dirty="0">
+              <a:solidFill>
+                <a:srgbClr val="4A6080"/>
+              </a:solidFill>
+              <a:latin typeface="Montserrat" panose="00000500000000000000" charset="0"/>
+              <a:ea typeface="Calibri" panose="020F0502020204030204" pitchFamily="34" charset="-122"/>
+              <a:cs typeface="Montserrat" panose="00000500000000000000" charset="0"/>
+            </a:endParaRPr>
+          </a:p>
+          <a:p>
+            <a:pPr marL="107950" marR="0" lvl="0" indent="0" algn="l" rtl="0">
+              <a:lnSpc>
+                <a:spcPct val="150000"/>
+              </a:lnSpc>
+              <a:spcBef>
+                <a:spcPts val="0"/>
+              </a:spcBef>
+              <a:spcAft>
+                <a:spcPts val="0"/>
+              </a:spcAft>
+              <a:buClr>
+                <a:schemeClr val="dk1"/>
+              </a:buClr>
+              <a:buSzPts val="1900"/>
+              <a:buFont typeface="Arial" panose="020B0604020202020204"/>
+              <a:buNone/>
+            </a:pPr>
+            <a:r>
+              <a:rPr lang="en-US" sz="1900" b="0" i="0" u="none" strike="noStrike" cap="none">
+                <a:solidFill>
+                  <a:schemeClr val="dk1"/>
+                </a:solidFill>
+                <a:latin typeface="Arial" panose="020B0604020202020204"/>
+                <a:ea typeface="Arial" panose="020B0604020202020204"/>
+                <a:cs typeface="Arial" panose="020B0604020202020204"/>
+                <a:sym typeface="Arial" panose="020B0604020202020204"/>
+              </a:rPr>
+              <a:t> </a:t>
+            </a:r>
+            <a:endParaRPr sz="1900" b="0" i="0" u="none" strike="noStrike" cap="none">
+              <a:solidFill>
+                <a:schemeClr val="dk1"/>
+              </a:solidFill>
+              <a:latin typeface="Arial" panose="020B0604020202020204"/>
+              <a:ea typeface="Arial" panose="020B0604020202020204"/>
+              <a:cs typeface="Arial" panose="020B0604020202020204"/>
+              <a:sym typeface="Arial" panose="020B0604020202020204"/>
+            </a:endParaRPr>
+          </a:p>
+        </p:txBody>
+      </p:sp>
+      <p:sp>
+        <p:nvSpPr>
+          <p:cNvPr id="172" name="Google Shape;172;p24"/>
+          <p:cNvSpPr txBox="1"/>
+          <p:nvPr>
+            <p:ph type="sldNum" idx="12"/>
+          </p:nvPr>
+        </p:nvSpPr>
+        <p:spPr>
+          <a:xfrm>
+            <a:off x="11296611" y="6014423"/>
+            <a:ext cx="731600" cy="524800"/>
+          </a:xfrm>
+          <a:prstGeom prst="rect">
+            <a:avLst/>
+          </a:prstGeom>
+          <a:noFill/>
+          <a:ln>
+            <a:noFill/>
+          </a:ln>
+        </p:spPr>
+        <p:txBody>
+          <a:bodyPr spcFirstLastPara="1" wrap="square" lIns="91425" tIns="91425" rIns="91425" bIns="91425" anchor="ctr" anchorCtr="0">
+            <a:noAutofit/>
+          </a:bodyPr>
+          <a:lstStyle/>
+          <a:p>
+            <a:pPr marL="0" marR="0" lvl="0" indent="0" algn="l" rtl="0">
+              <a:lnSpc>
+                <a:spcPct val="100000"/>
+              </a:lnSpc>
+              <a:spcBef>
+                <a:spcPts val="0"/>
+              </a:spcBef>
+              <a:spcAft>
+                <a:spcPts val="0"/>
+              </a:spcAft>
+              <a:buClr>
+                <a:srgbClr val="000000"/>
+              </a:buClr>
+              <a:buSzPts val="1400"/>
+              <a:buFont typeface="Arial" panose="020B0604020202020204"/>
+              <a:buNone/>
+            </a:pPr>
+            <a:fld id="{00000000-1234-1234-1234-123412341234}" type="slidenum">
+              <a:rPr lang="en-US"/>
+            </a:fld>
+            <a:endParaRPr lang="en-US"/>
+          </a:p>
+        </p:txBody>
+      </p:sp>
+      <p:sp>
+        <p:nvSpPr>
+          <p:cNvPr id="12" name="Text 10"/>
+          <p:cNvSpPr/>
+          <p:nvPr/>
+        </p:nvSpPr>
+        <p:spPr>
+          <a:xfrm>
+            <a:off x="335280" y="2924810"/>
             <a:ext cx="5915025" cy="4328160"/>
           </a:xfrm>
           <a:prstGeom prst="rect">
@@ -20519,7 +21391,7 @@
 </p:sld>
 </file>
 
-<file path=ppt/slides/slide12.xml><?xml version="1.0" encoding="utf-8"?>
+<file path=ppt/slides/slide13.xml><?xml version="1.0" encoding="utf-8"?>
 <p:sld xmlns:a="http://schemas.openxmlformats.org/drawingml/2006/main" xmlns:r="http://schemas.openxmlformats.org/officeDocument/2006/relationships" xmlns:p="http://schemas.openxmlformats.org/presentationml/2006/main">
   <p:cSld>
     <p:spTree>
@@ -20988,7 +21860,7 @@
 </p:sld>
 </file>
 
-<file path=ppt/slides/slide13.xml><?xml version="1.0" encoding="utf-8"?>
+<file path=ppt/slides/slide14.xml><?xml version="1.0" encoding="utf-8"?>
 <p:sld xmlns:a="http://schemas.openxmlformats.org/drawingml/2006/main" xmlns:r="http://schemas.openxmlformats.org/officeDocument/2006/relationships" xmlns:p="http://schemas.openxmlformats.org/presentationml/2006/main">
   <p:cSld>
     <p:spTree>
@@ -21336,7 +22208,7 @@
 </p:sld>
 </file>
 
-<file path=ppt/slides/slide14.xml><?xml version="1.0" encoding="utf-8"?>
+<file path=ppt/slides/slide15.xml><?xml version="1.0" encoding="utf-8"?>
 <p:sld xmlns:a="http://schemas.openxmlformats.org/drawingml/2006/main" xmlns:r="http://schemas.openxmlformats.org/officeDocument/2006/relationships" xmlns:p="http://schemas.openxmlformats.org/presentationml/2006/main">
   <p:cSld>
     <p:spTree>
@@ -21522,7 +22394,7 @@
 </p:sld>
 </file>
 
-<file path=ppt/slides/slide15.xml><?xml version="1.0" encoding="utf-8"?>
+<file path=ppt/slides/slide16.xml><?xml version="1.0" encoding="utf-8"?>
 <p:sld xmlns:a="http://schemas.openxmlformats.org/drawingml/2006/main" xmlns:r="http://schemas.openxmlformats.org/officeDocument/2006/relationships" xmlns:p="http://schemas.openxmlformats.org/presentationml/2006/main">
   <p:cSld>
     <p:spTree>
@@ -22454,7 +23326,7 @@
 </p:sld>
 </file>
 
-<file path=ppt/slides/slide16.xml><?xml version="1.0" encoding="utf-8"?>
+<file path=ppt/slides/slide17.xml><?xml version="1.0" encoding="utf-8"?>
 <p:sld xmlns:a="http://schemas.openxmlformats.org/drawingml/2006/main" xmlns:r="http://schemas.openxmlformats.org/officeDocument/2006/relationships" xmlns:p="http://schemas.openxmlformats.org/presentationml/2006/main">
   <p:cSld>
     <p:spTree>
@@ -23336,7 +24208,7 @@
 </p:sld>
 </file>
 
-<file path=ppt/slides/slide17.xml><?xml version="1.0" encoding="utf-8"?>
+<file path=ppt/slides/slide18.xml><?xml version="1.0" encoding="utf-8"?>
 <p:sld xmlns:a="http://schemas.openxmlformats.org/drawingml/2006/main" xmlns:r="http://schemas.openxmlformats.org/officeDocument/2006/relationships" xmlns:p="http://schemas.openxmlformats.org/presentationml/2006/main">
   <p:cSld>
     <p:spTree>
@@ -23633,7 +24505,7 @@
 </p:sld>
 </file>
 
-<file path=ppt/slides/slide18.xml><?xml version="1.0" encoding="utf-8"?>
+<file path=ppt/slides/slide19.xml><?xml version="1.0" encoding="utf-8"?>
 <p:sld xmlns:a="http://schemas.openxmlformats.org/drawingml/2006/main" xmlns:r="http://schemas.openxmlformats.org/officeDocument/2006/relationships" xmlns:p="http://schemas.openxmlformats.org/presentationml/2006/main">
   <p:cSld>
     <p:spTree>
@@ -24492,336 +25364,6 @@
 </p:sld>
 </file>
 
-<file path=ppt/slides/slide19.xml><?xml version="1.0" encoding="utf-8"?>
-<p:sld xmlns:a="http://schemas.openxmlformats.org/drawingml/2006/main" xmlns:r="http://schemas.openxmlformats.org/officeDocument/2006/relationships" xmlns:p="http://schemas.openxmlformats.org/presentationml/2006/main">
-  <p:cSld>
-    <p:spTree>
-      <p:nvGrpSpPr>
-        <p:cNvPr id="222" name="Shape 222"/>
-        <p:cNvGrpSpPr/>
-        <p:nvPr/>
-      </p:nvGrpSpPr>
-      <p:grpSpPr>
-        <a:xfrm>
-          <a:off x="0" y="0"/>
-          <a:ext cx="0" cy="0"/>
-          <a:chOff x="0" y="0"/>
-          <a:chExt cx="0" cy="0"/>
-        </a:xfrm>
-      </p:grpSpPr>
-      <p:sp>
-        <p:nvSpPr>
-          <p:cNvPr id="223" name="Google Shape;223;p30"/>
-          <p:cNvSpPr txBox="1"/>
-          <p:nvPr>
-            <p:ph type="sldNum" idx="12"/>
-          </p:nvPr>
-        </p:nvSpPr>
-        <p:spPr>
-          <a:xfrm>
-            <a:off x="11296611" y="6014423"/>
-            <a:ext cx="731600" cy="524800"/>
-          </a:xfrm>
-          <a:prstGeom prst="rect">
-            <a:avLst/>
-          </a:prstGeom>
-          <a:noFill/>
-          <a:ln>
-            <a:noFill/>
-          </a:ln>
-        </p:spPr>
-        <p:txBody>
-          <a:bodyPr spcFirstLastPara="1" wrap="square" lIns="91425" tIns="91425" rIns="91425" bIns="91425" anchor="ctr" anchorCtr="0">
-            <a:noAutofit/>
-          </a:bodyPr>
-          <a:lstStyle/>
-          <a:p>
-            <a:pPr marL="0" marR="0" lvl="0" indent="0" algn="l" rtl="0">
-              <a:lnSpc>
-                <a:spcPct val="100000"/>
-              </a:lnSpc>
-              <a:spcBef>
-                <a:spcPts val="0"/>
-              </a:spcBef>
-              <a:spcAft>
-                <a:spcPts val="0"/>
-              </a:spcAft>
-              <a:buClr>
-                <a:srgbClr val="000000"/>
-              </a:buClr>
-              <a:buSzPts val="1400"/>
-              <a:buFont typeface="Arial" panose="020B0604020202020204"/>
-              <a:buNone/>
-            </a:pPr>
-            <a:fld id="{00000000-1234-1234-1234-123412341234}" type="slidenum">
-              <a:rPr lang="en-US"/>
-            </a:fld>
-            <a:endParaRPr lang="en-US"/>
-          </a:p>
-        </p:txBody>
-      </p:sp>
-      <p:sp>
-        <p:nvSpPr>
-          <p:cNvPr id="224" name="Google Shape;224;p30"/>
-          <p:cNvSpPr txBox="1"/>
-          <p:nvPr/>
-        </p:nvSpPr>
-        <p:spPr>
-          <a:xfrm>
-            <a:off x="373665" y="535349"/>
-            <a:ext cx="12423900" cy="781050"/>
-          </a:xfrm>
-          <a:prstGeom prst="rect">
-            <a:avLst/>
-          </a:prstGeom>
-          <a:noFill/>
-          <a:ln>
-            <a:noFill/>
-          </a:ln>
-        </p:spPr>
-        <p:txBody>
-          <a:bodyPr spcFirstLastPara="1" wrap="square" lIns="121900" tIns="121900" rIns="121900" bIns="121900" anchor="ctr" anchorCtr="0">
-            <a:spAutoFit/>
-          </a:bodyPr>
-          <a:lstStyle/>
-          <a:p>
-            <a:pPr marL="0" marR="0" lvl="0" indent="0" algn="l" rtl="0">
-              <a:lnSpc>
-                <a:spcPct val="100000"/>
-              </a:lnSpc>
-              <a:spcBef>
-                <a:spcPts val="0"/>
-              </a:spcBef>
-              <a:spcAft>
-                <a:spcPts val="0"/>
-              </a:spcAft>
-              <a:buClr>
-                <a:srgbClr val="000000"/>
-              </a:buClr>
-              <a:buSzPts val="3500"/>
-              <a:buFont typeface="Arial" panose="020B0604020202020204"/>
-              <a:buNone/>
-            </a:pPr>
-            <a:r>
-              <a:rPr lang="en-US" altLang="en-US" sz="3500" b="0" i="0" u="none" strike="noStrike" cap="none">
-                <a:solidFill>
-                  <a:srgbClr val="000000"/>
-                </a:solidFill>
-                <a:latin typeface="Arial" panose="020B0604020202020204"/>
-                <a:ea typeface="Arial" panose="020B0604020202020204"/>
-                <a:cs typeface="Arial" panose="020B0604020202020204"/>
-                <a:sym typeface="Arial" panose="020B0604020202020204"/>
-              </a:rPr>
-              <a:t>Compute Real Financial Loss</a:t>
-            </a:r>
-            <a:endParaRPr lang="en-US" altLang="en-US" sz="3500" b="0" i="0" u="none" strike="noStrike" cap="none">
-              <a:solidFill>
-                <a:srgbClr val="000000"/>
-              </a:solidFill>
-              <a:latin typeface="Arial" panose="020B0604020202020204"/>
-              <a:ea typeface="Arial" panose="020B0604020202020204"/>
-              <a:cs typeface="Arial" panose="020B0604020202020204"/>
-              <a:sym typeface="Arial" panose="020B0604020202020204"/>
-            </a:endParaRPr>
-          </a:p>
-        </p:txBody>
-      </p:sp>
-      <p:sp>
-        <p:nvSpPr>
-          <p:cNvPr id="225" name="Google Shape;225;p30"/>
-          <p:cNvSpPr txBox="1"/>
-          <p:nvPr/>
-        </p:nvSpPr>
-        <p:spPr>
-          <a:xfrm>
-            <a:off x="712032" y="1490008"/>
-            <a:ext cx="6400800" cy="369300"/>
-          </a:xfrm>
-          <a:prstGeom prst="rect">
-            <a:avLst/>
-          </a:prstGeom>
-          <a:noFill/>
-          <a:ln>
-            <a:noFill/>
-          </a:ln>
-        </p:spPr>
-        <p:txBody>
-          <a:bodyPr spcFirstLastPara="1" wrap="square" lIns="91425" tIns="45700" rIns="91425" bIns="45700" anchor="t" anchorCtr="0">
-            <a:spAutoFit/>
-          </a:bodyPr>
-          <a:lstStyle/>
-          <a:p>
-            <a:pPr marL="0" marR="0" lvl="0" indent="0" algn="l" rtl="0">
-              <a:lnSpc>
-                <a:spcPct val="100000"/>
-              </a:lnSpc>
-              <a:spcBef>
-                <a:spcPts val="0"/>
-              </a:spcBef>
-              <a:spcAft>
-                <a:spcPts val="0"/>
-              </a:spcAft>
-              <a:buClr>
-                <a:srgbClr val="000000"/>
-              </a:buClr>
-              <a:buSzPts val="1800"/>
-              <a:buFont typeface="Arial" panose="020B0604020202020204"/>
-              <a:buNone/>
-            </a:pPr>
-            <a:endParaRPr sz="1800" b="0" i="0" u="none" strike="noStrike" cap="none">
-              <a:solidFill>
-                <a:schemeClr val="dk1"/>
-              </a:solidFill>
-              <a:latin typeface="Montserrat" panose="00000500000000000000"/>
-              <a:ea typeface="Montserrat" panose="00000500000000000000"/>
-              <a:cs typeface="Montserrat" panose="00000500000000000000"/>
-              <a:sym typeface="Montserrat" panose="00000500000000000000"/>
-            </a:endParaRPr>
-          </a:p>
-        </p:txBody>
-      </p:sp>
-      <p:sp>
-        <p:nvSpPr>
-          <p:cNvPr id="226" name="Google Shape;226;p30"/>
-          <p:cNvSpPr txBox="1"/>
-          <p:nvPr/>
-        </p:nvSpPr>
-        <p:spPr>
-          <a:xfrm>
-            <a:off x="551180" y="1557020"/>
-            <a:ext cx="10271125" cy="3754120"/>
-          </a:xfrm>
-          <a:prstGeom prst="rect">
-            <a:avLst/>
-          </a:prstGeom>
-          <a:noFill/>
-          <a:ln>
-            <a:noFill/>
-          </a:ln>
-        </p:spPr>
-        <p:txBody>
-          <a:bodyPr spcFirstLastPara="1" wrap="square" lIns="91425" tIns="91425" rIns="91425" bIns="91425" anchor="t" anchorCtr="0">
-            <a:noAutofit/>
-          </a:bodyPr>
-          <a:lstStyle/>
-          <a:p>
-            <a:pPr marL="914400" marR="0" lvl="0" indent="0" algn="l" rtl="0">
-              <a:lnSpc>
-                <a:spcPct val="150000"/>
-              </a:lnSpc>
-              <a:spcBef>
-                <a:spcPts val="0"/>
-              </a:spcBef>
-              <a:spcAft>
-                <a:spcPts val="0"/>
-              </a:spcAft>
-              <a:buClr>
-                <a:srgbClr val="000000"/>
-              </a:buClr>
-              <a:buSzPts val="1900"/>
-              <a:buFont typeface="Arial" panose="020B0604020202020204"/>
-              <a:buNone/>
-            </a:pPr>
-            <a:endParaRPr sz="1900" b="0" i="0" u="none" strike="noStrike" cap="none">
-              <a:solidFill>
-                <a:schemeClr val="dk1"/>
-              </a:solidFill>
-              <a:latin typeface="Arial" panose="020B0604020202020204"/>
-              <a:ea typeface="Arial" panose="020B0604020202020204"/>
-              <a:cs typeface="Arial" panose="020B0604020202020204"/>
-              <a:sym typeface="Arial" panose="020B0604020202020204"/>
-            </a:endParaRPr>
-          </a:p>
-          <a:p>
-            <a:pPr marL="0" marR="0" lvl="0" indent="0" algn="l" rtl="0">
-              <a:lnSpc>
-                <a:spcPct val="150000"/>
-              </a:lnSpc>
-              <a:spcBef>
-                <a:spcPts val="0"/>
-              </a:spcBef>
-              <a:spcAft>
-                <a:spcPts val="0"/>
-              </a:spcAft>
-              <a:buClr>
-                <a:srgbClr val="000000"/>
-              </a:buClr>
-              <a:buSzPts val="1900"/>
-              <a:buFont typeface="Arial" panose="020B0604020202020204" pitchFamily="34" charset="0"/>
-              <a:buNone/>
-            </a:pPr>
-            <a:endParaRPr lang="en-US" altLang="en-US" sz="1800" b="0" i="0" u="none" strike="noStrike" cap="none">
-              <a:solidFill>
-                <a:schemeClr val="dk1"/>
-              </a:solidFill>
-              <a:latin typeface="Montserrat" panose="00000500000000000000" charset="0"/>
-              <a:ea typeface="Arial" panose="020B0604020202020204"/>
-              <a:cs typeface="Montserrat" panose="00000500000000000000" charset="0"/>
-              <a:sym typeface="Arial" panose="020B0604020202020204"/>
-            </a:endParaRPr>
-          </a:p>
-          <a:p>
-            <a:pPr marL="342900" marR="0" lvl="0" indent="-342900" algn="l" rtl="0">
-              <a:lnSpc>
-                <a:spcPct val="150000"/>
-              </a:lnSpc>
-              <a:spcBef>
-                <a:spcPts val="0"/>
-              </a:spcBef>
-              <a:spcAft>
-                <a:spcPts val="0"/>
-              </a:spcAft>
-              <a:buClr>
-                <a:srgbClr val="000000"/>
-              </a:buClr>
-              <a:buSzPts val="1900"/>
-              <a:buFont typeface="Arial" panose="020B0604020202020204" pitchFamily="34" charset="0"/>
-              <a:buChar char="•"/>
-            </a:pPr>
-            <a:endParaRPr sz="1900" b="0" i="0" u="none" strike="noStrike" cap="none">
-              <a:solidFill>
-                <a:schemeClr val="dk1"/>
-              </a:solidFill>
-              <a:latin typeface="Arial" panose="020B0604020202020204"/>
-              <a:ea typeface="Arial" panose="020B0604020202020204"/>
-              <a:cs typeface="Arial" panose="020B0604020202020204"/>
-              <a:sym typeface="Arial" panose="020B0604020202020204"/>
-            </a:endParaRPr>
-          </a:p>
-        </p:txBody>
-      </p:sp>
-      <p:pic>
-        <p:nvPicPr>
-          <p:cNvPr id="2" name="Picture 1"/>
-          <p:cNvPicPr>
-            <a:picLocks noChangeAspect="1"/>
-          </p:cNvPicPr>
-          <p:nvPr/>
-        </p:nvPicPr>
-        <p:blipFill>
-          <a:blip r:embed="rId1"/>
-          <a:stretch>
-            <a:fillRect/>
-          </a:stretch>
-        </p:blipFill>
-        <p:spPr>
-          <a:xfrm>
-            <a:off x="601980" y="1720850"/>
-            <a:ext cx="9010015" cy="4391025"/>
-          </a:xfrm>
-          <a:prstGeom prst="rect">
-            <a:avLst/>
-          </a:prstGeom>
-        </p:spPr>
-      </p:pic>
-    </p:spTree>
-  </p:cSld>
-  <p:clrMapOvr>
-    <a:masterClrMapping/>
-  </p:clrMapOvr>
-</p:sld>
-</file>
-
 <file path=ppt/slides/slide2.xml><?xml version="1.0" encoding="utf-8"?>
 <p:sld xmlns:a="http://schemas.openxmlformats.org/drawingml/2006/main" xmlns:r="http://schemas.openxmlformats.org/officeDocument/2006/relationships" xmlns:p="http://schemas.openxmlformats.org/presentationml/2006/main">
   <p:cSld>
@@ -25281,7 +25823,7 @@
         <p:spPr>
           <a:xfrm>
             <a:off x="551180" y="1557020"/>
-            <a:ext cx="10271125" cy="4982210"/>
+            <a:ext cx="10271125" cy="3754120"/>
           </a:xfrm>
           <a:prstGeom prst="rect">
             <a:avLst/>
@@ -25314,19 +25856,35 @@
               <a:buFont typeface="Arial" panose="020B0604020202020204"/>
               <a:buNone/>
             </a:pPr>
-            <a:r>
-              <a:rPr lang="en-US" altLang="en-US" sz="1900" b="1" i="0" u="none" strike="noStrike" cap="none">
-                <a:solidFill>
-                  <a:schemeClr val="dk1"/>
-                </a:solidFill>
-                <a:latin typeface="Montserrat" panose="00000500000000000000" charset="0"/>
-                <a:ea typeface="Arial" panose="020B0604020202020204"/>
-                <a:cs typeface="Montserrat" panose="00000500000000000000" charset="0"/>
-                <a:sym typeface="Arial" panose="020B0604020202020204"/>
-              </a:rPr>
-              <a:t>With Cost Optimization</a:t>
-            </a:r>
-            <a:endParaRPr lang="en-US" altLang="en-US" sz="1900" b="1" i="0" u="none" strike="noStrike" cap="none">
+            <a:endParaRPr sz="1900" b="0" i="0" u="none" strike="noStrike" cap="none">
+              <a:solidFill>
+                <a:schemeClr val="dk1"/>
+              </a:solidFill>
+              <a:latin typeface="Arial" panose="020B0604020202020204"/>
+              <a:ea typeface="Arial" panose="020B0604020202020204"/>
+              <a:cs typeface="Arial" panose="020B0604020202020204"/>
+              <a:sym typeface="Arial" panose="020B0604020202020204"/>
+            </a:endParaRPr>
+          </a:p>
+          <a:p>
+            <a:pPr marL="0" marR="0" lvl="0" indent="0" algn="l" rtl="0">
+              <a:lnSpc>
+                <a:spcPct val="150000"/>
+              </a:lnSpc>
+              <a:spcBef>
+                <a:spcPts val="0"/>
+              </a:spcBef>
+              <a:spcAft>
+                <a:spcPts val="0"/>
+              </a:spcAft>
+              <a:buClr>
+                <a:srgbClr val="000000"/>
+              </a:buClr>
+              <a:buSzPts val="1900"/>
+              <a:buFont typeface="Arial" panose="020B0604020202020204" pitchFamily="34" charset="0"/>
+              <a:buNone/>
+            </a:pPr>
+            <a:endParaRPr lang="en-US" altLang="en-US" sz="1800" b="0" i="0" u="none" strike="noStrike" cap="none">
               <a:solidFill>
                 <a:schemeClr val="dk1"/>
               </a:solidFill>
@@ -25337,7 +25895,7 @@
             </a:endParaRPr>
           </a:p>
           <a:p>
-            <a:pPr marL="1257300" marR="0" lvl="0" indent="-342900" algn="l" rtl="0">
+            <a:pPr marL="342900" marR="0" lvl="0" indent="-342900" algn="l" rtl="0">
               <a:lnSpc>
                 <a:spcPct val="150000"/>
               </a:lnSpc>
@@ -25354,350 +25912,42 @@
               <a:buFont typeface="Arial" panose="020B0604020202020204" pitchFamily="34" charset="0"/>
               <a:buChar char="•"/>
             </a:pPr>
-            <a:r>
-              <a:rPr lang="en-US" altLang="en-US" sz="1900" b="0" i="0" u="none" strike="noStrike" cap="none">
-                <a:solidFill>
-                  <a:schemeClr val="dk1"/>
-                </a:solidFill>
-                <a:latin typeface="Montserrat" panose="00000500000000000000" charset="0"/>
-                <a:ea typeface="Arial" panose="020B0604020202020204"/>
-                <a:cs typeface="Montserrat" panose="00000500000000000000" charset="0"/>
-                <a:sym typeface="Arial" panose="020B0604020202020204"/>
-              </a:rPr>
-              <a:t>Threshold adjusted based on ₹ impact</a:t>
-            </a:r>
-            <a:endParaRPr lang="en-US" altLang="en-US" sz="1900" b="0" i="0" u="none" strike="noStrike" cap="none">
-              <a:solidFill>
-                <a:schemeClr val="dk1"/>
-              </a:solidFill>
-              <a:latin typeface="Montserrat" panose="00000500000000000000" charset="0"/>
-              <a:ea typeface="Arial" panose="020B0604020202020204"/>
-              <a:cs typeface="Montserrat" panose="00000500000000000000" charset="0"/>
-              <a:sym typeface="Arial" panose="020B0604020202020204"/>
-            </a:endParaRPr>
-          </a:p>
-          <a:p>
-            <a:pPr marL="914400" marR="0" lvl="0" indent="0" algn="l" rtl="0">
-              <a:lnSpc>
-                <a:spcPct val="150000"/>
-              </a:lnSpc>
-              <a:spcBef>
-                <a:spcPts val="0"/>
-              </a:spcBef>
-              <a:spcAft>
-                <a:spcPts val="0"/>
-              </a:spcAft>
-              <a:buClr>
-                <a:srgbClr val="000000"/>
-              </a:buClr>
-              <a:buSzPts val="1900"/>
-              <a:buFont typeface="Arial" panose="020B0604020202020204" pitchFamily="34" charset="0"/>
-              <a:buNone/>
-            </a:pPr>
-            <a:r>
-              <a:rPr lang="en-US" altLang="en-US" sz="1900" b="1" i="0" u="none" strike="noStrike" cap="none">
-                <a:solidFill>
-                  <a:schemeClr val="dk1"/>
-                </a:solidFill>
-                <a:latin typeface="Montserrat" panose="00000500000000000000" charset="0"/>
-                <a:ea typeface="Arial" panose="020B0604020202020204"/>
-                <a:cs typeface="Montserrat" panose="00000500000000000000" charset="0"/>
-                <a:sym typeface="Arial" panose="020B0604020202020204"/>
-              </a:rPr>
-              <a:t>Minimizes</a:t>
-            </a:r>
-            <a:r>
-              <a:rPr lang="en-US" altLang="en-US" sz="1900" b="0" i="0" u="none" strike="noStrike" cap="none">
-                <a:solidFill>
-                  <a:schemeClr val="dk1"/>
-                </a:solidFill>
-                <a:latin typeface="Montserrat" panose="00000500000000000000" charset="0"/>
-                <a:ea typeface="Arial" panose="020B0604020202020204"/>
-                <a:cs typeface="Montserrat" panose="00000500000000000000" charset="0"/>
-                <a:sym typeface="Arial" panose="020B0604020202020204"/>
-              </a:rPr>
-              <a:t>:</a:t>
-            </a:r>
-            <a:endParaRPr lang="en-US" altLang="en-US" sz="1900" b="0" i="0" u="none" strike="noStrike" cap="none">
-              <a:solidFill>
-                <a:schemeClr val="dk1"/>
-              </a:solidFill>
-              <a:latin typeface="Montserrat" panose="00000500000000000000" charset="0"/>
-              <a:ea typeface="Arial" panose="020B0604020202020204"/>
-              <a:cs typeface="Montserrat" panose="00000500000000000000" charset="0"/>
-              <a:sym typeface="Arial" panose="020B0604020202020204"/>
-            </a:endParaRPr>
-          </a:p>
-          <a:p>
-            <a:pPr marL="1257300" marR="0" lvl="0" indent="-342900" algn="l" rtl="0">
-              <a:lnSpc>
-                <a:spcPct val="150000"/>
-              </a:lnSpc>
-              <a:spcBef>
-                <a:spcPts val="0"/>
-              </a:spcBef>
-              <a:spcAft>
-                <a:spcPts val="0"/>
-              </a:spcAft>
-              <a:buClr>
-                <a:srgbClr val="000000"/>
-              </a:buClr>
-              <a:buSzPts val="1900"/>
-              <a:buFont typeface="Arial" panose="020B0604020202020204" pitchFamily="34" charset="0"/>
-              <a:buChar char="•"/>
-            </a:pPr>
-            <a:r>
-              <a:rPr lang="en-US" altLang="en-US" sz="1900" b="0" i="0" u="none" strike="noStrike" cap="none">
-                <a:solidFill>
-                  <a:schemeClr val="dk1"/>
-                </a:solidFill>
-                <a:latin typeface="Montserrat" panose="00000500000000000000" charset="0"/>
-                <a:ea typeface="Arial" panose="020B0604020202020204"/>
-                <a:cs typeface="Montserrat" panose="00000500000000000000" charset="0"/>
-                <a:sym typeface="Arial" panose="020B0604020202020204"/>
-              </a:rPr>
-              <a:t>Fraud leakage (FN)</a:t>
-            </a:r>
-            <a:endParaRPr lang="en-US" altLang="en-US" sz="1900" b="0" i="0" u="none" strike="noStrike" cap="none">
-              <a:solidFill>
-                <a:schemeClr val="dk1"/>
-              </a:solidFill>
-              <a:latin typeface="Montserrat" panose="00000500000000000000" charset="0"/>
-              <a:ea typeface="Arial" panose="020B0604020202020204"/>
-              <a:cs typeface="Montserrat" panose="00000500000000000000" charset="0"/>
-              <a:sym typeface="Arial" panose="020B0604020202020204"/>
-            </a:endParaRPr>
-          </a:p>
-          <a:p>
-            <a:pPr marL="1257300" marR="0" lvl="0" indent="-342900" algn="l" rtl="0">
-              <a:lnSpc>
-                <a:spcPct val="150000"/>
-              </a:lnSpc>
-              <a:spcBef>
-                <a:spcPts val="0"/>
-              </a:spcBef>
-              <a:spcAft>
-                <a:spcPts val="0"/>
-              </a:spcAft>
-              <a:buClr>
-                <a:srgbClr val="000000"/>
-              </a:buClr>
-              <a:buSzPts val="1900"/>
-              <a:buFont typeface="Arial" panose="020B0604020202020204" pitchFamily="34" charset="0"/>
-              <a:buChar char="•"/>
-            </a:pPr>
-            <a:r>
-              <a:rPr lang="en-US" altLang="en-US" sz="1900" b="0" i="0" u="none" strike="noStrike" cap="none">
-                <a:solidFill>
-                  <a:schemeClr val="dk1"/>
-                </a:solidFill>
-                <a:latin typeface="Montserrat" panose="00000500000000000000" charset="0"/>
-                <a:ea typeface="Arial" panose="020B0604020202020204"/>
-                <a:cs typeface="Montserrat" panose="00000500000000000000" charset="0"/>
-                <a:sym typeface="Arial" panose="020B0604020202020204"/>
-              </a:rPr>
-              <a:t>Customer loss (FP)</a:t>
-            </a:r>
-            <a:endParaRPr lang="en-US" altLang="en-US" sz="1900" b="0" i="0" u="none" strike="noStrike" cap="none">
-              <a:solidFill>
-                <a:schemeClr val="dk1"/>
-              </a:solidFill>
-              <a:latin typeface="Montserrat" panose="00000500000000000000" charset="0"/>
-              <a:ea typeface="Arial" panose="020B0604020202020204"/>
-              <a:cs typeface="Montserrat" panose="00000500000000000000" charset="0"/>
-              <a:sym typeface="Arial" panose="020B0604020202020204"/>
-            </a:endParaRPr>
-          </a:p>
-          <a:p>
-            <a:pPr marL="914400" marR="0" lvl="0" indent="0" algn="l" rtl="0">
-              <a:lnSpc>
-                <a:spcPct val="150000"/>
-              </a:lnSpc>
-              <a:spcBef>
-                <a:spcPts val="0"/>
-              </a:spcBef>
-              <a:spcAft>
-                <a:spcPts val="0"/>
-              </a:spcAft>
-              <a:buClr>
-                <a:srgbClr val="000000"/>
-              </a:buClr>
-              <a:buSzPts val="1900"/>
-              <a:buFont typeface="Arial" panose="020B0604020202020204"/>
-              <a:buNone/>
-            </a:pPr>
-            <a:endParaRPr lang="zh-CN" altLang="en-US" sz="1900" b="0" i="0" u="none" strike="noStrike" cap="none">
-              <a:solidFill>
-                <a:schemeClr val="dk1"/>
-              </a:solidFill>
-              <a:latin typeface="Montserrat" panose="00000500000000000000" charset="0"/>
-              <a:ea typeface="Arial" panose="020B0604020202020204"/>
-              <a:cs typeface="Montserrat" panose="00000500000000000000" charset="0"/>
-              <a:sym typeface="Arial" panose="020B0604020202020204"/>
-            </a:endParaRPr>
-          </a:p>
-          <a:p>
-            <a:pPr marL="914400" marR="0" lvl="0" indent="0" algn="l" rtl="0">
-              <a:lnSpc>
-                <a:spcPct val="150000"/>
-              </a:lnSpc>
-              <a:spcBef>
-                <a:spcPts val="0"/>
-              </a:spcBef>
-              <a:spcAft>
-                <a:spcPts val="0"/>
-              </a:spcAft>
-              <a:buClr>
-                <a:srgbClr val="000000"/>
-              </a:buClr>
-              <a:buSzPts val="1900"/>
-              <a:buFont typeface="Arial" panose="020B0604020202020204"/>
-              <a:buNone/>
-            </a:pPr>
-            <a:r>
-              <a:rPr lang="en-US" altLang="en-US" sz="1900" b="1" i="0" u="none" strike="noStrike" cap="none">
-                <a:solidFill>
-                  <a:schemeClr val="dk1"/>
-                </a:solidFill>
-                <a:latin typeface="Montserrat" panose="00000500000000000000" charset="0"/>
-                <a:ea typeface="Arial" panose="020B0604020202020204"/>
-                <a:cs typeface="Montserrat" panose="00000500000000000000" charset="0"/>
-                <a:sym typeface="Arial" panose="020B0604020202020204"/>
-              </a:rPr>
-              <a:t>Direct business benefit:</a:t>
-            </a:r>
-            <a:endParaRPr lang="en-US" altLang="en-US" sz="1900" b="1" i="0" u="none" strike="noStrike" cap="none">
-              <a:solidFill>
-                <a:schemeClr val="dk1"/>
-              </a:solidFill>
-              <a:latin typeface="Montserrat" panose="00000500000000000000" charset="0"/>
-              <a:ea typeface="Arial" panose="020B0604020202020204"/>
-              <a:cs typeface="Montserrat" panose="00000500000000000000" charset="0"/>
-              <a:sym typeface="Arial" panose="020B0604020202020204"/>
-            </a:endParaRPr>
-          </a:p>
-          <a:p>
-            <a:pPr marL="1257300" marR="0" lvl="0" indent="-342900" algn="l" rtl="0">
-              <a:lnSpc>
-                <a:spcPct val="150000"/>
-              </a:lnSpc>
-              <a:spcBef>
-                <a:spcPts val="0"/>
-              </a:spcBef>
-              <a:spcAft>
-                <a:spcPts val="0"/>
-              </a:spcAft>
-              <a:buClr>
-                <a:srgbClr val="000000"/>
-              </a:buClr>
-              <a:buSzPts val="1900"/>
-              <a:buFont typeface="Arial" panose="020B0604020202020204" pitchFamily="34" charset="0"/>
-              <a:buChar char="•"/>
-            </a:pPr>
-            <a:r>
-              <a:rPr lang="en-US" altLang="en-US" sz="1900" b="0" i="0" u="none" strike="noStrike" cap="none">
-                <a:solidFill>
-                  <a:schemeClr val="dk1"/>
-                </a:solidFill>
-                <a:latin typeface="Montserrat" panose="00000500000000000000" charset="0"/>
-                <a:ea typeface="Arial" panose="020B0604020202020204"/>
-                <a:cs typeface="Montserrat" panose="00000500000000000000" charset="0"/>
-                <a:sym typeface="Arial" panose="020B0604020202020204"/>
-              </a:rPr>
-              <a:t>Reduced fraud loss</a:t>
-            </a:r>
-            <a:endParaRPr lang="en-US" altLang="en-US" sz="1900" b="0" i="0" u="none" strike="noStrike" cap="none">
-              <a:solidFill>
-                <a:schemeClr val="dk1"/>
-              </a:solidFill>
-              <a:latin typeface="Montserrat" panose="00000500000000000000" charset="0"/>
-              <a:ea typeface="Arial" panose="020B0604020202020204"/>
-              <a:cs typeface="Montserrat" panose="00000500000000000000" charset="0"/>
-              <a:sym typeface="Arial" panose="020B0604020202020204"/>
-            </a:endParaRPr>
-          </a:p>
-          <a:p>
-            <a:pPr marL="1257300" marR="0" lvl="0" indent="-342900" algn="l" rtl="0">
-              <a:lnSpc>
-                <a:spcPct val="150000"/>
-              </a:lnSpc>
-              <a:spcBef>
-                <a:spcPts val="0"/>
-              </a:spcBef>
-              <a:spcAft>
-                <a:spcPts val="0"/>
-              </a:spcAft>
-              <a:buClr>
-                <a:srgbClr val="000000"/>
-              </a:buClr>
-              <a:buSzPts val="1900"/>
-              <a:buFont typeface="Arial" panose="020B0604020202020204" pitchFamily="34" charset="0"/>
-              <a:buChar char="•"/>
-            </a:pPr>
-            <a:r>
-              <a:rPr lang="en-US" altLang="en-US" sz="1900" b="0" i="0" u="none" strike="noStrike" cap="none">
-                <a:solidFill>
-                  <a:schemeClr val="dk1"/>
-                </a:solidFill>
-                <a:latin typeface="Montserrat" panose="00000500000000000000" charset="0"/>
-                <a:ea typeface="Arial" panose="020B0604020202020204"/>
-                <a:cs typeface="Montserrat" panose="00000500000000000000" charset="0"/>
-                <a:sym typeface="Arial" panose="020B0604020202020204"/>
-              </a:rPr>
-              <a:t>Improved approval rate</a:t>
-            </a:r>
-            <a:endParaRPr lang="en-US" altLang="en-US" sz="1900" b="0" i="0" u="none" strike="noStrike" cap="none">
-              <a:solidFill>
-                <a:schemeClr val="dk1"/>
-              </a:solidFill>
-              <a:latin typeface="Montserrat" panose="00000500000000000000" charset="0"/>
-              <a:ea typeface="Arial" panose="020B0604020202020204"/>
-              <a:cs typeface="Montserrat" panose="00000500000000000000" charset="0"/>
-              <a:sym typeface="Arial" panose="020B0604020202020204"/>
-            </a:endParaRPr>
-          </a:p>
-          <a:p>
-            <a:pPr marL="1257300" marR="0" lvl="0" indent="-342900" algn="l" rtl="0">
-              <a:lnSpc>
-                <a:spcPct val="150000"/>
-              </a:lnSpc>
-              <a:spcBef>
-                <a:spcPts val="0"/>
-              </a:spcBef>
-              <a:spcAft>
-                <a:spcPts val="0"/>
-              </a:spcAft>
-              <a:buClr>
-                <a:srgbClr val="000000"/>
-              </a:buClr>
-              <a:buSzPts val="1900"/>
-              <a:buFont typeface="Arial" panose="020B0604020202020204" pitchFamily="34" charset="0"/>
-              <a:buChar char="•"/>
-            </a:pPr>
-            <a:r>
-              <a:rPr lang="en-US" altLang="en-US" sz="1900" b="0" i="0" u="none" strike="noStrike" cap="none">
-                <a:solidFill>
-                  <a:schemeClr val="dk1"/>
-                </a:solidFill>
-                <a:latin typeface="Montserrat" panose="00000500000000000000" charset="0"/>
-                <a:ea typeface="Arial" panose="020B0604020202020204"/>
-                <a:cs typeface="Montserrat" panose="00000500000000000000" charset="0"/>
-                <a:sym typeface="Arial" panose="020B0604020202020204"/>
-              </a:rPr>
-              <a:t>Increased revenue</a:t>
-            </a:r>
             <a:endParaRPr sz="1900" b="0" i="0" u="none" strike="noStrike" cap="none">
               <a:solidFill>
                 <a:schemeClr val="dk1"/>
               </a:solidFill>
-              <a:latin typeface="Montserrat" panose="00000500000000000000" charset="0"/>
+              <a:latin typeface="Arial" panose="020B0604020202020204"/>
               <a:ea typeface="Arial" panose="020B0604020202020204"/>
-              <a:cs typeface="Montserrat" panose="00000500000000000000" charset="0"/>
+              <a:cs typeface="Arial" panose="020B0604020202020204"/>
               <a:sym typeface="Arial" panose="020B0604020202020204"/>
             </a:endParaRPr>
           </a:p>
         </p:txBody>
       </p:sp>
+      <p:pic>
+        <p:nvPicPr>
+          <p:cNvPr id="2" name="Picture 1"/>
+          <p:cNvPicPr>
+            <a:picLocks noChangeAspect="1"/>
+          </p:cNvPicPr>
+          <p:nvPr/>
+        </p:nvPicPr>
+        <p:blipFill>
+          <a:blip r:embed="rId1"/>
+          <a:stretch>
+            <a:fillRect/>
+          </a:stretch>
+        </p:blipFill>
+        <p:spPr>
+          <a:xfrm>
+            <a:off x="601980" y="1720850"/>
+            <a:ext cx="9010015" cy="4391025"/>
+          </a:xfrm>
+          <a:prstGeom prst="rect">
+            <a:avLst/>
+          </a:prstGeom>
+        </p:spPr>
+      </p:pic>
     </p:spTree>
   </p:cSld>
   <p:clrMapOvr>
@@ -25826,7 +26076,7 @@
                 <a:cs typeface="Arial" panose="020B0604020202020204"/>
                 <a:sym typeface="Arial" panose="020B0604020202020204"/>
               </a:rPr>
-              <a:t>Cost Optimization Curve</a:t>
+              <a:t>Compute Real Financial Loss</a:t>
             </a:r>
             <a:endParaRPr lang="en-US" altLang="en-US" sz="3500" b="0" i="0" u="none" strike="noStrike" cap="none">
               <a:solidFill>
@@ -25894,40 +26144,16 @@
           </a:p>
         </p:txBody>
       </p:sp>
-      <p:pic>
-        <p:nvPicPr>
-          <p:cNvPr id="2" name="Picture 1"/>
-          <p:cNvPicPr>
-            <a:picLocks noChangeAspect="1"/>
-          </p:cNvPicPr>
-          <p:nvPr/>
-        </p:nvPicPr>
-        <p:blipFill>
-          <a:blip r:embed="rId1"/>
-          <a:stretch>
-            <a:fillRect/>
-          </a:stretch>
-        </p:blipFill>
-        <p:spPr>
-          <a:xfrm>
-            <a:off x="623570" y="1316355"/>
-            <a:ext cx="5936615" cy="4913630"/>
-          </a:xfrm>
-          <a:prstGeom prst="rect">
-            <a:avLst/>
-          </a:prstGeom>
-        </p:spPr>
-      </p:pic>
       <p:sp>
         <p:nvSpPr>
-          <p:cNvPr id="208" name="Google Shape;208;p28"/>
+          <p:cNvPr id="226" name="Google Shape;226;p30"/>
           <p:cNvSpPr txBox="1"/>
           <p:nvPr/>
         </p:nvSpPr>
         <p:spPr>
           <a:xfrm>
-            <a:off x="6805295" y="1489710"/>
-            <a:ext cx="5027930" cy="1656715"/>
+            <a:off x="551180" y="1557020"/>
+            <a:ext cx="10271125" cy="4982210"/>
           </a:xfrm>
           <a:prstGeom prst="rect">
             <a:avLst/>
@@ -25943,35 +26169,36 @@
           </a:bodyPr>
           <a:lstStyle/>
           <a:p>
-            <a:pPr marL="0" indent="0">
-              <a:lnSpc>
-                <a:spcPct val="110000"/>
-              </a:lnSpc>
+            <a:pPr marL="914400" marR="0" lvl="0" indent="0" algn="l" rtl="0">
+              <a:lnSpc>
+                <a:spcPct val="150000"/>
+              </a:lnSpc>
+              <a:spcBef>
+                <a:spcPts val="0"/>
+              </a:spcBef>
+              <a:spcAft>
+                <a:spcPts val="0"/>
+              </a:spcAft>
+              <a:buClr>
+                <a:srgbClr val="000000"/>
+              </a:buClr>
+              <a:buSzPts val="1900"/>
+              <a:buFont typeface="Arial" panose="020B0604020202020204"/>
               <a:buNone/>
             </a:pPr>
             <a:r>
-              <a:rPr lang="en-US" altLang="en-US" sz="1800">
+              <a:rPr lang="en-US" altLang="en-US" sz="1900" b="1" i="0" u="none" strike="noStrike" cap="none">
                 <a:solidFill>
                   <a:schemeClr val="dk1"/>
                 </a:solidFill>
                 <a:latin typeface="Montserrat" panose="00000500000000000000" charset="0"/>
+                <a:ea typeface="Arial" panose="020B0604020202020204"/>
                 <a:cs typeface="Montserrat" panose="00000500000000000000" charset="0"/>
-                <a:sym typeface="+mn-ea"/>
+                <a:sym typeface="Arial" panose="020B0604020202020204"/>
               </a:rPr>
-              <a:t>Cost curve shows optimal threshold minimizing financial loss by balancing false positives and false negatives in fraud detection system</a:t>
+              <a:t>With Cost Optimization</a:t>
             </a:r>
-            <a:r>
-              <a:rPr lang="en-US" sz="1800">
-                <a:solidFill>
-                  <a:schemeClr val="dk1"/>
-                </a:solidFill>
-                <a:latin typeface="Montserrat" panose="00000500000000000000" charset="0"/>
-                <a:cs typeface="Montserrat" panose="00000500000000000000" charset="0"/>
-                <a:sym typeface="+mn-ea"/>
-              </a:rPr>
-              <a:t>ance.</a:t>
-            </a:r>
-            <a:endParaRPr lang="en-US" sz="1800" b="0" i="0" u="none" strike="noStrike" cap="none">
+            <a:endParaRPr lang="en-US" altLang="en-US" sz="1900" b="1" i="0" u="none" strike="noStrike" cap="none">
               <a:solidFill>
                 <a:schemeClr val="dk1"/>
               </a:solidFill>
@@ -25981,41 +26208,26 @@
               <a:sym typeface="Arial" panose="020B0604020202020204"/>
             </a:endParaRPr>
           </a:p>
-        </p:txBody>
-      </p:sp>
-      <p:sp>
-        <p:nvSpPr>
-          <p:cNvPr id="1" name="Google Shape;208;p28"/>
-          <p:cNvSpPr txBox="1"/>
-          <p:nvPr/>
-        </p:nvSpPr>
-        <p:spPr>
-          <a:xfrm>
-            <a:off x="6804660" y="3429000"/>
-            <a:ext cx="5016500" cy="1647825"/>
-          </a:xfrm>
-          <a:prstGeom prst="rect">
-            <a:avLst/>
-          </a:prstGeom>
-          <a:noFill/>
-          <a:ln>
-            <a:noFill/>
-          </a:ln>
-        </p:spPr>
-        <p:txBody>
-          <a:bodyPr spcFirstLastPara="1" wrap="square" lIns="91425" tIns="91425" rIns="91425" bIns="91425" anchor="t" anchorCtr="0">
-            <a:noAutofit/>
-          </a:bodyPr>
-          <a:lstStyle/>
-          <a:p>
-            <a:pPr marL="0" indent="0">
-              <a:lnSpc>
-                <a:spcPct val="110000"/>
-              </a:lnSpc>
-              <a:buNone/>
+          <a:p>
+            <a:pPr marL="1257300" marR="0" lvl="0" indent="-342900" algn="l" rtl="0">
+              <a:lnSpc>
+                <a:spcPct val="150000"/>
+              </a:lnSpc>
+              <a:spcBef>
+                <a:spcPts val="0"/>
+              </a:spcBef>
+              <a:spcAft>
+                <a:spcPts val="0"/>
+              </a:spcAft>
+              <a:buClr>
+                <a:srgbClr val="000000"/>
+              </a:buClr>
+              <a:buSzPts val="1900"/>
+              <a:buFont typeface="Arial" panose="020B0604020202020204" pitchFamily="34" charset="0"/>
+              <a:buChar char="•"/>
             </a:pPr>
             <a:r>
-              <a:rPr lang="en-US" altLang="en-US" sz="1800" b="1" i="0" u="none" strike="noStrike" cap="none">
+              <a:rPr lang="en-US" altLang="en-US" sz="1900" b="0" i="0" u="none" strike="noStrike" cap="none">
                 <a:solidFill>
                   <a:schemeClr val="dk1"/>
                 </a:solidFill>
@@ -26024,9 +26236,329 @@
                 <a:cs typeface="Montserrat" panose="00000500000000000000" charset="0"/>
                 <a:sym typeface="Arial" panose="020B0604020202020204"/>
               </a:rPr>
-              <a:t>We optimized threshold based on cost instead of accuracy, reducing total fraud-related financial loss and improving business profitability.</a:t>
+              <a:t>Threshold adjusted based on ₹ impact</a:t>
             </a:r>
-            <a:endParaRPr lang="en-US" altLang="en-US" sz="1800" b="1" i="0" u="none" strike="noStrike" cap="none">
+            <a:endParaRPr lang="en-US" altLang="en-US" sz="1900" b="0" i="0" u="none" strike="noStrike" cap="none">
+              <a:solidFill>
+                <a:schemeClr val="dk1"/>
+              </a:solidFill>
+              <a:latin typeface="Montserrat" panose="00000500000000000000" charset="0"/>
+              <a:ea typeface="Arial" panose="020B0604020202020204"/>
+              <a:cs typeface="Montserrat" panose="00000500000000000000" charset="0"/>
+              <a:sym typeface="Arial" panose="020B0604020202020204"/>
+            </a:endParaRPr>
+          </a:p>
+          <a:p>
+            <a:pPr marL="914400" marR="0" lvl="0" indent="0" algn="l" rtl="0">
+              <a:lnSpc>
+                <a:spcPct val="150000"/>
+              </a:lnSpc>
+              <a:spcBef>
+                <a:spcPts val="0"/>
+              </a:spcBef>
+              <a:spcAft>
+                <a:spcPts val="0"/>
+              </a:spcAft>
+              <a:buClr>
+                <a:srgbClr val="000000"/>
+              </a:buClr>
+              <a:buSzPts val="1900"/>
+              <a:buFont typeface="Arial" panose="020B0604020202020204" pitchFamily="34" charset="0"/>
+              <a:buNone/>
+            </a:pPr>
+            <a:r>
+              <a:rPr lang="en-US" altLang="en-US" sz="1900" b="1" i="0" u="none" strike="noStrike" cap="none">
+                <a:solidFill>
+                  <a:schemeClr val="dk1"/>
+                </a:solidFill>
+                <a:latin typeface="Montserrat" panose="00000500000000000000" charset="0"/>
+                <a:ea typeface="Arial" panose="020B0604020202020204"/>
+                <a:cs typeface="Montserrat" panose="00000500000000000000" charset="0"/>
+                <a:sym typeface="Arial" panose="020B0604020202020204"/>
+              </a:rPr>
+              <a:t>Minimizes</a:t>
+            </a:r>
+            <a:r>
+              <a:rPr lang="en-US" altLang="en-US" sz="1900" b="0" i="0" u="none" strike="noStrike" cap="none">
+                <a:solidFill>
+                  <a:schemeClr val="dk1"/>
+                </a:solidFill>
+                <a:latin typeface="Montserrat" panose="00000500000000000000" charset="0"/>
+                <a:ea typeface="Arial" panose="020B0604020202020204"/>
+                <a:cs typeface="Montserrat" panose="00000500000000000000" charset="0"/>
+                <a:sym typeface="Arial" panose="020B0604020202020204"/>
+              </a:rPr>
+              <a:t>:</a:t>
+            </a:r>
+            <a:endParaRPr lang="en-US" altLang="en-US" sz="1900" b="0" i="0" u="none" strike="noStrike" cap="none">
+              <a:solidFill>
+                <a:schemeClr val="dk1"/>
+              </a:solidFill>
+              <a:latin typeface="Montserrat" panose="00000500000000000000" charset="0"/>
+              <a:ea typeface="Arial" panose="020B0604020202020204"/>
+              <a:cs typeface="Montserrat" panose="00000500000000000000" charset="0"/>
+              <a:sym typeface="Arial" panose="020B0604020202020204"/>
+            </a:endParaRPr>
+          </a:p>
+          <a:p>
+            <a:pPr marL="1257300" marR="0" lvl="0" indent="-342900" algn="l" rtl="0">
+              <a:lnSpc>
+                <a:spcPct val="150000"/>
+              </a:lnSpc>
+              <a:spcBef>
+                <a:spcPts val="0"/>
+              </a:spcBef>
+              <a:spcAft>
+                <a:spcPts val="0"/>
+              </a:spcAft>
+              <a:buClr>
+                <a:srgbClr val="000000"/>
+              </a:buClr>
+              <a:buSzPts val="1900"/>
+              <a:buFont typeface="Arial" panose="020B0604020202020204" pitchFamily="34" charset="0"/>
+              <a:buChar char="•"/>
+            </a:pPr>
+            <a:r>
+              <a:rPr lang="en-US" altLang="en-US" sz="1900" b="0" i="0" u="none" strike="noStrike" cap="none">
+                <a:solidFill>
+                  <a:schemeClr val="dk1"/>
+                </a:solidFill>
+                <a:latin typeface="Montserrat" panose="00000500000000000000" charset="0"/>
+                <a:ea typeface="Arial" panose="020B0604020202020204"/>
+                <a:cs typeface="Montserrat" panose="00000500000000000000" charset="0"/>
+                <a:sym typeface="Arial" panose="020B0604020202020204"/>
+              </a:rPr>
+              <a:t>Fraud leakage (FN)</a:t>
+            </a:r>
+            <a:endParaRPr lang="en-US" altLang="en-US" sz="1900" b="0" i="0" u="none" strike="noStrike" cap="none">
+              <a:solidFill>
+                <a:schemeClr val="dk1"/>
+              </a:solidFill>
+              <a:latin typeface="Montserrat" panose="00000500000000000000" charset="0"/>
+              <a:ea typeface="Arial" panose="020B0604020202020204"/>
+              <a:cs typeface="Montserrat" panose="00000500000000000000" charset="0"/>
+              <a:sym typeface="Arial" panose="020B0604020202020204"/>
+            </a:endParaRPr>
+          </a:p>
+          <a:p>
+            <a:pPr marL="1257300" marR="0" lvl="0" indent="-342900" algn="l" rtl="0">
+              <a:lnSpc>
+                <a:spcPct val="150000"/>
+              </a:lnSpc>
+              <a:spcBef>
+                <a:spcPts val="0"/>
+              </a:spcBef>
+              <a:spcAft>
+                <a:spcPts val="0"/>
+              </a:spcAft>
+              <a:buClr>
+                <a:srgbClr val="000000"/>
+              </a:buClr>
+              <a:buSzPts val="1900"/>
+              <a:buFont typeface="Arial" panose="020B0604020202020204" pitchFamily="34" charset="0"/>
+              <a:buChar char="•"/>
+            </a:pPr>
+            <a:r>
+              <a:rPr lang="en-US" altLang="en-US" sz="1900" b="0" i="0" u="none" strike="noStrike" cap="none">
+                <a:solidFill>
+                  <a:schemeClr val="dk1"/>
+                </a:solidFill>
+                <a:latin typeface="Montserrat" panose="00000500000000000000" charset="0"/>
+                <a:ea typeface="Arial" panose="020B0604020202020204"/>
+                <a:cs typeface="Montserrat" panose="00000500000000000000" charset="0"/>
+                <a:sym typeface="Arial" panose="020B0604020202020204"/>
+              </a:rPr>
+              <a:t>Customer loss (FP)</a:t>
+            </a:r>
+            <a:endParaRPr lang="en-US" altLang="en-US" sz="1900" b="0" i="0" u="none" strike="noStrike" cap="none">
+              <a:solidFill>
+                <a:schemeClr val="dk1"/>
+              </a:solidFill>
+              <a:latin typeface="Montserrat" panose="00000500000000000000" charset="0"/>
+              <a:ea typeface="Arial" panose="020B0604020202020204"/>
+              <a:cs typeface="Montserrat" panose="00000500000000000000" charset="0"/>
+              <a:sym typeface="Arial" panose="020B0604020202020204"/>
+            </a:endParaRPr>
+          </a:p>
+          <a:p>
+            <a:pPr marL="914400" marR="0" lvl="0" indent="0" algn="l" rtl="0">
+              <a:lnSpc>
+                <a:spcPct val="150000"/>
+              </a:lnSpc>
+              <a:spcBef>
+                <a:spcPts val="0"/>
+              </a:spcBef>
+              <a:spcAft>
+                <a:spcPts val="0"/>
+              </a:spcAft>
+              <a:buClr>
+                <a:srgbClr val="000000"/>
+              </a:buClr>
+              <a:buSzPts val="1900"/>
+              <a:buFont typeface="Arial" panose="020B0604020202020204"/>
+              <a:buNone/>
+            </a:pPr>
+            <a:endParaRPr lang="zh-CN" altLang="en-US" sz="1900" b="0" i="0" u="none" strike="noStrike" cap="none">
+              <a:solidFill>
+                <a:schemeClr val="dk1"/>
+              </a:solidFill>
+              <a:latin typeface="Montserrat" panose="00000500000000000000" charset="0"/>
+              <a:ea typeface="Arial" panose="020B0604020202020204"/>
+              <a:cs typeface="Montserrat" panose="00000500000000000000" charset="0"/>
+              <a:sym typeface="Arial" panose="020B0604020202020204"/>
+            </a:endParaRPr>
+          </a:p>
+          <a:p>
+            <a:pPr marL="914400" marR="0" lvl="0" indent="0" algn="l" rtl="0">
+              <a:lnSpc>
+                <a:spcPct val="150000"/>
+              </a:lnSpc>
+              <a:spcBef>
+                <a:spcPts val="0"/>
+              </a:spcBef>
+              <a:spcAft>
+                <a:spcPts val="0"/>
+              </a:spcAft>
+              <a:buClr>
+                <a:srgbClr val="000000"/>
+              </a:buClr>
+              <a:buSzPts val="1900"/>
+              <a:buFont typeface="Arial" panose="020B0604020202020204"/>
+              <a:buNone/>
+            </a:pPr>
+            <a:r>
+              <a:rPr lang="en-US" altLang="en-US" sz="1900" b="1" i="0" u="none" strike="noStrike" cap="none">
+                <a:solidFill>
+                  <a:schemeClr val="dk1"/>
+                </a:solidFill>
+                <a:latin typeface="Montserrat" panose="00000500000000000000" charset="0"/>
+                <a:ea typeface="Arial" panose="020B0604020202020204"/>
+                <a:cs typeface="Montserrat" panose="00000500000000000000" charset="0"/>
+                <a:sym typeface="Arial" panose="020B0604020202020204"/>
+              </a:rPr>
+              <a:t>Direct business benefit:</a:t>
+            </a:r>
+            <a:endParaRPr lang="en-US" altLang="en-US" sz="1900" b="1" i="0" u="none" strike="noStrike" cap="none">
+              <a:solidFill>
+                <a:schemeClr val="dk1"/>
+              </a:solidFill>
+              <a:latin typeface="Montserrat" panose="00000500000000000000" charset="0"/>
+              <a:ea typeface="Arial" panose="020B0604020202020204"/>
+              <a:cs typeface="Montserrat" panose="00000500000000000000" charset="0"/>
+              <a:sym typeface="Arial" panose="020B0604020202020204"/>
+            </a:endParaRPr>
+          </a:p>
+          <a:p>
+            <a:pPr marL="1257300" marR="0" lvl="0" indent="-342900" algn="l" rtl="0">
+              <a:lnSpc>
+                <a:spcPct val="150000"/>
+              </a:lnSpc>
+              <a:spcBef>
+                <a:spcPts val="0"/>
+              </a:spcBef>
+              <a:spcAft>
+                <a:spcPts val="0"/>
+              </a:spcAft>
+              <a:buClr>
+                <a:srgbClr val="000000"/>
+              </a:buClr>
+              <a:buSzPts val="1900"/>
+              <a:buFont typeface="Arial" panose="020B0604020202020204" pitchFamily="34" charset="0"/>
+              <a:buChar char="•"/>
+            </a:pPr>
+            <a:r>
+              <a:rPr lang="en-US" altLang="en-US" sz="1900" b="0" i="0" u="none" strike="noStrike" cap="none">
+                <a:solidFill>
+                  <a:schemeClr val="dk1"/>
+                </a:solidFill>
+                <a:latin typeface="Montserrat" panose="00000500000000000000" charset="0"/>
+                <a:ea typeface="Arial" panose="020B0604020202020204"/>
+                <a:cs typeface="Montserrat" panose="00000500000000000000" charset="0"/>
+                <a:sym typeface="Arial" panose="020B0604020202020204"/>
+              </a:rPr>
+              <a:t>Reduced fraud loss</a:t>
+            </a:r>
+            <a:endParaRPr lang="en-US" altLang="en-US" sz="1900" b="0" i="0" u="none" strike="noStrike" cap="none">
+              <a:solidFill>
+                <a:schemeClr val="dk1"/>
+              </a:solidFill>
+              <a:latin typeface="Montserrat" panose="00000500000000000000" charset="0"/>
+              <a:ea typeface="Arial" panose="020B0604020202020204"/>
+              <a:cs typeface="Montserrat" panose="00000500000000000000" charset="0"/>
+              <a:sym typeface="Arial" panose="020B0604020202020204"/>
+            </a:endParaRPr>
+          </a:p>
+          <a:p>
+            <a:pPr marL="1257300" marR="0" lvl="0" indent="-342900" algn="l" rtl="0">
+              <a:lnSpc>
+                <a:spcPct val="150000"/>
+              </a:lnSpc>
+              <a:spcBef>
+                <a:spcPts val="0"/>
+              </a:spcBef>
+              <a:spcAft>
+                <a:spcPts val="0"/>
+              </a:spcAft>
+              <a:buClr>
+                <a:srgbClr val="000000"/>
+              </a:buClr>
+              <a:buSzPts val="1900"/>
+              <a:buFont typeface="Arial" panose="020B0604020202020204" pitchFamily="34" charset="0"/>
+              <a:buChar char="•"/>
+            </a:pPr>
+            <a:r>
+              <a:rPr lang="en-US" altLang="en-US" sz="1900" b="0" i="0" u="none" strike="noStrike" cap="none">
+                <a:solidFill>
+                  <a:schemeClr val="dk1"/>
+                </a:solidFill>
+                <a:latin typeface="Montserrat" panose="00000500000000000000" charset="0"/>
+                <a:ea typeface="Arial" panose="020B0604020202020204"/>
+                <a:cs typeface="Montserrat" panose="00000500000000000000" charset="0"/>
+                <a:sym typeface="Arial" panose="020B0604020202020204"/>
+              </a:rPr>
+              <a:t>Improved approval rate</a:t>
+            </a:r>
+            <a:endParaRPr lang="en-US" altLang="en-US" sz="1900" b="0" i="0" u="none" strike="noStrike" cap="none">
+              <a:solidFill>
+                <a:schemeClr val="dk1"/>
+              </a:solidFill>
+              <a:latin typeface="Montserrat" panose="00000500000000000000" charset="0"/>
+              <a:ea typeface="Arial" panose="020B0604020202020204"/>
+              <a:cs typeface="Montserrat" panose="00000500000000000000" charset="0"/>
+              <a:sym typeface="Arial" panose="020B0604020202020204"/>
+            </a:endParaRPr>
+          </a:p>
+          <a:p>
+            <a:pPr marL="1257300" marR="0" lvl="0" indent="-342900" algn="l" rtl="0">
+              <a:lnSpc>
+                <a:spcPct val="150000"/>
+              </a:lnSpc>
+              <a:spcBef>
+                <a:spcPts val="0"/>
+              </a:spcBef>
+              <a:spcAft>
+                <a:spcPts val="0"/>
+              </a:spcAft>
+              <a:buClr>
+                <a:srgbClr val="000000"/>
+              </a:buClr>
+              <a:buSzPts val="1900"/>
+              <a:buFont typeface="Arial" panose="020B0604020202020204" pitchFamily="34" charset="0"/>
+              <a:buChar char="•"/>
+            </a:pPr>
+            <a:r>
+              <a:rPr lang="en-US" altLang="en-US" sz="1900" b="0" i="0" u="none" strike="noStrike" cap="none">
+                <a:solidFill>
+                  <a:schemeClr val="dk1"/>
+                </a:solidFill>
+                <a:latin typeface="Montserrat" panose="00000500000000000000" charset="0"/>
+                <a:ea typeface="Arial" panose="020B0604020202020204"/>
+                <a:cs typeface="Montserrat" panose="00000500000000000000" charset="0"/>
+                <a:sym typeface="Arial" panose="020B0604020202020204"/>
+              </a:rPr>
+              <a:t>Increased revenue</a:t>
+            </a:r>
+            <a:endParaRPr sz="1900" b="0" i="0" u="none" strike="noStrike" cap="none">
               <a:solidFill>
                 <a:schemeClr val="dk1"/>
               </a:solidFill>
@@ -26122,8 +26654,8 @@
         </p:nvSpPr>
         <p:spPr>
           <a:xfrm>
-            <a:off x="373665" y="533324"/>
-            <a:ext cx="12423900" cy="785100"/>
+            <a:off x="373665" y="535349"/>
+            <a:ext cx="12423900" cy="781050"/>
           </a:xfrm>
           <a:prstGeom prst="rect">
             <a:avLst/>
@@ -26157,18 +26689,18 @@
               <a:buNone/>
             </a:pPr>
             <a:r>
-              <a:rPr lang="en-US" sz="3500" b="0" i="0" u="none" strike="noStrike" cap="none">
-                <a:solidFill>
-                  <a:schemeClr val="dk1"/>
+              <a:rPr lang="en-US" altLang="en-US" sz="3500" b="0" i="0" u="none" strike="noStrike" cap="none">
+                <a:solidFill>
+                  <a:srgbClr val="000000"/>
                 </a:solidFill>
                 <a:latin typeface="Arial" panose="020B0604020202020204"/>
                 <a:ea typeface="Arial" panose="020B0604020202020204"/>
                 <a:cs typeface="Arial" panose="020B0604020202020204"/>
                 <a:sym typeface="Arial" panose="020B0604020202020204"/>
               </a:rPr>
-              <a:t>Conclusion</a:t>
+              <a:t>Cost Optimization Curve</a:t>
             </a:r>
-            <a:endParaRPr sz="3500" b="0" i="0" u="none" strike="noStrike" cap="none">
+            <a:endParaRPr lang="en-US" altLang="en-US" sz="3500" b="0" i="0" u="none" strike="noStrike" cap="none">
               <a:solidFill>
                 <a:srgbClr val="000000"/>
               </a:solidFill>
@@ -26234,16 +26766,40 @@
           </a:p>
         </p:txBody>
       </p:sp>
+      <p:pic>
+        <p:nvPicPr>
+          <p:cNvPr id="2" name="Picture 1"/>
+          <p:cNvPicPr>
+            <a:picLocks noChangeAspect="1"/>
+          </p:cNvPicPr>
+          <p:nvPr/>
+        </p:nvPicPr>
+        <p:blipFill>
+          <a:blip r:embed="rId1"/>
+          <a:stretch>
+            <a:fillRect/>
+          </a:stretch>
+        </p:blipFill>
+        <p:spPr>
+          <a:xfrm>
+            <a:off x="623570" y="1316355"/>
+            <a:ext cx="5936615" cy="4913630"/>
+          </a:xfrm>
+          <a:prstGeom prst="rect">
+            <a:avLst/>
+          </a:prstGeom>
+        </p:spPr>
+      </p:pic>
       <p:sp>
         <p:nvSpPr>
-          <p:cNvPr id="226" name="Google Shape;226;p30"/>
+          <p:cNvPr id="208" name="Google Shape;208;p28"/>
           <p:cNvSpPr txBox="1"/>
           <p:nvPr/>
         </p:nvSpPr>
         <p:spPr>
           <a:xfrm>
-            <a:off x="551180" y="1557020"/>
-            <a:ext cx="10899140" cy="4676775"/>
+            <a:off x="6805295" y="1489710"/>
+            <a:ext cx="5027930" cy="1656715"/>
           </a:xfrm>
           <a:prstGeom prst="rect">
             <a:avLst/>
@@ -26259,44 +26815,11 @@
           </a:bodyPr>
           <a:lstStyle/>
           <a:p>
-            <a:pPr marL="914400" marR="0" lvl="0" indent="0" algn="l" rtl="0">
-              <a:lnSpc>
-                <a:spcPct val="150000"/>
-              </a:lnSpc>
-              <a:spcBef>
-                <a:spcPts val="0"/>
-              </a:spcBef>
-              <a:spcAft>
-                <a:spcPts val="0"/>
-              </a:spcAft>
-              <a:buClr>
-                <a:srgbClr val="000000"/>
-              </a:buClr>
-              <a:buSzPts val="1900"/>
-              <a:buFont typeface="Arial" panose="020B0604020202020204"/>
-              <a:buNone/>
-            </a:pPr>
-            <a:endParaRPr sz="1900" b="0" i="0" u="none" strike="noStrike" cap="none">
-              <a:solidFill>
-                <a:schemeClr val="dk1"/>
-              </a:solidFill>
-              <a:latin typeface="Arial" panose="020B0604020202020204"/>
-              <a:ea typeface="Arial" panose="020B0604020202020204"/>
-              <a:cs typeface="Arial" panose="020B0604020202020204"/>
-              <a:sym typeface="Arial" panose="020B0604020202020204"/>
-            </a:endParaRPr>
-          </a:p>
-          <a:p>
-            <a:pPr marL="285750" indent="-285750" algn="l">
-              <a:lnSpc>
-                <a:spcPct val="150000"/>
-              </a:lnSpc>
-              <a:spcAft>
-                <a:spcPts val="0"/>
-              </a:spcAft>
-              <a:buSzPts val="1900"/>
-              <a:buFont typeface="Arial" panose="020B0604020202020204" pitchFamily="34" charset="0"/>
-              <a:buChar char="•"/>
+            <a:pPr marL="0" indent="0">
+              <a:lnSpc>
+                <a:spcPct val="110000"/>
+              </a:lnSpc>
+              <a:buNone/>
             </a:pPr>
             <a:r>
               <a:rPr lang="en-US" altLang="en-US" sz="1800">
@@ -26307,30 +26830,10 @@
                 <a:cs typeface="Montserrat" panose="00000500000000000000" charset="0"/>
                 <a:sym typeface="+mn-ea"/>
               </a:rPr>
-              <a:t>Random Forest achieved the best results on Paytm data: 99.9% Accuracy, AUC-ROC of 0.970, Precision 87.4% and Recall 82.0%.</a:t>
+              <a:t>Cost curve shows optimal threshold minimizing financial loss by balancing false positives and false negatives in fraud detection system</a:t>
             </a:r>
-            <a:endParaRPr lang="en-US" altLang="en-US" sz="1800">
-              <a:solidFill>
-                <a:schemeClr val="dk1"/>
-              </a:solidFill>
-              <a:latin typeface="Montserrat" panose="00000500000000000000" charset="0"/>
-              <a:cs typeface="Montserrat" panose="00000500000000000000" charset="0"/>
-            </a:endParaRPr>
-          </a:p>
-          <a:p>
-            <a:pPr marL="285750" indent="-285750" algn="l">
-              <a:lnSpc>
-                <a:spcPct val="150000"/>
-              </a:lnSpc>
-              <a:spcAft>
-                <a:spcPts val="0"/>
-              </a:spcAft>
-              <a:buSzPts val="1900"/>
-              <a:buFont typeface="Arial" panose="020B0604020202020204" pitchFamily="34" charset="0"/>
-              <a:buChar char="•"/>
-            </a:pPr>
             <a:r>
-              <a:rPr lang="en-US" altLang="en-US" sz="1800">
+              <a:rPr lang="en-US" sz="1800">
                 <a:solidFill>
                   <a:schemeClr val="dk1"/>
                 </a:solidFill>
@@ -26338,66 +26841,9 @@
                 <a:cs typeface="Montserrat" panose="00000500000000000000" charset="0"/>
                 <a:sym typeface="+mn-ea"/>
               </a:rPr>
-              <a:t>99.9% Accuracy: Out of every 1,000 transactions, the model correctly classifies 999 as either safe or fraudulent.</a:t>
+              <a:t>ance.</a:t>
             </a:r>
-            <a:endParaRPr lang="en-US" altLang="en-US" sz="1800">
-              <a:solidFill>
-                <a:schemeClr val="dk1"/>
-              </a:solidFill>
-              <a:latin typeface="Montserrat" panose="00000500000000000000" charset="0"/>
-              <a:cs typeface="Montserrat" panose="00000500000000000000" charset="0"/>
-            </a:endParaRPr>
-          </a:p>
-          <a:p>
-            <a:pPr marL="285750" indent="-285750" algn="l">
-              <a:lnSpc>
-                <a:spcPct val="150000"/>
-              </a:lnSpc>
-              <a:spcAft>
-                <a:spcPts val="0"/>
-              </a:spcAft>
-              <a:buSzPts val="1900"/>
-              <a:buFont typeface="Arial" panose="020B0604020202020204" pitchFamily="34" charset="0"/>
-              <a:buChar char="•"/>
-            </a:pPr>
-            <a:r>
-              <a:rPr lang="en-US" altLang="en-US" sz="1800">
-                <a:solidFill>
-                  <a:schemeClr val="dk1"/>
-                </a:solidFill>
-                <a:latin typeface="Montserrat" panose="00000500000000000000" charset="0"/>
-                <a:cs typeface="Montserrat" panose="00000500000000000000" charset="0"/>
-                <a:sym typeface="+mn-ea"/>
-              </a:rPr>
-              <a:t>AUC-ROC of 0.970: This indicates outstanding model performance. The Area Under the Curve (AUC) measures how well the model separates the two classes (fraud vs. non-fraud). An AUC of 0.97 (out of 1.0) means it is highly unlikely the model will confuse a fraudulent transaction with a safe one.</a:t>
-            </a:r>
-            <a:endParaRPr lang="en-US" altLang="en-US" sz="1800">
-              <a:solidFill>
-                <a:schemeClr val="dk1"/>
-              </a:solidFill>
-              <a:latin typeface="Montserrat" panose="00000500000000000000" charset="0"/>
-              <a:cs typeface="Montserrat" panose="00000500000000000000" charset="0"/>
-            </a:endParaRPr>
-          </a:p>
-          <a:p>
-            <a:pPr marL="285750" marR="0" lvl="0" indent="-285750" algn="l" rtl="0">
-              <a:lnSpc>
-                <a:spcPct val="150000"/>
-              </a:lnSpc>
-              <a:spcBef>
-                <a:spcPts val="0"/>
-              </a:spcBef>
-              <a:spcAft>
-                <a:spcPts val="0"/>
-              </a:spcAft>
-              <a:buClr>
-                <a:srgbClr val="000000"/>
-              </a:buClr>
-              <a:buSzPts val="1900"/>
-              <a:buFont typeface="Arial" panose="020B0604020202020204" pitchFamily="34" charset="0"/>
-              <a:buChar char="•"/>
-            </a:pPr>
-            <a:endParaRPr lang="en-US" altLang="en-US" sz="1800" b="0" i="0" u="none" strike="noStrike" cap="none">
+            <a:endParaRPr lang="en-US" sz="1800" b="0" i="0" u="none" strike="noStrike" cap="none">
               <a:solidFill>
                 <a:schemeClr val="dk1"/>
               </a:solidFill>
@@ -26407,31 +26853,58 @@
               <a:sym typeface="Arial" panose="020B0604020202020204"/>
             </a:endParaRPr>
           </a:p>
-          <a:p>
-            <a:pPr marL="342900" marR="0" lvl="0" indent="-342900" algn="l" rtl="0">
-              <a:lnSpc>
-                <a:spcPct val="150000"/>
-              </a:lnSpc>
-              <a:spcBef>
-                <a:spcPts val="0"/>
-              </a:spcBef>
-              <a:spcAft>
-                <a:spcPts val="0"/>
-              </a:spcAft>
-              <a:buClr>
-                <a:srgbClr val="000000"/>
-              </a:buClr>
-              <a:buSzPts val="1900"/>
-              <a:buFont typeface="Arial" panose="020B0604020202020204" pitchFamily="34" charset="0"/>
-              <a:buChar char="•"/>
+        </p:txBody>
+      </p:sp>
+      <p:sp>
+        <p:nvSpPr>
+          <p:cNvPr id="1" name="Google Shape;208;p28"/>
+          <p:cNvSpPr txBox="1"/>
+          <p:nvPr/>
+        </p:nvSpPr>
+        <p:spPr>
+          <a:xfrm>
+            <a:off x="6804660" y="3429000"/>
+            <a:ext cx="5016500" cy="1647825"/>
+          </a:xfrm>
+          <a:prstGeom prst="rect">
+            <a:avLst/>
+          </a:prstGeom>
+          <a:noFill/>
+          <a:ln>
+            <a:noFill/>
+          </a:ln>
+        </p:spPr>
+        <p:txBody>
+          <a:bodyPr spcFirstLastPara="1" wrap="square" lIns="91425" tIns="91425" rIns="91425" bIns="91425" anchor="t" anchorCtr="0">
+            <a:noAutofit/>
+          </a:bodyPr>
+          <a:lstStyle/>
+          <a:p>
+            <a:pPr marL="0" indent="0">
+              <a:lnSpc>
+                <a:spcPct val="110000"/>
+              </a:lnSpc>
+              <a:buNone/>
             </a:pPr>
-            <a:endParaRPr sz="1900" b="0" i="0" u="none" strike="noStrike" cap="none">
+            <a:r>
+              <a:rPr lang="en-US" altLang="en-US" sz="1800" b="1" i="0" u="none" strike="noStrike" cap="none">
+                <a:solidFill>
+                  <a:schemeClr val="dk1"/>
+                </a:solidFill>
+                <a:latin typeface="Montserrat" panose="00000500000000000000" charset="0"/>
+                <a:ea typeface="Arial" panose="020B0604020202020204"/>
+                <a:cs typeface="Montserrat" panose="00000500000000000000" charset="0"/>
+                <a:sym typeface="Arial" panose="020B0604020202020204"/>
+              </a:rPr>
+              <a:t>We optimized threshold based on cost instead of accuracy, reducing total fraud-related financial loss and improving business profitability.</a:t>
+            </a:r>
+            <a:endParaRPr lang="en-US" altLang="en-US" sz="1800" b="1" i="0" u="none" strike="noStrike" cap="none">
               <a:solidFill>
                 <a:schemeClr val="dk1"/>
               </a:solidFill>
-              <a:latin typeface="Arial" panose="020B0604020202020204"/>
+              <a:latin typeface="Montserrat" panose="00000500000000000000" charset="0"/>
               <a:ea typeface="Arial" panose="020B0604020202020204"/>
-              <a:cs typeface="Arial" panose="020B0604020202020204"/>
+              <a:cs typeface="Montserrat" panose="00000500000000000000" charset="0"/>
               <a:sym typeface="Arial" panose="020B0604020202020204"/>
             </a:endParaRPr>
           </a:p>
@@ -26521,6 +26994,405 @@
         </p:nvSpPr>
         <p:spPr>
           <a:xfrm>
+            <a:off x="373665" y="533324"/>
+            <a:ext cx="12423900" cy="785100"/>
+          </a:xfrm>
+          <a:prstGeom prst="rect">
+            <a:avLst/>
+          </a:prstGeom>
+          <a:noFill/>
+          <a:ln>
+            <a:noFill/>
+          </a:ln>
+        </p:spPr>
+        <p:txBody>
+          <a:bodyPr spcFirstLastPara="1" wrap="square" lIns="121900" tIns="121900" rIns="121900" bIns="121900" anchor="ctr" anchorCtr="0">
+            <a:spAutoFit/>
+          </a:bodyPr>
+          <a:lstStyle/>
+          <a:p>
+            <a:pPr marL="0" marR="0" lvl="0" indent="0" algn="l" rtl="0">
+              <a:lnSpc>
+                <a:spcPct val="100000"/>
+              </a:lnSpc>
+              <a:spcBef>
+                <a:spcPts val="0"/>
+              </a:spcBef>
+              <a:spcAft>
+                <a:spcPts val="0"/>
+              </a:spcAft>
+              <a:buClr>
+                <a:srgbClr val="000000"/>
+              </a:buClr>
+              <a:buSzPts val="3500"/>
+              <a:buFont typeface="Arial" panose="020B0604020202020204"/>
+              <a:buNone/>
+            </a:pPr>
+            <a:r>
+              <a:rPr lang="en-US" sz="3500" b="0" i="0" u="none" strike="noStrike" cap="none">
+                <a:solidFill>
+                  <a:schemeClr val="dk1"/>
+                </a:solidFill>
+                <a:latin typeface="Arial" panose="020B0604020202020204"/>
+                <a:ea typeface="Arial" panose="020B0604020202020204"/>
+                <a:cs typeface="Arial" panose="020B0604020202020204"/>
+                <a:sym typeface="Arial" panose="020B0604020202020204"/>
+              </a:rPr>
+              <a:t>Conclusion</a:t>
+            </a:r>
+            <a:endParaRPr sz="3500" b="0" i="0" u="none" strike="noStrike" cap="none">
+              <a:solidFill>
+                <a:srgbClr val="000000"/>
+              </a:solidFill>
+              <a:latin typeface="Arial" panose="020B0604020202020204"/>
+              <a:ea typeface="Arial" panose="020B0604020202020204"/>
+              <a:cs typeface="Arial" panose="020B0604020202020204"/>
+              <a:sym typeface="Arial" panose="020B0604020202020204"/>
+            </a:endParaRPr>
+          </a:p>
+        </p:txBody>
+      </p:sp>
+      <p:sp>
+        <p:nvSpPr>
+          <p:cNvPr id="225" name="Google Shape;225;p30"/>
+          <p:cNvSpPr txBox="1"/>
+          <p:nvPr/>
+        </p:nvSpPr>
+        <p:spPr>
+          <a:xfrm>
+            <a:off x="712032" y="1490008"/>
+            <a:ext cx="6400800" cy="369300"/>
+          </a:xfrm>
+          <a:prstGeom prst="rect">
+            <a:avLst/>
+          </a:prstGeom>
+          <a:noFill/>
+          <a:ln>
+            <a:noFill/>
+          </a:ln>
+        </p:spPr>
+        <p:txBody>
+          <a:bodyPr spcFirstLastPara="1" wrap="square" lIns="91425" tIns="45700" rIns="91425" bIns="45700" anchor="t" anchorCtr="0">
+            <a:spAutoFit/>
+          </a:bodyPr>
+          <a:lstStyle/>
+          <a:p>
+            <a:pPr marL="0" marR="0" lvl="0" indent="0" algn="l" rtl="0">
+              <a:lnSpc>
+                <a:spcPct val="100000"/>
+              </a:lnSpc>
+              <a:spcBef>
+                <a:spcPts val="0"/>
+              </a:spcBef>
+              <a:spcAft>
+                <a:spcPts val="0"/>
+              </a:spcAft>
+              <a:buClr>
+                <a:srgbClr val="000000"/>
+              </a:buClr>
+              <a:buSzPts val="1800"/>
+              <a:buFont typeface="Arial" panose="020B0604020202020204"/>
+              <a:buNone/>
+            </a:pPr>
+            <a:endParaRPr sz="1800" b="0" i="0" u="none" strike="noStrike" cap="none">
+              <a:solidFill>
+                <a:schemeClr val="dk1"/>
+              </a:solidFill>
+              <a:latin typeface="Montserrat" panose="00000500000000000000"/>
+              <a:ea typeface="Montserrat" panose="00000500000000000000"/>
+              <a:cs typeface="Montserrat" panose="00000500000000000000"/>
+              <a:sym typeface="Montserrat" panose="00000500000000000000"/>
+            </a:endParaRPr>
+          </a:p>
+        </p:txBody>
+      </p:sp>
+      <p:sp>
+        <p:nvSpPr>
+          <p:cNvPr id="226" name="Google Shape;226;p30"/>
+          <p:cNvSpPr txBox="1"/>
+          <p:nvPr/>
+        </p:nvSpPr>
+        <p:spPr>
+          <a:xfrm>
+            <a:off x="551180" y="1557020"/>
+            <a:ext cx="10899140" cy="4676775"/>
+          </a:xfrm>
+          <a:prstGeom prst="rect">
+            <a:avLst/>
+          </a:prstGeom>
+          <a:noFill/>
+          <a:ln>
+            <a:noFill/>
+          </a:ln>
+        </p:spPr>
+        <p:txBody>
+          <a:bodyPr spcFirstLastPara="1" wrap="square" lIns="91425" tIns="91425" rIns="91425" bIns="91425" anchor="t" anchorCtr="0">
+            <a:noAutofit/>
+          </a:bodyPr>
+          <a:lstStyle/>
+          <a:p>
+            <a:pPr marL="914400" marR="0" lvl="0" indent="0" algn="l" rtl="0">
+              <a:lnSpc>
+                <a:spcPct val="150000"/>
+              </a:lnSpc>
+              <a:spcBef>
+                <a:spcPts val="0"/>
+              </a:spcBef>
+              <a:spcAft>
+                <a:spcPts val="0"/>
+              </a:spcAft>
+              <a:buClr>
+                <a:srgbClr val="000000"/>
+              </a:buClr>
+              <a:buSzPts val="1900"/>
+              <a:buFont typeface="Arial" panose="020B0604020202020204"/>
+              <a:buNone/>
+            </a:pPr>
+            <a:endParaRPr sz="1900" b="0" i="0" u="none" strike="noStrike" cap="none">
+              <a:solidFill>
+                <a:schemeClr val="dk1"/>
+              </a:solidFill>
+              <a:latin typeface="Arial" panose="020B0604020202020204"/>
+              <a:ea typeface="Arial" panose="020B0604020202020204"/>
+              <a:cs typeface="Arial" panose="020B0604020202020204"/>
+              <a:sym typeface="Arial" panose="020B0604020202020204"/>
+            </a:endParaRPr>
+          </a:p>
+          <a:p>
+            <a:pPr marL="285750" indent="-285750" algn="l">
+              <a:lnSpc>
+                <a:spcPct val="150000"/>
+              </a:lnSpc>
+              <a:spcAft>
+                <a:spcPts val="0"/>
+              </a:spcAft>
+              <a:buSzPts val="1900"/>
+              <a:buFont typeface="Arial" panose="020B0604020202020204" pitchFamily="34" charset="0"/>
+              <a:buChar char="•"/>
+            </a:pPr>
+            <a:r>
+              <a:rPr lang="en-US" altLang="en-US" sz="1800">
+                <a:solidFill>
+                  <a:schemeClr val="dk1"/>
+                </a:solidFill>
+                <a:latin typeface="Montserrat" panose="00000500000000000000" charset="0"/>
+                <a:cs typeface="Montserrat" panose="00000500000000000000" charset="0"/>
+                <a:sym typeface="+mn-ea"/>
+              </a:rPr>
+              <a:t>Random Forest achieved the best results on Paytm data: 99.9% Accuracy, AUC-ROC of 0.970, Precision 87.4% and Recall 82.0%.</a:t>
+            </a:r>
+            <a:endParaRPr lang="en-US" altLang="en-US" sz="1800">
+              <a:solidFill>
+                <a:schemeClr val="dk1"/>
+              </a:solidFill>
+              <a:latin typeface="Montserrat" panose="00000500000000000000" charset="0"/>
+              <a:cs typeface="Montserrat" panose="00000500000000000000" charset="0"/>
+            </a:endParaRPr>
+          </a:p>
+          <a:p>
+            <a:pPr marL="285750" indent="-285750" algn="l">
+              <a:lnSpc>
+                <a:spcPct val="150000"/>
+              </a:lnSpc>
+              <a:spcAft>
+                <a:spcPts val="0"/>
+              </a:spcAft>
+              <a:buSzPts val="1900"/>
+              <a:buFont typeface="Arial" panose="020B0604020202020204" pitchFamily="34" charset="0"/>
+              <a:buChar char="•"/>
+            </a:pPr>
+            <a:r>
+              <a:rPr lang="en-US" altLang="en-US" sz="1800">
+                <a:solidFill>
+                  <a:schemeClr val="dk1"/>
+                </a:solidFill>
+                <a:latin typeface="Montserrat" panose="00000500000000000000" charset="0"/>
+                <a:cs typeface="Montserrat" panose="00000500000000000000" charset="0"/>
+                <a:sym typeface="+mn-ea"/>
+              </a:rPr>
+              <a:t>99.9% Accuracy: Out of every 1,000 transactions, the model correctly classifies 999 as either safe or fraudulent.</a:t>
+            </a:r>
+            <a:endParaRPr lang="en-US" altLang="en-US" sz="1800">
+              <a:solidFill>
+                <a:schemeClr val="dk1"/>
+              </a:solidFill>
+              <a:latin typeface="Montserrat" panose="00000500000000000000" charset="0"/>
+              <a:cs typeface="Montserrat" panose="00000500000000000000" charset="0"/>
+            </a:endParaRPr>
+          </a:p>
+          <a:p>
+            <a:pPr marL="285750" indent="-285750" algn="l">
+              <a:lnSpc>
+                <a:spcPct val="150000"/>
+              </a:lnSpc>
+              <a:spcAft>
+                <a:spcPts val="0"/>
+              </a:spcAft>
+              <a:buSzPts val="1900"/>
+              <a:buFont typeface="Arial" panose="020B0604020202020204" pitchFamily="34" charset="0"/>
+              <a:buChar char="•"/>
+            </a:pPr>
+            <a:r>
+              <a:rPr lang="en-US" altLang="en-US" sz="1800">
+                <a:solidFill>
+                  <a:schemeClr val="dk1"/>
+                </a:solidFill>
+                <a:latin typeface="Montserrat" panose="00000500000000000000" charset="0"/>
+                <a:cs typeface="Montserrat" panose="00000500000000000000" charset="0"/>
+                <a:sym typeface="+mn-ea"/>
+              </a:rPr>
+              <a:t>AUC-ROC of 0.970: This indicates outstanding model performance. The Area Under the Curve (AUC) measures how well the model separates the two classes (fraud vs. non-fraud). An AUC of 0.97 (out of 1.0) means it is highly unlikely the model will confuse a fraudulent transaction with a safe one.</a:t>
+            </a:r>
+            <a:endParaRPr lang="en-US" altLang="en-US" sz="1800">
+              <a:solidFill>
+                <a:schemeClr val="dk1"/>
+              </a:solidFill>
+              <a:latin typeface="Montserrat" panose="00000500000000000000" charset="0"/>
+              <a:cs typeface="Montserrat" panose="00000500000000000000" charset="0"/>
+            </a:endParaRPr>
+          </a:p>
+          <a:p>
+            <a:pPr marL="285750" marR="0" lvl="0" indent="-285750" algn="l" rtl="0">
+              <a:lnSpc>
+                <a:spcPct val="150000"/>
+              </a:lnSpc>
+              <a:spcBef>
+                <a:spcPts val="0"/>
+              </a:spcBef>
+              <a:spcAft>
+                <a:spcPts val="0"/>
+              </a:spcAft>
+              <a:buClr>
+                <a:srgbClr val="000000"/>
+              </a:buClr>
+              <a:buSzPts val="1900"/>
+              <a:buFont typeface="Arial" panose="020B0604020202020204" pitchFamily="34" charset="0"/>
+              <a:buChar char="•"/>
+            </a:pPr>
+            <a:endParaRPr lang="en-US" altLang="en-US" sz="1800" b="0" i="0" u="none" strike="noStrike" cap="none">
+              <a:solidFill>
+                <a:schemeClr val="dk1"/>
+              </a:solidFill>
+              <a:latin typeface="Montserrat" panose="00000500000000000000" charset="0"/>
+              <a:ea typeface="Arial" panose="020B0604020202020204"/>
+              <a:cs typeface="Montserrat" panose="00000500000000000000" charset="0"/>
+              <a:sym typeface="Arial" panose="020B0604020202020204"/>
+            </a:endParaRPr>
+          </a:p>
+          <a:p>
+            <a:pPr marL="342900" marR="0" lvl="0" indent="-342900" algn="l" rtl="0">
+              <a:lnSpc>
+                <a:spcPct val="150000"/>
+              </a:lnSpc>
+              <a:spcBef>
+                <a:spcPts val="0"/>
+              </a:spcBef>
+              <a:spcAft>
+                <a:spcPts val="0"/>
+              </a:spcAft>
+              <a:buClr>
+                <a:srgbClr val="000000"/>
+              </a:buClr>
+              <a:buSzPts val="1900"/>
+              <a:buFont typeface="Arial" panose="020B0604020202020204" pitchFamily="34" charset="0"/>
+              <a:buChar char="•"/>
+            </a:pPr>
+            <a:endParaRPr sz="1900" b="0" i="0" u="none" strike="noStrike" cap="none">
+              <a:solidFill>
+                <a:schemeClr val="dk1"/>
+              </a:solidFill>
+              <a:latin typeface="Arial" panose="020B0604020202020204"/>
+              <a:ea typeface="Arial" panose="020B0604020202020204"/>
+              <a:cs typeface="Arial" panose="020B0604020202020204"/>
+              <a:sym typeface="Arial" panose="020B0604020202020204"/>
+            </a:endParaRPr>
+          </a:p>
+        </p:txBody>
+      </p:sp>
+    </p:spTree>
+  </p:cSld>
+  <p:clrMapOvr>
+    <a:masterClrMapping/>
+  </p:clrMapOvr>
+</p:sld>
+</file>
+
+<file path=ppt/slides/slide24.xml><?xml version="1.0" encoding="utf-8"?>
+<p:sld xmlns:a="http://schemas.openxmlformats.org/drawingml/2006/main" xmlns:r="http://schemas.openxmlformats.org/officeDocument/2006/relationships" xmlns:p="http://schemas.openxmlformats.org/presentationml/2006/main">
+  <p:cSld>
+    <p:spTree>
+      <p:nvGrpSpPr>
+        <p:cNvPr id="222" name="Shape 222"/>
+        <p:cNvGrpSpPr/>
+        <p:nvPr/>
+      </p:nvGrpSpPr>
+      <p:grpSpPr>
+        <a:xfrm>
+          <a:off x="0" y="0"/>
+          <a:ext cx="0" cy="0"/>
+          <a:chOff x="0" y="0"/>
+          <a:chExt cx="0" cy="0"/>
+        </a:xfrm>
+      </p:grpSpPr>
+      <p:sp>
+        <p:nvSpPr>
+          <p:cNvPr id="223" name="Google Shape;223;p30"/>
+          <p:cNvSpPr txBox="1"/>
+          <p:nvPr>
+            <p:ph type="sldNum" idx="12"/>
+          </p:nvPr>
+        </p:nvSpPr>
+        <p:spPr>
+          <a:xfrm>
+            <a:off x="11296611" y="6014423"/>
+            <a:ext cx="731600" cy="524800"/>
+          </a:xfrm>
+          <a:prstGeom prst="rect">
+            <a:avLst/>
+          </a:prstGeom>
+          <a:noFill/>
+          <a:ln>
+            <a:noFill/>
+          </a:ln>
+        </p:spPr>
+        <p:txBody>
+          <a:bodyPr spcFirstLastPara="1" wrap="square" lIns="91425" tIns="91425" rIns="91425" bIns="91425" anchor="ctr" anchorCtr="0">
+            <a:noAutofit/>
+          </a:bodyPr>
+          <a:lstStyle/>
+          <a:p>
+            <a:pPr marL="0" marR="0" lvl="0" indent="0" algn="l" rtl="0">
+              <a:lnSpc>
+                <a:spcPct val="100000"/>
+              </a:lnSpc>
+              <a:spcBef>
+                <a:spcPts val="0"/>
+              </a:spcBef>
+              <a:spcAft>
+                <a:spcPts val="0"/>
+              </a:spcAft>
+              <a:buClr>
+                <a:srgbClr val="000000"/>
+              </a:buClr>
+              <a:buSzPts val="1400"/>
+              <a:buFont typeface="Arial" panose="020B0604020202020204"/>
+              <a:buNone/>
+            </a:pPr>
+            <a:fld id="{00000000-1234-1234-1234-123412341234}" type="slidenum">
+              <a:rPr lang="en-US"/>
+            </a:fld>
+            <a:endParaRPr lang="en-US"/>
+          </a:p>
+        </p:txBody>
+      </p:sp>
+      <p:sp>
+        <p:nvSpPr>
+          <p:cNvPr id="224" name="Google Shape;224;p30"/>
+          <p:cNvSpPr txBox="1"/>
+          <p:nvPr/>
+        </p:nvSpPr>
+        <p:spPr>
+          <a:xfrm>
             <a:off x="373665" y="535349"/>
             <a:ext cx="12423900" cy="781050"/>
           </a:xfrm>
@@ -27497,7 +28369,7 @@
 </p:sld>
 </file>
 
-<file path=ppt/slides/slide24.xml><?xml version="1.0" encoding="utf-8"?>
+<file path=ppt/slides/slide25.xml><?xml version="1.0" encoding="utf-8"?>
 <p:sld xmlns:a="http://schemas.openxmlformats.org/drawingml/2006/main" xmlns:r="http://schemas.openxmlformats.org/officeDocument/2006/relationships" xmlns:p="http://schemas.openxmlformats.org/presentationml/2006/main">
   <p:cSld>
     <p:spTree>
@@ -35497,13 +36369,13 @@
 
 <file path=ppt/tags/tag10.xml><?xml version="1.0" encoding="utf-8"?>
 <p:tagLst xmlns:p="http://schemas.openxmlformats.org/presentationml/2006/main">
-  <p:tag name="KSO_WM_DIAGRAM_VIRTUALLY_FRAME" val="{&quot;height&quot;:252,&quot;left&quot;:381.6,&quot;top&quot;:115.2,&quot;width&quot;:316.8}"/>
+  <p:tag name="KSO_WM_DIAGRAM_VIRTUALLY_FRAME" val="{&quot;height&quot;:234.84,&quot;left&quot;:14.4,&quot;top&quot;:300.96,&quot;width&quot;:856.8}"/>
 </p:tagLst>
 </file>
 
 <file path=ppt/tags/tag11.xml><?xml version="1.0" encoding="utf-8"?>
 <p:tagLst xmlns:p="http://schemas.openxmlformats.org/presentationml/2006/main">
-  <p:tag name="KSO_WM_DIAGRAM_VIRTUALLY_FRAME" val="{&quot;height&quot;:252,&quot;left&quot;:381.6,&quot;top&quot;:115.2,&quot;width&quot;:316.8}"/>
+  <p:tag name="KSO_WM_DIAGRAM_VIRTUALLY_FRAME" val="{&quot;height&quot;:234.84,&quot;left&quot;:14.4,&quot;top&quot;:300.96,&quot;width&quot;:856.8}"/>
 </p:tagLst>
 </file>
 
@@ -35575,20 +36447,20 @@
 
 <file path=ppt/tags/tag22.xml><?xml version="1.0" encoding="utf-8"?>
 <p:tagLst xmlns:p="http://schemas.openxmlformats.org/presentationml/2006/main">
-  <p:tag name="TABLE_ENDDRAG_ORIGIN_RECT" val="803*268"/>
-  <p:tag name="TABLE_ENDDRAG_RECT" val="67*121*803*268"/>
+  <p:tag name="KSO_WM_DIAGRAM_VIRTUALLY_FRAME" val="{&quot;height&quot;:252,&quot;left&quot;:381.6,&quot;top&quot;:115.2,&quot;width&quot;:316.8}"/>
 </p:tagLst>
 </file>
 
 <file path=ppt/tags/tag23.xml><?xml version="1.0" encoding="utf-8"?>
 <p:tagLst xmlns:p="http://schemas.openxmlformats.org/presentationml/2006/main">
-  <p:tag name="KSO_WM_DIAGRAM_VIRTUALLY_FRAME" val="{&quot;height&quot;:301.68,&quot;left&quot;:432,&quot;top&quot;:82.8,&quot;width&quot;:270}"/>
+  <p:tag name="KSO_WM_DIAGRAM_VIRTUALLY_FRAME" val="{&quot;height&quot;:252,&quot;left&quot;:381.6,&quot;top&quot;:115.2,&quot;width&quot;:316.8}"/>
 </p:tagLst>
 </file>
 
 <file path=ppt/tags/tag24.xml><?xml version="1.0" encoding="utf-8"?>
 <p:tagLst xmlns:p="http://schemas.openxmlformats.org/presentationml/2006/main">
-  <p:tag name="KSO_WM_DIAGRAM_VIRTUALLY_FRAME" val="{&quot;height&quot;:301.68,&quot;left&quot;:432,&quot;top&quot;:82.8,&quot;width&quot;:270}"/>
+  <p:tag name="TABLE_ENDDRAG_ORIGIN_RECT" val="803*268"/>
+  <p:tag name="TABLE_ENDDRAG_RECT" val="67*121*803*268"/>
 </p:tagLst>
 </file>
 
@@ -35653,6 +36525,18 @@
 </file>
 
 <file path=ppt/tags/tag34.xml><?xml version="1.0" encoding="utf-8"?>
+<p:tagLst xmlns:p="http://schemas.openxmlformats.org/presentationml/2006/main">
+  <p:tag name="KSO_WM_DIAGRAM_VIRTUALLY_FRAME" val="{&quot;height&quot;:301.68,&quot;left&quot;:432,&quot;top&quot;:82.8,&quot;width&quot;:270}"/>
+</p:tagLst>
+</file>
+
+<file path=ppt/tags/tag35.xml><?xml version="1.0" encoding="utf-8"?>
+<p:tagLst xmlns:p="http://schemas.openxmlformats.org/presentationml/2006/main">
+  <p:tag name="KSO_WM_DIAGRAM_VIRTUALLY_FRAME" val="{&quot;height&quot;:301.68,&quot;left&quot;:432,&quot;top&quot;:82.8,&quot;width&quot;:270}"/>
+</p:tagLst>
+</file>
+
+<file path=ppt/tags/tag36.xml><?xml version="1.0" encoding="utf-8"?>
 <p:tagLst xmlns:p="http://schemas.openxmlformats.org/presentationml/2006/main">
   <p:tag name="KSO_WM_DIAGRAM_VIRTUALLY_FRAME" val="{&quot;height&quot;:301.68,&quot;left&quot;:432,&quot;top&quot;:82.8,&quot;width&quot;:270}"/>
 </p:tagLst>

--- a/ShraddhaTiwari - Final Presentation.pptx
+++ b/ShraddhaTiwari - Final Presentation.pptx
@@ -20329,7 +20329,7 @@
       </p:sp>
       <p:pic>
         <p:nvPicPr>
-          <p:cNvPr id="1" name="Picture 0"/>
+          <p:cNvPr id="3" name="Picture 2"/>
           <p:cNvPicPr>
             <a:picLocks noChangeAspect="1"/>
           </p:cNvPicPr>
@@ -22528,28 +22528,6 @@
           </a:p>
         </p:txBody>
       </p:sp>
-      <p:pic>
-        <p:nvPicPr>
-          <p:cNvPr id="3" name="Picture 2"/>
-          <p:cNvPicPr/>
-          <p:nvPr/>
-        </p:nvPicPr>
-        <p:blipFill>
-          <a:blip r:embed="rId1"/>
-          <a:stretch>
-            <a:fillRect/>
-          </a:stretch>
-        </p:blipFill>
-        <p:spPr>
-          <a:xfrm>
-            <a:off x="1127887" y="1374902"/>
-            <a:ext cx="4791456" cy="3968496"/>
-          </a:xfrm>
-          <a:prstGeom prst="rect">
-            <a:avLst/>
-          </a:prstGeom>
-        </p:spPr>
-      </p:pic>
       <p:sp>
         <p:nvSpPr>
           <p:cNvPr id="8" name="Text 5"/>
@@ -22597,7 +22575,7 @@
           <p:cNvSpPr/>
           <p:nvPr>
             <p:custDataLst>
-              <p:tags r:id="rId2"/>
+              <p:tags r:id="rId1"/>
             </p:custDataLst>
           </p:nvPr>
         </p:nvSpPr>
@@ -22626,7 +22604,7 @@
           <p:cNvSpPr/>
           <p:nvPr>
             <p:custDataLst>
-              <p:tags r:id="rId3"/>
+              <p:tags r:id="rId2"/>
             </p:custDataLst>
           </p:nvPr>
         </p:nvSpPr>
@@ -22671,7 +22649,7 @@
           <p:cNvSpPr/>
           <p:nvPr>
             <p:custDataLst>
-              <p:tags r:id="rId4"/>
+              <p:tags r:id="rId3"/>
             </p:custDataLst>
           </p:nvPr>
         </p:nvSpPr>
@@ -22712,7 +22690,7 @@
                 <a:ea typeface="Calibri" panose="020F0502020204030204" pitchFamily="34" charset="-122"/>
                 <a:cs typeface="Montserrat" panose="00000500000000000000" charset="0"/>
               </a:rPr>
-              <a:t>1e+04</a:t>
+              <a:t>15231</a:t>
             </a:r>
             <a:endParaRPr lang="en-US" sz="1200" b="1" dirty="0">
               <a:solidFill>
@@ -22731,7 +22709,7 @@
           <p:cNvSpPr/>
           <p:nvPr>
             <p:custDataLst>
-              <p:tags r:id="rId5"/>
+              <p:tags r:id="rId4"/>
             </p:custDataLst>
           </p:nvPr>
         </p:nvSpPr>
@@ -22760,7 +22738,7 @@
           <p:cNvSpPr/>
           <p:nvPr>
             <p:custDataLst>
-              <p:tags r:id="rId6"/>
+              <p:tags r:id="rId5"/>
             </p:custDataLst>
           </p:nvPr>
         </p:nvSpPr>
@@ -22805,7 +22783,7 @@
           <p:cNvSpPr/>
           <p:nvPr>
             <p:custDataLst>
-              <p:tags r:id="rId7"/>
+              <p:tags r:id="rId6"/>
             </p:custDataLst>
           </p:nvPr>
         </p:nvSpPr>
@@ -22846,7 +22824,7 @@
                 <a:ea typeface="Calibri" panose="020F0502020204030204" pitchFamily="34" charset="-122"/>
                 <a:cs typeface="Montserrat" panose="00000500000000000000" charset="0"/>
               </a:rPr>
-              <a:t>205</a:t>
+              <a:t>220</a:t>
             </a:r>
             <a:endParaRPr lang="en-US" sz="1200" b="1" dirty="0">
               <a:solidFill>
@@ -22865,7 +22843,7 @@
           <p:cNvSpPr/>
           <p:nvPr>
             <p:custDataLst>
-              <p:tags r:id="rId8"/>
+              <p:tags r:id="rId7"/>
             </p:custDataLst>
           </p:nvPr>
         </p:nvSpPr>
@@ -22894,7 +22872,7 @@
           <p:cNvSpPr/>
           <p:nvPr>
             <p:custDataLst>
-              <p:tags r:id="rId9"/>
+              <p:tags r:id="rId8"/>
             </p:custDataLst>
           </p:nvPr>
         </p:nvSpPr>
@@ -22939,7 +22917,7 @@
           <p:cNvSpPr/>
           <p:nvPr>
             <p:custDataLst>
-              <p:tags r:id="rId10"/>
+              <p:tags r:id="rId9"/>
             </p:custDataLst>
           </p:nvPr>
         </p:nvSpPr>
@@ -22969,7 +22947,7 @@
                 <a:ea typeface="Calibri" panose="020F0502020204030204" pitchFamily="34" charset="-122"/>
                 <a:cs typeface="Montserrat" panose="00000500000000000000" charset="0"/>
               </a:rPr>
-              <a:t>Fraud missed — direct financial loss risk                   </a:t>
+              <a:t>Fraud missed — direct financial loss risk                       </a:t>
             </a:r>
             <a:r>
               <a:rPr lang="en-US" sz="1200" b="1" dirty="0">
@@ -22980,7 +22958,7 @@
                 <a:ea typeface="Calibri" panose="020F0502020204030204" pitchFamily="34" charset="-122"/>
                 <a:cs typeface="Montserrat" panose="00000500000000000000" charset="0"/>
               </a:rPr>
-              <a:t>5</a:t>
+              <a:t>9</a:t>
             </a:r>
             <a:endParaRPr lang="en-US" sz="1200" b="1" dirty="0">
               <a:solidFill>
@@ -22999,7 +22977,7 @@
           <p:cNvSpPr/>
           <p:nvPr>
             <p:custDataLst>
-              <p:tags r:id="rId11"/>
+              <p:tags r:id="rId10"/>
             </p:custDataLst>
           </p:nvPr>
         </p:nvSpPr>
@@ -23028,7 +23006,7 @@
           <p:cNvSpPr/>
           <p:nvPr>
             <p:custDataLst>
-              <p:tags r:id="rId12"/>
+              <p:tags r:id="rId11"/>
             </p:custDataLst>
           </p:nvPr>
         </p:nvSpPr>
@@ -23073,7 +23051,7 @@
           <p:cNvSpPr/>
           <p:nvPr>
             <p:custDataLst>
-              <p:tags r:id="rId13"/>
+              <p:tags r:id="rId12"/>
             </p:custDataLst>
           </p:nvPr>
         </p:nvSpPr>
@@ -23103,7 +23081,7 @@
                 <a:ea typeface="Calibri" panose="020F0502020204030204" pitchFamily="34" charset="-122"/>
                 <a:cs typeface="Montserrat" panose="00000500000000000000" charset="0"/>
               </a:rPr>
-              <a:t>Fraud correctly caught by the model                                            </a:t>
+              <a:t>Fraud correctly caught by the model                                           </a:t>
             </a:r>
             <a:r>
               <a:rPr lang="en-US" sz="1000" b="1" dirty="0">
@@ -23114,7 +23092,7 @@
                 <a:ea typeface="Calibri" panose="020F0502020204030204" pitchFamily="34" charset="-122"/>
                 <a:cs typeface="Montserrat" panose="00000500000000000000" charset="0"/>
               </a:rPr>
-              <a:t>15</a:t>
+              <a:t>   27</a:t>
             </a:r>
             <a:endParaRPr lang="en-US" sz="1000" b="1" dirty="0">
               <a:solidFill>
@@ -23135,7 +23113,7 @@
         </p:nvSpPr>
         <p:spPr>
           <a:xfrm>
-            <a:off x="92710" y="1873250"/>
+            <a:off x="47625" y="2115185"/>
             <a:ext cx="1172845" cy="241935"/>
           </a:xfrm>
           <a:prstGeom prst="rect">
@@ -23318,6 +23296,28 @@
           </a:p>
         </p:txBody>
       </p:sp>
+      <p:pic>
+        <p:nvPicPr>
+          <p:cNvPr id="1" name="Picture 0"/>
+          <p:cNvPicPr/>
+          <p:nvPr/>
+        </p:nvPicPr>
+        <p:blipFill>
+          <a:blip r:embed="rId13"/>
+          <a:stretch>
+            <a:fillRect/>
+          </a:stretch>
+        </p:blipFill>
+        <p:spPr>
+          <a:xfrm>
+            <a:off x="1306957" y="1269111"/>
+            <a:ext cx="4791456" cy="3950208"/>
+          </a:xfrm>
+          <a:prstGeom prst="rect">
+            <a:avLst/>
+          </a:prstGeom>
+        </p:spPr>
+      </p:pic>
     </p:spTree>
   </p:cSld>
   <p:clrMapOvr>
@@ -26857,7 +26857,7 @@
       </p:sp>
       <p:sp>
         <p:nvSpPr>
-          <p:cNvPr id="1" name="Google Shape;208;p28"/>
+          <p:cNvPr id="3" name="Google Shape;208;p28"/>
           <p:cNvSpPr txBox="1"/>
           <p:nvPr/>
         </p:nvSpPr>

--- a/ShraddhaTiwari - Final Presentation.pptx
+++ b/ShraddhaTiwari - Final Presentation.pptx
@@ -23298,7 +23298,7 @@
       </p:sp>
       <p:pic>
         <p:nvPicPr>
-          <p:cNvPr id="1" name="Picture 0"/>
+          <p:cNvPr id="2" name="Picture 1"/>
           <p:cNvPicPr/>
           <p:nvPr/>
         </p:nvPicPr>
@@ -24814,7 +24814,7 @@
           </p:nvPr>
         </p:nvGraphicFramePr>
         <p:xfrm>
-          <a:off x="853440" y="1546225"/>
+          <a:off x="695325" y="1859280"/>
           <a:ext cx="10205085" cy="3413125"/>
         </p:xfrm>
         <a:graphic>
@@ -24836,7 +24836,7 @@
                           <a:latin typeface="Montserrat" panose="00000500000000000000" charset="0"/>
                           <a:cs typeface="Montserrat" panose="00000500000000000000" charset="0"/>
                         </a:rPr>
-                        <a:t>Case</a:t>
+                        <a:t>Threshold</a:t>
                       </a:r>
                       <a:endParaRPr lang="en-US" altLang="zh-CN" sz="1800" b="1">
                         <a:latin typeface="Montserrat" panose="00000500000000000000" charset="0"/>
@@ -24869,7 +24869,7 @@
                           <a:latin typeface="Montserrat" panose="00000500000000000000" charset="0"/>
                           <a:cs typeface="Montserrat" panose="00000500000000000000" charset="0"/>
                         </a:rPr>
-                        <a:t>Meaning</a:t>
+                        <a:t>Behavior</a:t>
                       </a:r>
                       <a:endParaRPr lang="en-US" altLang="zh-CN" sz="1800" b="1">
                         <a:latin typeface="Montserrat" panose="00000500000000000000" charset="0"/>
@@ -24933,13 +24933,13 @@
                     <a:bodyPr/>
                     <a:p>
                       <a:r>
-                        <a:rPr lang="en-US" altLang="zh-CN" sz="1800">
+                        <a:rPr lang="en-US" altLang="zh-CN" sz="1400">
                           <a:latin typeface="Montserrat" panose="00000500000000000000" charset="0"/>
                           <a:cs typeface="Montserrat" panose="00000500000000000000" charset="0"/>
                         </a:rPr>
-                        <a:t>FN (Missed Fraud)</a:t>
+                        <a:t>Low (0.1)</a:t>
                       </a:r>
-                      <a:endParaRPr lang="en-US" altLang="zh-CN" sz="1800">
+                      <a:endParaRPr lang="en-US" altLang="zh-CN" sz="1400">
                         <a:latin typeface="Montserrat" panose="00000500000000000000" charset="0"/>
                         <a:cs typeface="Montserrat" panose="00000500000000000000" charset="0"/>
                       </a:endParaRPr>
@@ -24966,13 +24966,13 @@
                     <a:bodyPr/>
                     <a:p>
                       <a:r>
-                        <a:rPr lang="en-US" altLang="zh-CN" sz="1800">
+                        <a:rPr lang="en-US" altLang="zh-CN" sz="1400">
                           <a:latin typeface="Montserrat" panose="00000500000000000000" charset="0"/>
                           <a:cs typeface="Montserrat" panose="00000500000000000000" charset="0"/>
                         </a:rPr>
-                        <a:t>Fraud allowed</a:t>
+                        <a:t>Too strict</a:t>
                       </a:r>
-                      <a:endParaRPr lang="en-US" altLang="zh-CN" sz="1800">
+                      <a:endParaRPr lang="en-US" altLang="zh-CN" sz="1400">
                         <a:latin typeface="Montserrat" panose="00000500000000000000" charset="0"/>
                         <a:cs typeface="Montserrat" panose="00000500000000000000" charset="0"/>
                       </a:endParaRPr>
@@ -24999,20 +24999,20 @@
                     <a:bodyPr/>
                     <a:p>
                       <a:r>
-                        <a:rPr lang="zh-CN" altLang="en-US" sz="1800">
+                        <a:rPr lang="en-US" altLang="zh-CN" sz="1400">
                           <a:latin typeface="Montserrat" panose="00000500000000000000" charset="0"/>
                           <a:cs typeface="Montserrat" panose="00000500000000000000" charset="0"/>
                         </a:rPr>
-                        <a:t>🔴 </a:t>
+                        <a:t>Huge customer loss </a:t>
                       </a:r>
                       <a:r>
-                        <a:rPr lang="en-US" altLang="zh-CN" sz="1800">
+                        <a:rPr lang="zh-CN" altLang="en-US" sz="1400">
                           <a:latin typeface="Montserrat" panose="00000500000000000000" charset="0"/>
                           <a:cs typeface="Montserrat" panose="00000500000000000000" charset="0"/>
                         </a:rPr>
-                        <a:t>Huge Loss</a:t>
+                        <a:t>💸</a:t>
                       </a:r>
-                      <a:endParaRPr lang="en-US" altLang="zh-CN" sz="1800">
+                      <a:endParaRPr lang="zh-CN" altLang="en-US" sz="1400">
                         <a:latin typeface="Montserrat" panose="00000500000000000000" charset="0"/>
                         <a:cs typeface="Montserrat" panose="00000500000000000000" charset="0"/>
                       </a:endParaRPr>
@@ -25041,13 +25041,13 @@
                     <a:bodyPr/>
                     <a:p>
                       <a:r>
-                        <a:rPr lang="en-US" altLang="zh-CN" sz="1800">
+                        <a:rPr lang="en-US" altLang="zh-CN" sz="1400">
                           <a:latin typeface="Montserrat" panose="00000500000000000000" charset="0"/>
                           <a:cs typeface="Montserrat" panose="00000500000000000000" charset="0"/>
                         </a:rPr>
-                        <a:t>FP (Blocked Genuine)</a:t>
+                        <a:t>Medium (0.5)</a:t>
                       </a:r>
-                      <a:endParaRPr lang="en-US" altLang="zh-CN" sz="1800">
+                      <a:endParaRPr lang="en-US" altLang="zh-CN" sz="1400">
                         <a:latin typeface="Montserrat" panose="00000500000000000000" charset="0"/>
                         <a:cs typeface="Montserrat" panose="00000500000000000000" charset="0"/>
                       </a:endParaRPr>
@@ -25074,13 +25074,13 @@
                     <a:bodyPr/>
                     <a:p>
                       <a:r>
-                        <a:rPr lang="en-US" altLang="zh-CN" sz="1800">
+                        <a:rPr lang="en-US" altLang="zh-CN" sz="1400">
                           <a:latin typeface="Montserrat" panose="00000500000000000000" charset="0"/>
                           <a:cs typeface="Montserrat" panose="00000500000000000000" charset="0"/>
                         </a:rPr>
-                        <a:t>Customer blocked</a:t>
+                        <a:t>Balanced</a:t>
                       </a:r>
-                      <a:endParaRPr lang="en-US" altLang="zh-CN" sz="1800">
+                      <a:endParaRPr lang="en-US" altLang="zh-CN" sz="1400">
                         <a:latin typeface="Montserrat" panose="00000500000000000000" charset="0"/>
                         <a:cs typeface="Montserrat" panose="00000500000000000000" charset="0"/>
                       </a:endParaRPr>
@@ -25107,20 +25107,13 @@
                     <a:bodyPr/>
                     <a:p>
                       <a:r>
-                        <a:rPr lang="zh-CN" altLang="en-US" sz="1800">
+                        <a:rPr lang="en-US" altLang="zh-CN" sz="1400">
                           <a:latin typeface="Montserrat" panose="00000500000000000000" charset="0"/>
                           <a:cs typeface="Montserrat" panose="00000500000000000000" charset="0"/>
                         </a:rPr>
-                        <a:t>🟡 </a:t>
+                        <a:t>Moderate cost</a:t>
                       </a:r>
-                      <a:r>
-                        <a:rPr lang="en-US" altLang="zh-CN" sz="1800">
-                          <a:latin typeface="Montserrat" panose="00000500000000000000" charset="0"/>
-                          <a:cs typeface="Montserrat" panose="00000500000000000000" charset="0"/>
-                        </a:rPr>
-                        <a:t>Lost revenue</a:t>
-                      </a:r>
-                      <a:endParaRPr lang="en-US" altLang="zh-CN" sz="1800">
+                      <a:endParaRPr lang="en-US" altLang="zh-CN" sz="1400">
                         <a:latin typeface="Montserrat" panose="00000500000000000000" charset="0"/>
                         <a:cs typeface="Montserrat" panose="00000500000000000000" charset="0"/>
                       </a:endParaRPr>
@@ -25149,13 +25142,13 @@
                     <a:bodyPr/>
                     <a:p>
                       <a:r>
-                        <a:rPr lang="en-US" altLang="zh-CN" sz="1800">
+                        <a:rPr lang="en-US" altLang="zh-CN" sz="1400">
                           <a:latin typeface="Montserrat" panose="00000500000000000000" charset="0"/>
                           <a:cs typeface="Montserrat" panose="00000500000000000000" charset="0"/>
                         </a:rPr>
-                        <a:t>TP</a:t>
+                        <a:t>High (0.9)</a:t>
                       </a:r>
-                      <a:endParaRPr lang="en-US" altLang="zh-CN" sz="1800">
+                      <a:endParaRPr lang="en-US" altLang="zh-CN" sz="1400">
                         <a:latin typeface="Montserrat" panose="00000500000000000000" charset="0"/>
                         <a:cs typeface="Montserrat" panose="00000500000000000000" charset="0"/>
                       </a:endParaRPr>
@@ -25182,13 +25175,13 @@
                     <a:bodyPr/>
                     <a:p>
                       <a:r>
-                        <a:rPr lang="en-US" altLang="zh-CN" sz="1800">
+                        <a:rPr lang="en-US" altLang="zh-CN" sz="1400">
                           <a:latin typeface="Montserrat" panose="00000500000000000000" charset="0"/>
                           <a:cs typeface="Montserrat" panose="00000500000000000000" charset="0"/>
                         </a:rPr>
-                        <a:t>Fraud stopped</a:t>
+                        <a:t>Lenient</a:t>
                       </a:r>
-                      <a:endParaRPr lang="en-US" altLang="zh-CN" sz="1800">
+                      <a:endParaRPr lang="en-US" altLang="zh-CN" sz="1400">
                         <a:latin typeface="Montserrat" panose="00000500000000000000" charset="0"/>
                         <a:cs typeface="Montserrat" panose="00000500000000000000" charset="0"/>
                       </a:endParaRPr>
@@ -25215,20 +25208,13 @@
                     <a:bodyPr/>
                     <a:p>
                       <a:r>
-                        <a:rPr lang="zh-CN" altLang="en-US" sz="1800">
+                        <a:rPr lang="en-US" altLang="zh-CN" sz="1400">
                           <a:latin typeface="Montserrat" panose="00000500000000000000" charset="0"/>
                           <a:cs typeface="Montserrat" panose="00000500000000000000" charset="0"/>
                         </a:rPr>
-                        <a:t>🟢 </a:t>
+                        <a:t>Minimum cost ✅</a:t>
                       </a:r>
-                      <a:r>
-                        <a:rPr lang="en-US" altLang="zh-CN" sz="1800">
-                          <a:latin typeface="Montserrat" panose="00000500000000000000" charset="0"/>
-                          <a:cs typeface="Montserrat" panose="00000500000000000000" charset="0"/>
-                        </a:rPr>
-                        <a:t>Saved money</a:t>
-                      </a:r>
-                      <a:endParaRPr lang="en-US" altLang="zh-CN" sz="1800">
+                      <a:endParaRPr lang="en-US" altLang="zh-CN" sz="1400">
                         <a:latin typeface="Montserrat" panose="00000500000000000000" charset="0"/>
                         <a:cs typeface="Montserrat" panose="00000500000000000000" charset="0"/>
                       </a:endParaRPr>
@@ -25257,13 +25243,13 @@
                     <a:bodyPr/>
                     <a:p>
                       <a:r>
-                        <a:rPr lang="en-US" altLang="zh-CN" sz="1800">
+                        <a:rPr lang="en-US" altLang="zh-CN" sz="1400">
                           <a:latin typeface="Montserrat" panose="00000500000000000000" charset="0"/>
                           <a:cs typeface="Montserrat" panose="00000500000000000000" charset="0"/>
                         </a:rPr>
-                        <a:t>TN</a:t>
+                        <a:t>Threshold</a:t>
                       </a:r>
-                      <a:endParaRPr lang="en-US" altLang="zh-CN" sz="1800">
+                      <a:endParaRPr lang="en-US" altLang="zh-CN" sz="1400">
                         <a:latin typeface="Montserrat" panose="00000500000000000000" charset="0"/>
                         <a:cs typeface="Montserrat" panose="00000500000000000000" charset="0"/>
                       </a:endParaRPr>
@@ -25290,13 +25276,13 @@
                     <a:bodyPr/>
                     <a:p>
                       <a:r>
-                        <a:rPr lang="en-US" altLang="zh-CN" sz="1800">
+                        <a:rPr lang="en-US" altLang="zh-CN" sz="1400">
                           <a:latin typeface="Montserrat" panose="00000500000000000000" charset="0"/>
                           <a:cs typeface="Montserrat" panose="00000500000000000000" charset="0"/>
                         </a:rPr>
-                        <a:t>Normal</a:t>
+                        <a:t>Behavior</a:t>
                       </a:r>
-                      <a:endParaRPr lang="en-US" altLang="zh-CN" sz="1800">
+                      <a:endParaRPr lang="en-US" altLang="zh-CN" sz="1400">
                         <a:latin typeface="Montserrat" panose="00000500000000000000" charset="0"/>
                         <a:cs typeface="Montserrat" panose="00000500000000000000" charset="0"/>
                       </a:endParaRPr>
@@ -25323,13 +25309,13 @@
                     <a:bodyPr/>
                     <a:p>
                       <a:r>
-                        <a:rPr lang="en-US" altLang="zh-CN" sz="1800">
+                        <a:rPr lang="en-US" altLang="zh-CN" sz="1400">
                           <a:latin typeface="Montserrat" panose="00000500000000000000" charset="0"/>
                           <a:cs typeface="Montserrat" panose="00000500000000000000" charset="0"/>
                         </a:rPr>
-                        <a:t>No impact</a:t>
+                        <a:t>Cost Impact</a:t>
                       </a:r>
-                      <a:endParaRPr lang="en-US" altLang="zh-CN" sz="1800">
+                      <a:endParaRPr lang="en-US" altLang="zh-CN" sz="1400">
                         <a:latin typeface="Montserrat" panose="00000500000000000000" charset="0"/>
                         <a:cs typeface="Montserrat" panose="00000500000000000000" charset="0"/>
                       </a:endParaRPr>
@@ -25926,7 +25912,7 @@
       </p:sp>
       <p:pic>
         <p:nvPicPr>
-          <p:cNvPr id="2" name="Picture 1"/>
+          <p:cNvPr id="1" name="Picture 0"/>
           <p:cNvPicPr>
             <a:picLocks noChangeAspect="1"/>
           </p:cNvPicPr>
@@ -25940,8 +25926,8 @@
         </p:blipFill>
         <p:spPr>
           <a:xfrm>
-            <a:off x="601980" y="1720850"/>
-            <a:ext cx="9010015" cy="4391025"/>
+            <a:off x="880110" y="1724025"/>
+            <a:ext cx="8840470" cy="4154805"/>
           </a:xfrm>
           <a:prstGeom prst="rect">
             <a:avLst/>
@@ -26766,30 +26752,6 @@
           </a:p>
         </p:txBody>
       </p:sp>
-      <p:pic>
-        <p:nvPicPr>
-          <p:cNvPr id="2" name="Picture 1"/>
-          <p:cNvPicPr>
-            <a:picLocks noChangeAspect="1"/>
-          </p:cNvPicPr>
-          <p:nvPr/>
-        </p:nvPicPr>
-        <p:blipFill>
-          <a:blip r:embed="rId1"/>
-          <a:stretch>
-            <a:fillRect/>
-          </a:stretch>
-        </p:blipFill>
-        <p:spPr>
-          <a:xfrm>
-            <a:off x="623570" y="1316355"/>
-            <a:ext cx="5936615" cy="4913630"/>
-          </a:xfrm>
-          <a:prstGeom prst="rect">
-            <a:avLst/>
-          </a:prstGeom>
-        </p:spPr>
-      </p:pic>
       <p:sp>
         <p:nvSpPr>
           <p:cNvPr id="208" name="Google Shape;208;p28"/>
@@ -26799,7 +26761,7 @@
         <p:spPr>
           <a:xfrm>
             <a:off x="6805295" y="1489710"/>
-            <a:ext cx="5027930" cy="1656715"/>
+            <a:ext cx="5027930" cy="1718310"/>
           </a:xfrm>
           <a:prstGeom prst="rect">
             <a:avLst/>
@@ -26822,28 +26784,18 @@
               <a:buNone/>
             </a:pPr>
             <a:r>
-              <a:rPr lang="en-US" altLang="en-US" sz="1800">
+              <a:rPr lang="en-US" altLang="en-US" sz="1800" b="0" i="0" u="none" strike="noStrike" cap="none">
                 <a:solidFill>
                   <a:schemeClr val="dk1"/>
                 </a:solidFill>
                 <a:latin typeface="Montserrat" panose="00000500000000000000" charset="0"/>
+                <a:ea typeface="Arial" panose="020B0604020202020204"/>
                 <a:cs typeface="Montserrat" panose="00000500000000000000" charset="0"/>
-                <a:sym typeface="+mn-ea"/>
+                <a:sym typeface="Arial" panose="020B0604020202020204"/>
               </a:rPr>
-              <a:t>Cost curve shows optimal threshold minimizing financial loss by balancing false positives and false negatives in fraud detection system</a:t>
+              <a:t>Cost decreases with higher threshold, indicating false positives are more expensive than missed fraud, making higher threshold optimal for minimizing losses.</a:t>
             </a:r>
-            <a:r>
-              <a:rPr lang="en-US" sz="1800">
-                <a:solidFill>
-                  <a:schemeClr val="dk1"/>
-                </a:solidFill>
-                <a:latin typeface="Montserrat" panose="00000500000000000000" charset="0"/>
-                <a:cs typeface="Montserrat" panose="00000500000000000000" charset="0"/>
-                <a:sym typeface="+mn-ea"/>
-              </a:rPr>
-              <a:t>ance.</a:t>
-            </a:r>
-            <a:endParaRPr lang="en-US" sz="1800" b="0" i="0" u="none" strike="noStrike" cap="none">
+            <a:endParaRPr lang="en-US" altLang="en-US" sz="1800" b="0" i="0" u="none" strike="noStrike" cap="none">
               <a:solidFill>
                 <a:schemeClr val="dk1"/>
               </a:solidFill>
@@ -26896,7 +26848,7 @@
                 <a:cs typeface="Montserrat" panose="00000500000000000000" charset="0"/>
                 <a:sym typeface="Arial" panose="020B0604020202020204"/>
               </a:rPr>
-              <a:t>We optimized threshold based on cost instead of accuracy, reducing total fraud-related financial loss and improving business profitability.</a:t>
+              <a:t>Cost analysis revealed that false positives had higher financial impact than fraud loss, so we optimized threshold to maximize revenue</a:t>
             </a:r>
             <a:endParaRPr lang="en-US" altLang="en-US" sz="1800" b="1" i="0" u="none" strike="noStrike" cap="none">
               <a:solidFill>
@@ -26910,6 +26862,28 @@
           </a:p>
         </p:txBody>
       </p:sp>
+      <p:pic>
+        <p:nvPicPr>
+          <p:cNvPr id="1" name="Picture 0"/>
+          <p:cNvPicPr/>
+          <p:nvPr/>
+        </p:nvPicPr>
+        <p:blipFill>
+          <a:blip r:embed="rId1"/>
+          <a:stretch>
+            <a:fillRect/>
+          </a:stretch>
+        </p:blipFill>
+        <p:spPr>
+          <a:xfrm>
+            <a:off x="263525" y="1412875"/>
+            <a:ext cx="6356350" cy="4789170"/>
+          </a:xfrm>
+          <a:prstGeom prst="rect">
+            <a:avLst/>
+          </a:prstGeom>
+        </p:spPr>
+      </p:pic>
     </p:spTree>
   </p:cSld>
   <p:clrMapOvr>
